--- a/docs/presentation/Friday-Voice-Agent.pptx
+++ b/docs/presentation/Friday-Voice-Agent.pptx
@@ -3093,6 +3093,14 @@
 <file path=ppt/slides/slide1.xml><?xml version="1.0" encoding="utf-8"?>
 <p:sld xmlns:a="http://schemas.openxmlformats.org/drawingml/2006/main" xmlns:p="http://schemas.openxmlformats.org/presentationml/2006/main" xmlns:r="http://schemas.openxmlformats.org/officeDocument/2006/relationships">
   <p:cSld>
+    <p:bg>
+      <p:bgPr>
+        <a:solidFill>
+          <a:srgbClr val="0A0A0A"/>
+        </a:solidFill>
+        <a:effectLst/>
+      </p:bgPr>
+    </p:bg>
     <p:spTree>
       <p:nvGrpSpPr>
         <p:cNvPr id="1" name=""/>
@@ -3108,8 +3116,8 @@
         </p:nvSpPr>
         <p:spPr>
           <a:xfrm>
-            <a:off x="548640" y="1828800"/>
-            <a:ext cx="10972800" cy="1371600"/>
+            <a:off x="685800" y="2103120"/>
+            <a:ext cx="10515600" cy="1280160"/>
           </a:xfrm>
           <a:prstGeom prst="rect">
             <a:avLst/>
@@ -3117,15 +3125,15 @@
           <a:noFill/>
         </p:spPr>
         <p:txBody>
-          <a:bodyPr wrap="none">
+          <a:bodyPr wrap="square">
             <a:spAutoFit/>
           </a:bodyPr>
           <a:lstStyle/>
           <a:p>
-            <a:pPr>
-              <a:defRPr sz="4000" b="1">
-                <a:solidFill>
-                  <a:srgbClr val="0F172A"/>
+            <a:pPr algn="l">
+              <a:defRPr sz="5200" b="1">
+                <a:solidFill>
+                  <a:srgbClr val="FAFAFA"/>
                 </a:solidFill>
               </a:defRPr>
             </a:pPr>
@@ -3143,8 +3151,8 @@
         </p:nvSpPr>
         <p:spPr>
           <a:xfrm>
-            <a:off x="548640" y="2926080"/>
-            <a:ext cx="10972800" cy="914400"/>
+            <a:off x="685800" y="3063240"/>
+            <a:ext cx="10515600" cy="1097280"/>
           </a:xfrm>
           <a:prstGeom prst="rect">
             <a:avLst/>
@@ -3158,14 +3166,14 @@
           <a:lstStyle/>
           <a:p>
             <a:pPr>
-              <a:defRPr sz="2200">
-                <a:solidFill>
-                  <a:srgbClr val="64748B"/>
+              <a:defRPr sz="2400">
+                <a:solidFill>
+                  <a:srgbClr val="A1A1AA"/>
                 </a:solidFill>
               </a:defRPr>
             </a:pPr>
             <a:r>
-              <a:t>Voice-first control for GitHub repositories</a:t>
+              <a:t>Stay in control when code—and threats—move faster than review.</a:t>
             </a:r>
           </a:p>
         </p:txBody>
@@ -3181,6 +3189,14 @@
 <file path=ppt/slides/slide10.xml><?xml version="1.0" encoding="utf-8"?>
 <p:sld xmlns:a="http://schemas.openxmlformats.org/drawingml/2006/main" xmlns:p="http://schemas.openxmlformats.org/presentationml/2006/main" xmlns:r="http://schemas.openxmlformats.org/officeDocument/2006/relationships">
   <p:cSld>
+    <p:bg>
+      <p:bgPr>
+        <a:solidFill>
+          <a:srgbClr val="0A0A0A"/>
+        </a:solidFill>
+        <a:effectLst/>
+      </p:bgPr>
+    </p:bg>
     <p:spTree>
       <p:nvGrpSpPr>
         <p:cNvPr id="1" name=""/>
@@ -3196,8 +3212,8 @@
         </p:nvSpPr>
         <p:spPr>
           <a:xfrm>
-            <a:off x="548640" y="365760"/>
-            <a:ext cx="10972800" cy="731520"/>
+            <a:off x="685800" y="502920"/>
+            <a:ext cx="10515600" cy="1280160"/>
           </a:xfrm>
           <a:prstGeom prst="rect">
             <a:avLst/>
@@ -3205,20 +3221,20 @@
           <a:noFill/>
         </p:spPr>
         <p:txBody>
-          <a:bodyPr wrap="none">
+          <a:bodyPr wrap="square">
             <a:spAutoFit/>
           </a:bodyPr>
           <a:lstStyle/>
           <a:p>
-            <a:pPr>
-              <a:defRPr sz="2800" b="1">
-                <a:solidFill>
-                  <a:srgbClr val="38BDF8"/>
+            <a:pPr algn="l">
+              <a:defRPr sz="3200" b="1">
+                <a:solidFill>
+                  <a:srgbClr val="F97316"/>
                 </a:solidFill>
               </a:defRPr>
             </a:pPr>
             <a:r>
-              <a:t>Testing</a:t>
+              <a:t>Stack</a:t>
             </a:r>
           </a:p>
         </p:txBody>
@@ -3231,8 +3247,8 @@
         </p:nvSpPr>
         <p:spPr>
           <a:xfrm>
-            <a:off x="731520" y="1188720"/>
-            <a:ext cx="10515600" cy="5029200"/>
+            <a:off x="777240" y="1325880"/>
+            <a:ext cx="10241280" cy="4754880"/>
           </a:xfrm>
           <a:prstGeom prst="rect">
             <a:avLst/>
@@ -3240,32 +3256,53 @@
           <a:noFill/>
         </p:spPr>
         <p:txBody>
-          <a:bodyPr wrap="none">
+          <a:bodyPr wrap="square">
             <a:spAutoFit/>
           </a:bodyPr>
           <a:lstStyle/>
           <a:p>
             <a:pPr>
-              <a:defRPr sz="1800"/>
+              <a:spcAft>
+                <a:spcPts val="1400"/>
+              </a:spcAft>
+              <a:defRPr sz="2000">
+                <a:solidFill>
+                  <a:srgbClr val="FAFAFA"/>
+                </a:solidFill>
+              </a:defRPr>
             </a:pPr>
             <a:r>
-              <a:t>python test_friday.py</a:t>
+              <a:t>FastAPI · AssemblyAI Voice + STT + LLM Gateway</a:t>
             </a:r>
           </a:p>
           <a:p>
             <a:pPr>
-              <a:defRPr sz="1800"/>
+              <a:spcAft>
+                <a:spcPts val="1400"/>
+              </a:spcAft>
+              <a:defRPr sz="2000">
+                <a:solidFill>
+                  <a:srgbClr val="FAFAFA"/>
+                </a:solidFill>
+              </a:defRPr>
             </a:pPr>
             <a:r>
-              <a:t>docs/TEST_QUESTIONS.md — 37 scenarios</a:t>
+              <a:t>GitHub REST / OAuth · D3 map ingest</a:t>
             </a:r>
           </a:p>
           <a:p>
             <a:pPr>
-              <a:defRPr sz="1800"/>
+              <a:spcAft>
+                <a:spcPts val="1400"/>
+              </a:spcAft>
+              <a:defRPr sz="2000">
+                <a:solidFill>
+                  <a:srgbClr val="FAFAFA"/>
+                </a:solidFill>
+              </a:defRPr>
             </a:pPr>
             <a:r>
-              <a:t>Voice and Ask parity tests</a:t>
+              <a:t>Deployed on Google Cloud Run</a:t>
             </a:r>
           </a:p>
         </p:txBody>
@@ -3281,6 +3318,14 @@
 <file path=ppt/slides/slide11.xml><?xml version="1.0" encoding="utf-8"?>
 <p:sld xmlns:a="http://schemas.openxmlformats.org/drawingml/2006/main" xmlns:p="http://schemas.openxmlformats.org/presentationml/2006/main" xmlns:r="http://schemas.openxmlformats.org/officeDocument/2006/relationships">
   <p:cSld>
+    <p:bg>
+      <p:bgPr>
+        <a:solidFill>
+          <a:srgbClr val="0A0A0A"/>
+        </a:solidFill>
+        <a:effectLst/>
+      </p:bgPr>
+    </p:bg>
     <p:spTree>
       <p:nvGrpSpPr>
         <p:cNvPr id="1" name=""/>
@@ -3296,8 +3341,8 @@
         </p:nvSpPr>
         <p:spPr>
           <a:xfrm>
-            <a:off x="548640" y="365760"/>
-            <a:ext cx="10972800" cy="731520"/>
+            <a:off x="685800" y="1828800"/>
+            <a:ext cx="10515600" cy="1280160"/>
           </a:xfrm>
           <a:prstGeom prst="rect">
             <a:avLst/>
@@ -3305,20 +3350,20 @@
           <a:noFill/>
         </p:spPr>
         <p:txBody>
-          <a:bodyPr wrap="none">
+          <a:bodyPr wrap="square">
             <a:spAutoFit/>
           </a:bodyPr>
           <a:lstStyle/>
           <a:p>
-            <a:pPr>
-              <a:defRPr sz="2800" b="1">
-                <a:solidFill>
-                  <a:srgbClr val="38BDF8"/>
+            <a:pPr algn="l">
+              <a:defRPr sz="4000" b="1">
+                <a:solidFill>
+                  <a:srgbClr val="F97316"/>
                 </a:solidFill>
               </a:defRPr>
             </a:pPr>
             <a:r>
-              <a:t>Config</a:t>
+              <a:t>Try it</a:t>
             </a:r>
           </a:p>
         </p:txBody>
@@ -3331,8 +3376,8 @@
         </p:nvSpPr>
         <p:spPr>
           <a:xfrm>
-            <a:off x="731520" y="1188720"/>
-            <a:ext cx="10515600" cy="5029200"/>
+            <a:off x="685800" y="2743200"/>
+            <a:ext cx="10515600" cy="1097280"/>
           </a:xfrm>
           <a:prstGeom prst="rect">
             <a:avLst/>
@@ -3346,26 +3391,23 @@
           <a:lstStyle/>
           <a:p>
             <a:pPr>
-              <a:defRPr sz="1800"/>
+              <a:defRPr sz="2000">
+                <a:solidFill>
+                  <a:srgbClr val="A1A1AA"/>
+                </a:solidFill>
+              </a:defRPr>
             </a:pPr>
             <a:r>
-              <a:t>ASSEMBLYAI_API_KEY, GitHub token/OAuth</a:t>
-            </a:r>
-          </a:p>
-          <a:p>
-            <a:pPr>
-              <a:defRPr sz="1800"/>
-            </a:pPr>
-            <a:r>
-              <a:t>FRIDAY_GITHUB_GATEWAY=multi|all|off</a:t>
-            </a:r>
-          </a:p>
-          <a:p>
-            <a:pPr>
-              <a:defRPr sz="1800"/>
-            </a:pPr>
-            <a:r>
-              <a:t>AGENT_LLM_PROVIDER=assemblyai|ifm</a:t>
+              <a:t>https://friday-voice-agent-147606977567.us-central1.run.app</a:t>
+            </a:r>
+            <a:br/>
+            <a:r>
+              <a:t>?repo=owner/name</a:t>
+            </a:r>
+            <a:br/>
+            <a:br/>
+            <a:r>
+              <a:t>Hold the mic · Explain the map · Check the latest commit</a:t>
             </a:r>
           </a:p>
         </p:txBody>
@@ -3381,6 +3423,14 @@
 <file path=ppt/slides/slide12.xml><?xml version="1.0" encoding="utf-8"?>
 <p:sld xmlns:a="http://schemas.openxmlformats.org/drawingml/2006/main" xmlns:p="http://schemas.openxmlformats.org/presentationml/2006/main" xmlns:r="http://schemas.openxmlformats.org/officeDocument/2006/relationships">
   <p:cSld>
+    <p:bg>
+      <p:bgPr>
+        <a:solidFill>
+          <a:srgbClr val="0A0A0A"/>
+        </a:solidFill>
+        <a:effectLst/>
+      </p:bgPr>
+    </p:bg>
     <p:spTree>
       <p:nvGrpSpPr>
         <p:cNvPr id="1" name=""/>
@@ -3396,8 +3446,8 @@
         </p:nvSpPr>
         <p:spPr>
           <a:xfrm>
-            <a:off x="548640" y="365760"/>
-            <a:ext cx="10972800" cy="731520"/>
+            <a:off x="685800" y="1737360"/>
+            <a:ext cx="10515600" cy="1280160"/>
           </a:xfrm>
           <a:prstGeom prst="rect">
             <a:avLst/>
@@ -3405,20 +3455,20 @@
           <a:noFill/>
         </p:spPr>
         <p:txBody>
-          <a:bodyPr wrap="none">
+          <a:bodyPr wrap="square">
             <a:spAutoFit/>
           </a:bodyPr>
           <a:lstStyle/>
           <a:p>
-            <a:pPr>
-              <a:defRPr sz="2800" b="1">
-                <a:solidFill>
-                  <a:srgbClr val="38BDF8"/>
+            <a:pPr algn="l">
+              <a:defRPr sz="3600" b="1">
+                <a:solidFill>
+                  <a:srgbClr val="FAFAFA"/>
                 </a:solidFill>
               </a:defRPr>
             </a:pPr>
             <a:r>
-              <a:t>Reliability tradeoffs</a:t>
+              <a:t>Why now</a:t>
             </a:r>
           </a:p>
         </p:txBody>
@@ -3431,8 +3481,8 @@
         </p:nvSpPr>
         <p:spPr>
           <a:xfrm>
-            <a:off x="731520" y="1188720"/>
-            <a:ext cx="10515600" cy="5029200"/>
+            <a:off x="685800" y="2743200"/>
+            <a:ext cx="10515600" cy="1097280"/>
           </a:xfrm>
           <a:prstGeom prst="rect">
             <a:avLst/>
@@ -3446,34 +3496,18 @@
           <a:lstStyle/>
           <a:p>
             <a:pPr>
-              <a:defRPr sz="1800"/>
+              <a:defRPr sz="2200">
+                <a:solidFill>
+                  <a:srgbClr val="A1A1AA"/>
+                </a:solidFill>
+              </a:defRPr>
             </a:pPr>
             <a:r>
-              <a:t>Hybrid recommended: Jev for map, Gateway for GitHub</a:t>
-            </a:r>
-          </a:p>
-          <a:p>
-            <a:pPr>
-              <a:defRPr sz="1800"/>
-            </a:pPr>
-            <a:r>
-              <a:t>FRIDAY_GITHUB_GATEWAY=all for tutorial-like behavior</a:t>
-            </a:r>
-          </a:p>
-          <a:p>
-            <a:pPr>
-              <a:defRPr sz="1800"/>
-            </a:pPr>
-            <a:r>
-              <a:t>Dropping Jev needs full agent loop for map tools</a:t>
-            </a:r>
-          </a:p>
-          <a:p>
-            <a:pPr>
-              <a:defRPr sz="1800"/>
-            </a:pPr>
-            <a:r>
-              <a:t>Reference: Hands-On-AI-Engineering voice-github-agent</a:t>
+              <a:t>The window where humans still approve what ships is narrowing.</a:t>
+            </a:r>
+            <a:br/>
+            <a:r>
+              <a:t>Friday is how you keep orientation and consent in that window.</a:t>
             </a:r>
           </a:p>
         </p:txBody>
@@ -3489,6 +3523,14 @@
 <file path=ppt/slides/slide13.xml><?xml version="1.0" encoding="utf-8"?>
 <p:sld xmlns:a="http://schemas.openxmlformats.org/drawingml/2006/main" xmlns:p="http://schemas.openxmlformats.org/presentationml/2006/main" xmlns:r="http://schemas.openxmlformats.org/officeDocument/2006/relationships">
   <p:cSld>
+    <p:bg>
+      <p:bgPr>
+        <a:solidFill>
+          <a:srgbClr val="0A0A0A"/>
+        </a:solidFill>
+        <a:effectLst/>
+      </p:bgPr>
+    </p:bg>
     <p:spTree>
       <p:nvGrpSpPr>
         <p:cNvPr id="1" name=""/>
@@ -3504,8 +3546,8 @@
         </p:nvSpPr>
         <p:spPr>
           <a:xfrm>
-            <a:off x="548640" y="1828800"/>
-            <a:ext cx="10972800" cy="1371600"/>
+            <a:off x="685800" y="2286000"/>
+            <a:ext cx="10515600" cy="1280160"/>
           </a:xfrm>
           <a:prstGeom prst="rect">
             <a:avLst/>
@@ -3513,20 +3555,20 @@
           <a:noFill/>
         </p:spPr>
         <p:txBody>
-          <a:bodyPr wrap="none">
+          <a:bodyPr wrap="square">
             <a:spAutoFit/>
           </a:bodyPr>
           <a:lstStyle/>
           <a:p>
-            <a:pPr>
-              <a:defRPr sz="4000" b="1">
-                <a:solidFill>
-                  <a:srgbClr val="0F172A"/>
+            <a:pPr algn="l">
+              <a:defRPr sz="4800" b="1">
+                <a:solidFill>
+                  <a:srgbClr val="FAFAFA"/>
                 </a:solidFill>
               </a:defRPr>
             </a:pPr>
             <a:r>
-              <a:t>Thank you</a:t>
+              <a:t>Friday</a:t>
             </a:r>
           </a:p>
         </p:txBody>
@@ -3539,8 +3581,8 @@
         </p:nvSpPr>
         <p:spPr>
           <a:xfrm>
-            <a:off x="548640" y="2926080"/>
-            <a:ext cx="10972800" cy="914400"/>
+            <a:off x="685800" y="3108960"/>
+            <a:ext cx="10515600" cy="1097280"/>
           </a:xfrm>
           <a:prstGeom prst="rect">
             <a:avLst/>
@@ -3556,7 +3598,7 @@
             <a:pPr>
               <a:defRPr sz="2200">
                 <a:solidFill>
-                  <a:srgbClr val="64748B"/>
+                  <a:srgbClr val="A1A1AA"/>
                 </a:solidFill>
               </a:defRPr>
             </a:pPr>
@@ -3577,6 +3619,14 @@
 <file path=ppt/slides/slide2.xml><?xml version="1.0" encoding="utf-8"?>
 <p:sld xmlns:a="http://schemas.openxmlformats.org/drawingml/2006/main" xmlns:p="http://schemas.openxmlformats.org/presentationml/2006/main" xmlns:r="http://schemas.openxmlformats.org/officeDocument/2006/relationships">
   <p:cSld>
+    <p:bg>
+      <p:bgPr>
+        <a:solidFill>
+          <a:srgbClr val="0A0A0A"/>
+        </a:solidFill>
+        <a:effectLst/>
+      </p:bgPr>
+    </p:bg>
     <p:spTree>
       <p:nvGrpSpPr>
         <p:cNvPr id="1" name=""/>
@@ -3592,8 +3642,8 @@
         </p:nvSpPr>
         <p:spPr>
           <a:xfrm>
-            <a:off x="548640" y="1828800"/>
-            <a:ext cx="10972800" cy="1371600"/>
+            <a:off x="685800" y="1828800"/>
+            <a:ext cx="10515600" cy="1280160"/>
           </a:xfrm>
           <a:prstGeom prst="rect">
             <a:avLst/>
@@ -3601,20 +3651,20 @@
           <a:noFill/>
         </p:spPr>
         <p:txBody>
-          <a:bodyPr wrap="none">
+          <a:bodyPr wrap="square">
             <a:spAutoFit/>
           </a:bodyPr>
           <a:lstStyle/>
           <a:p>
-            <a:pPr>
-              <a:defRPr sz="4000" b="1">
-                <a:solidFill>
-                  <a:srgbClr val="0F172A"/>
+            <a:pPr algn="l">
+              <a:defRPr sz="3800" b="1">
+                <a:solidFill>
+                  <a:srgbClr val="FAFAFA"/>
                 </a:solidFill>
               </a:defRPr>
             </a:pPr>
             <a:r>
-              <a:t>The problem</a:t>
+              <a:t>We are in an existential squeeze.</a:t>
             </a:r>
           </a:p>
         </p:txBody>
@@ -3627,8 +3677,8 @@
         </p:nvSpPr>
         <p:spPr>
           <a:xfrm>
-            <a:off x="548640" y="2926080"/>
-            <a:ext cx="10972800" cy="914400"/>
+            <a:off x="685800" y="2926080"/>
+            <a:ext cx="10515600" cy="1097280"/>
           </a:xfrm>
           <a:prstGeom prst="rect">
             <a:avLst/>
@@ -3644,12 +3694,20 @@
             <a:pPr>
               <a:defRPr sz="2200">
                 <a:solidFill>
-                  <a:srgbClr val="64748B"/>
+                  <a:srgbClr val="A1A1AA"/>
                 </a:solidFill>
               </a:defRPr>
             </a:pPr>
             <a:r>
-              <a:t>Repos are large; keyboards and tabs slow triage</a:t>
+              <a:t>AI generates code at machine speed.</a:t>
+            </a:r>
+            <a:br/>
+            <a:r>
+              <a:t>Humans are still asked to review all of it.</a:t>
+            </a:r>
+            <a:br/>
+            <a:r>
+              <a:t>That math does not work.</a:t>
             </a:r>
           </a:p>
         </p:txBody>
@@ -3665,6 +3723,14 @@
 <file path=ppt/slides/slide3.xml><?xml version="1.0" encoding="utf-8"?>
 <p:sld xmlns:a="http://schemas.openxmlformats.org/drawingml/2006/main" xmlns:p="http://schemas.openxmlformats.org/presentationml/2006/main" xmlns:r="http://schemas.openxmlformats.org/officeDocument/2006/relationships">
   <p:cSld>
+    <p:bg>
+      <p:bgPr>
+        <a:solidFill>
+          <a:srgbClr val="0A0A0A"/>
+        </a:solidFill>
+        <a:effectLst/>
+      </p:bgPr>
+    </p:bg>
     <p:spTree>
       <p:nvGrpSpPr>
         <p:cNvPr id="1" name=""/>
@@ -3680,8 +3746,8 @@
         </p:nvSpPr>
         <p:spPr>
           <a:xfrm>
-            <a:off x="548640" y="365760"/>
-            <a:ext cx="10972800" cy="731520"/>
+            <a:off x="685800" y="502920"/>
+            <a:ext cx="10515600" cy="1280160"/>
           </a:xfrm>
           <a:prstGeom prst="rect">
             <a:avLst/>
@@ -3689,20 +3755,20 @@
           <a:noFill/>
         </p:spPr>
         <p:txBody>
-          <a:bodyPr wrap="none">
+          <a:bodyPr wrap="square">
             <a:spAutoFit/>
           </a:bodyPr>
           <a:lstStyle/>
           <a:p>
-            <a:pPr>
-              <a:defRPr sz="2800" b="1">
-                <a:solidFill>
-                  <a:srgbClr val="38BDF8"/>
+            <a:pPr algn="l">
+              <a:defRPr sz="3200" b="1">
+                <a:solidFill>
+                  <a:srgbClr val="F97316"/>
                 </a:solidFill>
               </a:defRPr>
             </a:pPr>
             <a:r>
-              <a:t>Solution</a:t>
+              <a:t>The review bottleneck</a:t>
             </a:r>
           </a:p>
         </p:txBody>
@@ -3715,8 +3781,8 @@
         </p:nvSpPr>
         <p:spPr>
           <a:xfrm>
-            <a:off x="731520" y="1188720"/>
-            <a:ext cx="10515600" cy="5029200"/>
+            <a:off x="777240" y="1325880"/>
+            <a:ext cx="10241280" cy="4754880"/>
           </a:xfrm>
           <a:prstGeom prst="rect">
             <a:avLst/>
@@ -3724,40 +3790,53 @@
           <a:noFill/>
         </p:spPr>
         <p:txBody>
-          <a:bodyPr wrap="none">
+          <a:bodyPr wrap="square">
             <a:spAutoFit/>
           </a:bodyPr>
           <a:lstStyle/>
           <a:p>
             <a:pPr>
-              <a:defRPr sz="1800"/>
+              <a:spcAft>
+                <a:spcPts val="1400"/>
+              </a:spcAft>
+              <a:defRPr sz="2000">
+                <a:solidFill>
+                  <a:srgbClr val="FAFAFA"/>
+                </a:solidFill>
+              </a:defRPr>
             </a:pPr>
             <a:r>
-              <a:t>Speak or type natural questions about an open repo</a:t>
+              <a:t>PR queues and diff mountains grow with every agent-assisted sprint</a:t>
             </a:r>
           </a:p>
           <a:p>
             <a:pPr>
-              <a:defRPr sz="1800"/>
+              <a:spcAft>
+                <a:spcPts val="1400"/>
+              </a:spcAft>
+              <a:defRPr sz="2000">
+                <a:solidFill>
+                  <a:srgbClr val="FAFAFA"/>
+                </a:solidFill>
+              </a:defRPr>
             </a:pPr>
             <a:r>
-              <a:t>Circle-pack map: entry points, core, hotspots</a:t>
+              <a:t>LGTM becomes survival, not assurance</a:t>
             </a:r>
           </a:p>
           <a:p>
             <a:pPr>
-              <a:defRPr sz="1800"/>
+              <a:spcAft>
+                <a:spcPts val="1400"/>
+              </a:spcAft>
+              <a:defRPr sz="2000">
+                <a:solidFill>
+                  <a:srgbClr val="FAFAFA"/>
+                </a:solidFill>
+              </a:defRPr>
             </a:pPr>
             <a:r>
-              <a:t>Read commits, issues, PRs; stage writes with confirmation</a:t>
-            </a:r>
-          </a:p>
-          <a:p>
-            <a:pPr>
-              <a:defRPr sz="1800"/>
-            </a:pPr>
-            <a:r>
-              <a:t>AssemblyAI Voice Agent for live conversation</a:t>
+              <a:t>Nobody holds architecture + history + issues in one head</a:t>
             </a:r>
           </a:p>
         </p:txBody>
@@ -3773,6 +3852,14 @@
 <file path=ppt/slides/slide4.xml><?xml version="1.0" encoding="utf-8"?>
 <p:sld xmlns:a="http://schemas.openxmlformats.org/drawingml/2006/main" xmlns:p="http://schemas.openxmlformats.org/presentationml/2006/main" xmlns:r="http://schemas.openxmlformats.org/officeDocument/2006/relationships">
   <p:cSld>
+    <p:bg>
+      <p:bgPr>
+        <a:solidFill>
+          <a:srgbClr val="0A0A0A"/>
+        </a:solidFill>
+        <a:effectLst/>
+      </p:bgPr>
+    </p:bg>
     <p:spTree>
       <p:nvGrpSpPr>
         <p:cNvPr id="1" name=""/>
@@ -3788,8 +3875,8 @@
         </p:nvSpPr>
         <p:spPr>
           <a:xfrm>
-            <a:off x="548640" y="365760"/>
-            <a:ext cx="10972800" cy="731520"/>
+            <a:off x="685800" y="502920"/>
+            <a:ext cx="10515600" cy="1280160"/>
           </a:xfrm>
           <a:prstGeom prst="rect">
             <a:avLst/>
@@ -3797,20 +3884,20 @@
           <a:noFill/>
         </p:spPr>
         <p:txBody>
-          <a:bodyPr wrap="none">
+          <a:bodyPr wrap="square">
             <a:spAutoFit/>
           </a:bodyPr>
           <a:lstStyle/>
           <a:p>
-            <a:pPr>
-              <a:defRPr sz="2800" b="1">
-                <a:solidFill>
-                  <a:srgbClr val="38BDF8"/>
+            <a:pPr algn="l">
+              <a:defRPr sz="3200" b="1">
+                <a:solidFill>
+                  <a:srgbClr val="F97316"/>
                 </a:solidFill>
               </a:defRPr>
             </a:pPr>
             <a:r>
-              <a:t>User experience</a:t>
+              <a:t>The security asymmetry</a:t>
             </a:r>
           </a:p>
         </p:txBody>
@@ -3823,8 +3910,8 @@
         </p:nvSpPr>
         <p:spPr>
           <a:xfrm>
-            <a:off x="731520" y="1188720"/>
-            <a:ext cx="10515600" cy="5029200"/>
+            <a:off x="777240" y="1325880"/>
+            <a:ext cx="10241280" cy="4754880"/>
           </a:xfrm>
           <a:prstGeom prst="rect">
             <a:avLst/>
@@ -3832,40 +3919,53 @@
           <a:noFill/>
         </p:spPr>
         <p:txBody>
-          <a:bodyPr wrap="none">
+          <a:bodyPr wrap="square">
             <a:spAutoFit/>
           </a:bodyPr>
           <a:lstStyle/>
           <a:p>
             <a:pPr>
-              <a:defRPr sz="1800"/>
+              <a:spcAft>
+                <a:spcPts val="1400"/>
+              </a:spcAft>
+              <a:defRPr sz="2000">
+                <a:solidFill>
+                  <a:srgbClr val="FAFAFA"/>
+                </a:solidFill>
+              </a:defRPr>
             </a:pPr>
             <a:r>
-              <a:t>Open localhost:5000/?repo=owner/name</a:t>
+              <a:t>AI finds vulnerabilities and unsafe patterns quickly</a:t>
             </a:r>
           </a:p>
           <a:p>
             <a:pPr>
-              <a:defRPr sz="1800"/>
+              <a:spcAft>
+                <a:spcPts val="1400"/>
+              </a:spcAft>
+              <a:defRPr sz="2000">
+                <a:solidFill>
+                  <a:srgbClr val="FAFAFA"/>
+                </a:solidFill>
+              </a:defRPr>
             </a:pPr>
             <a:r>
-              <a:t>Explore map; hold mic or Ctrl</a:t>
+              <a:t>Exploitation automates; understanding does not</a:t>
             </a:r>
           </a:p>
           <a:p>
             <a:pPr>
-              <a:defRPr sz="1800"/>
+              <a:spcAft>
+                <a:spcPts val="1400"/>
+              </a:spcAft>
+              <a:defRPr sz="2000">
+                <a:solidFill>
+                  <a:srgbClr val="FAFAFA"/>
+                </a:solidFill>
+              </a:defRPr>
             </a:pPr>
             <a:r>
-              <a:t>Ask landmarks, diffs, issues</a:t>
-            </a:r>
-          </a:p>
-          <a:p>
-            <a:pPr>
-              <a:defRPr sz="1800"/>
-            </a:pPr>
-            <a:r>
-              <a:t>Draft issue/comment then yes on a new turn</a:t>
+              <a:t>Ship fast without orientation → lose grip on what actually runs</a:t>
             </a:r>
           </a:p>
         </p:txBody>
@@ -3881,6 +3981,14 @@
 <file path=ppt/slides/slide5.xml><?xml version="1.0" encoding="utf-8"?>
 <p:sld xmlns:a="http://schemas.openxmlformats.org/drawingml/2006/main" xmlns:p="http://schemas.openxmlformats.org/presentationml/2006/main" xmlns:r="http://schemas.openxmlformats.org/officeDocument/2006/relationships">
   <p:cSld>
+    <p:bg>
+      <p:bgPr>
+        <a:solidFill>
+          <a:srgbClr val="0A0A0A"/>
+        </a:solidFill>
+        <a:effectLst/>
+      </p:bgPr>
+    </p:bg>
     <p:spTree>
       <p:nvGrpSpPr>
         <p:cNvPr id="1" name=""/>
@@ -3896,8 +4004,8 @@
         </p:nvSpPr>
         <p:spPr>
           <a:xfrm>
-            <a:off x="548640" y="365760"/>
-            <a:ext cx="10972800" cy="731520"/>
+            <a:off x="685800" y="1645920"/>
+            <a:ext cx="10515600" cy="1280160"/>
           </a:xfrm>
           <a:prstGeom prst="rect">
             <a:avLst/>
@@ -3905,20 +4013,20 @@
           <a:noFill/>
         </p:spPr>
         <p:txBody>
-          <a:bodyPr wrap="none">
+          <a:bodyPr wrap="square">
             <a:spAutoFit/>
           </a:bodyPr>
           <a:lstStyle/>
           <a:p>
-            <a:pPr>
-              <a:defRPr sz="2800" b="1">
-                <a:solidFill>
-                  <a:srgbClr val="38BDF8"/>
+            <a:pPr algn="l">
+              <a:defRPr sz="4400" b="1">
+                <a:solidFill>
+                  <a:srgbClr val="F97316"/>
                 </a:solidFill>
               </a:defRPr>
             </a:pPr>
             <a:r>
-              <a:t>Client architecture</a:t>
+              <a:t>Friday</a:t>
             </a:r>
           </a:p>
         </p:txBody>
@@ -3931,8 +4039,8 @@
         </p:nvSpPr>
         <p:spPr>
           <a:xfrm>
-            <a:off x="731520" y="1188720"/>
-            <a:ext cx="10515600" cy="5029200"/>
+            <a:off x="685800" y="2651760"/>
+            <a:ext cx="10515600" cy="1097280"/>
           </a:xfrm>
           <a:prstGeom prst="rect">
             <a:avLst/>
@@ -3946,34 +4054,18 @@
           <a:lstStyle/>
           <a:p>
             <a:pPr>
-              <a:defRPr sz="1800"/>
+              <a:defRPr sz="2200">
+                <a:solidFill>
+                  <a:srgbClr val="A1A1AA"/>
+                </a:solidFill>
+              </a:defRPr>
             </a:pPr>
             <a:r>
-              <a:t>D3 circle pack + file sidebar</a:t>
-            </a:r>
-          </a:p>
-          <a:p>
-            <a:pPr>
-              <a:defRPr sz="1800"/>
-            </a:pPr>
-            <a:r>
-              <a:t>Voice WebSocket to AssemblyAI</a:t>
-            </a:r>
-          </a:p>
-          <a:p>
-            <a:pPr>
-              <a:defRPr sz="1800"/>
-            </a:pPr>
-            <a:r>
-              <a:t>friday_turn to chat.turn on server</a:t>
-            </a:r>
-          </a:p>
-          <a:p>
-            <a:pPr>
-              <a:defRPr sz="1800"/>
-            </a:pPr>
-            <a:r>
-              <a:t>Ask + activity trace</a:t>
+              <a:t>A voice-first control surface for the repo you have open.</a:t>
+            </a:r>
+            <a:br/>
+            <a:r>
+              <a:t>See the shape. Ask out loud. Stage GitHub actions. Confirm before you post.</a:t>
             </a:r>
           </a:p>
         </p:txBody>
@@ -3989,6 +4081,14 @@
 <file path=ppt/slides/slide6.xml><?xml version="1.0" encoding="utf-8"?>
 <p:sld xmlns:a="http://schemas.openxmlformats.org/drawingml/2006/main" xmlns:p="http://schemas.openxmlformats.org/presentationml/2006/main" xmlns:r="http://schemas.openxmlformats.org/officeDocument/2006/relationships">
   <p:cSld>
+    <p:bg>
+      <p:bgPr>
+        <a:solidFill>
+          <a:srgbClr val="0A0A0A"/>
+        </a:solidFill>
+        <a:effectLst/>
+      </p:bgPr>
+    </p:bg>
     <p:spTree>
       <p:nvGrpSpPr>
         <p:cNvPr id="1" name=""/>
@@ -4004,8 +4104,8 @@
         </p:nvSpPr>
         <p:spPr>
           <a:xfrm>
-            <a:off x="548640" y="365760"/>
-            <a:ext cx="10972800" cy="731520"/>
+            <a:off x="685800" y="502920"/>
+            <a:ext cx="10515600" cy="1280160"/>
           </a:xfrm>
           <a:prstGeom prst="rect">
             <a:avLst/>
@@ -4013,20 +4113,20 @@
           <a:noFill/>
         </p:spPr>
         <p:txBody>
-          <a:bodyPr wrap="none">
+          <a:bodyPr wrap="square">
             <a:spAutoFit/>
           </a:bodyPr>
           <a:lstStyle/>
           <a:p>
-            <a:pPr>
-              <a:defRPr sz="2800" b="1">
-                <a:solidFill>
-                  <a:srgbClr val="38BDF8"/>
+            <a:pPr algn="l">
+              <a:defRPr sz="3200" b="1">
+                <a:solidFill>
+                  <a:srgbClr val="F97316"/>
                 </a:solidFill>
               </a:defRPr>
             </a:pPr>
             <a:r>
-              <a:t>Server architecture</a:t>
+              <a:t>Product</a:t>
             </a:r>
           </a:p>
         </p:txBody>
@@ -4039,8 +4139,8 @@
         </p:nvSpPr>
         <p:spPr>
           <a:xfrm>
-            <a:off x="731520" y="1188720"/>
-            <a:ext cx="10515600" cy="5029200"/>
+            <a:off x="777240" y="1325880"/>
+            <a:ext cx="10241280" cy="4754880"/>
           </a:xfrm>
           <a:prstGeom prst="rect">
             <a:avLst/>
@@ -4048,40 +4148,68 @@
           <a:noFill/>
         </p:spPr>
         <p:txBody>
-          <a:bodyPr wrap="none">
+          <a:bodyPr wrap="square">
             <a:spAutoFit/>
           </a:bodyPr>
           <a:lstStyle/>
           <a:p>
             <a:pPr>
-              <a:defRPr sz="1800"/>
+              <a:spcAft>
+                <a:spcPts val="1400"/>
+              </a:spcAft>
+              <a:defRPr sz="2000">
+                <a:solidFill>
+                  <a:srgbClr val="FAFAFA"/>
+                </a:solidFill>
+              </a:defRPr>
             </a:pPr>
             <a:r>
-              <a:t>map_pipeline ingest and landmarks</a:t>
+              <a:t>Circle-pack map — entry points, core, hotspots</a:t>
             </a:r>
           </a:p>
           <a:p>
             <a:pPr>
-              <a:defRPr sz="1800"/>
+              <a:spcAft>
+                <a:spcPts val="1400"/>
+              </a:spcAft>
+              <a:defRPr sz="2000">
+                <a:solidFill>
+                  <a:srgbClr val="FAFAFA"/>
+                </a:solidFill>
+              </a:defRPr>
             </a:pPr>
             <a:r>
-              <a:t>chat.turn: direct, gateway, Jev, orchestrator</a:t>
+              <a:t>Landmarks + layers — heat, imports, focus</a:t>
             </a:r>
           </a:p>
           <a:p>
             <a:pPr>
-              <a:defRPr sz="1800"/>
+              <a:spcAft>
+                <a:spcPts val="1400"/>
+              </a:spcAft>
+              <a:defRPr sz="2000">
+                <a:solidFill>
+                  <a:srgbClr val="FAFAFA"/>
+                </a:solidFill>
+              </a:defRPr>
             </a:pPr>
             <a:r>
-              <a:t>agent.run_agent: 8-turn Gateway loop</a:t>
+              <a:t>Voice (AssemblyAI) + typed Ask — same brain</a:t>
             </a:r>
           </a:p>
           <a:p>
             <a:pPr>
-              <a:defRPr sz="1800"/>
+              <a:spcAft>
+                <a:spcPts val="1400"/>
+              </a:spcAft>
+              <a:defRPr sz="2000">
+                <a:solidFill>
+                  <a:srgbClr val="FAFAFA"/>
+                </a:solidFill>
+              </a:defRPr>
             </a:pPr>
             <a:r>
-              <a:t>github_tools REST + confirm_write</a:t>
+              <a:t>Commits, issues, PRs, security scan, merge review</a:t>
             </a:r>
           </a:p>
         </p:txBody>
@@ -4097,6 +4225,14 @@
 <file path=ppt/slides/slide7.xml><?xml version="1.0" encoding="utf-8"?>
 <p:sld xmlns:a="http://schemas.openxmlformats.org/drawingml/2006/main" xmlns:p="http://schemas.openxmlformats.org/presentationml/2006/main" xmlns:r="http://schemas.openxmlformats.org/officeDocument/2006/relationships">
   <p:cSld>
+    <p:bg>
+      <p:bgPr>
+        <a:solidFill>
+          <a:srgbClr val="0A0A0A"/>
+        </a:solidFill>
+        <a:effectLst/>
+      </p:bgPr>
+    </p:bg>
     <p:spTree>
       <p:nvGrpSpPr>
         <p:cNvPr id="1" name=""/>
@@ -4112,8 +4248,8 @@
         </p:nvSpPr>
         <p:spPr>
           <a:xfrm>
-            <a:off x="548640" y="365760"/>
-            <a:ext cx="10972800" cy="731520"/>
+            <a:off x="685800" y="411480"/>
+            <a:ext cx="10515600" cy="1280160"/>
           </a:xfrm>
           <a:prstGeom prst="rect">
             <a:avLst/>
@@ -4121,34 +4257,427 @@
           <a:noFill/>
         </p:spPr>
         <p:txBody>
-          <a:bodyPr wrap="none">
+          <a:bodyPr wrap="square">
             <a:spAutoFit/>
           </a:bodyPr>
           <a:lstStyle/>
           <a:p>
+            <a:pPr algn="l">
+              <a:defRPr sz="3000" b="1">
+                <a:solidFill>
+                  <a:srgbClr val="F97316"/>
+                </a:solidFill>
+              </a:defRPr>
+            </a:pPr>
+            <a:r>
+              <a:t>How Friday works</a:t>
+            </a:r>
+          </a:p>
+        </p:txBody>
+      </p:sp>
+      <p:sp>
+        <p:nvSpPr>
+          <p:cNvPr id="3" name="Rounded Rectangle 2"/>
+          <p:cNvSpPr/>
+          <p:nvPr/>
+        </p:nvSpPr>
+        <p:spPr>
+          <a:xfrm>
+            <a:off x="548640" y="2148840"/>
+            <a:ext cx="2377440" cy="1234440"/>
+          </a:xfrm>
+          <a:prstGeom prst="roundRect">
+            <a:avLst/>
+          </a:prstGeom>
+          <a:solidFill>
+            <a:srgbClr val="1C1C1E"/>
+          </a:solidFill>
+          <a:ln>
+            <a:solidFill>
+              <a:srgbClr val="F97316"/>
+            </a:solidFill>
+          </a:ln>
+        </p:spPr>
+        <p:style>
+          <a:lnRef idx="1">
+            <a:schemeClr val="accent1"/>
+          </a:lnRef>
+          <a:fillRef idx="3">
+            <a:schemeClr val="accent1"/>
+          </a:fillRef>
+          <a:effectRef idx="2">
+            <a:schemeClr val="accent1"/>
+          </a:effectRef>
+          <a:fontRef idx="minor">
+            <a:schemeClr val="lt1"/>
+          </a:fontRef>
+        </p:style>
+        <p:txBody>
+          <a:bodyPr rtlCol="0" anchor="ctr"/>
+          <a:lstStyle/>
+          <a:p>
+            <a:pPr algn="ctr">
+              <a:defRPr sz="1800" b="1">
+                <a:solidFill>
+                  <a:srgbClr val="FAFAFA"/>
+                </a:solidFill>
+              </a:defRPr>
+            </a:pPr>
+            <a:r>
+              <a:t>You</a:t>
+            </a:r>
+          </a:p>
+          <a:p>
             <a:pPr>
-              <a:defRPr sz="2800" b="1">
-                <a:solidFill>
-                  <a:srgbClr val="38BDF8"/>
+              <a:defRPr sz="1300">
+                <a:solidFill>
+                  <a:srgbClr val="A1A1AA"/>
                 </a:solidFill>
               </a:defRPr>
             </a:pPr>
             <a:r>
-              <a:t>Routing for reliability</a:t>
-            </a:r>
-          </a:p>
-        </p:txBody>
-      </p:sp>
-      <p:sp>
-        <p:nvSpPr>
-          <p:cNvPr id="3" name="TextBox 2"/>
+              <a:t>Voice or text</a:t>
+            </a:r>
+          </a:p>
+        </p:txBody>
+      </p:sp>
+      <p:sp>
+        <p:nvSpPr>
+          <p:cNvPr id="4" name="Right Arrow 3"/>
+          <p:cNvSpPr/>
+          <p:nvPr/>
+        </p:nvSpPr>
+        <p:spPr>
+          <a:xfrm>
+            <a:off x="2971800" y="2560320"/>
+            <a:ext cx="228599" cy="320040"/>
+          </a:xfrm>
+          <a:prstGeom prst="rightArrow">
+            <a:avLst/>
+          </a:prstGeom>
+          <a:solidFill>
+            <a:srgbClr val="A1A1AA"/>
+          </a:solidFill>
+          <a:ln>
+            <a:noFill/>
+          </a:ln>
+        </p:spPr>
+        <p:style>
+          <a:lnRef idx="1">
+            <a:schemeClr val="accent1"/>
+          </a:lnRef>
+          <a:fillRef idx="3">
+            <a:schemeClr val="accent1"/>
+          </a:fillRef>
+          <a:effectRef idx="2">
+            <a:schemeClr val="accent1"/>
+          </a:effectRef>
+          <a:fontRef idx="minor">
+            <a:schemeClr val="lt1"/>
+          </a:fontRef>
+        </p:style>
+        <p:txBody>
+          <a:bodyPr rtlCol="0" anchor="ctr"/>
+          <a:lstStyle/>
+          <a:p>
+            <a:pPr algn="ctr"/>
+          </a:p>
+        </p:txBody>
+      </p:sp>
+      <p:sp>
+        <p:nvSpPr>
+          <p:cNvPr id="5" name="Rounded Rectangle 4"/>
+          <p:cNvSpPr/>
+          <p:nvPr/>
+        </p:nvSpPr>
+        <p:spPr>
+          <a:xfrm>
+            <a:off x="3246120" y="2148840"/>
+            <a:ext cx="2377440" cy="1234440"/>
+          </a:xfrm>
+          <a:prstGeom prst="roundRect">
+            <a:avLst/>
+          </a:prstGeom>
+          <a:solidFill>
+            <a:srgbClr val="1C1C1E"/>
+          </a:solidFill>
+          <a:ln>
+            <a:solidFill>
+              <a:srgbClr val="F97316"/>
+            </a:solidFill>
+          </a:ln>
+        </p:spPr>
+        <p:style>
+          <a:lnRef idx="1">
+            <a:schemeClr val="accent1"/>
+          </a:lnRef>
+          <a:fillRef idx="3">
+            <a:schemeClr val="accent1"/>
+          </a:fillRef>
+          <a:effectRef idx="2">
+            <a:schemeClr val="accent1"/>
+          </a:effectRef>
+          <a:fontRef idx="minor">
+            <a:schemeClr val="lt1"/>
+          </a:fontRef>
+        </p:style>
+        <p:txBody>
+          <a:bodyPr rtlCol="0" anchor="ctr"/>
+          <a:lstStyle/>
+          <a:p>
+            <a:pPr algn="ctr">
+              <a:defRPr sz="1800" b="1">
+                <a:solidFill>
+                  <a:srgbClr val="FAFAFA"/>
+                </a:solidFill>
+              </a:defRPr>
+            </a:pPr>
+            <a:r>
+              <a:t>Friday</a:t>
+            </a:r>
+          </a:p>
+          <a:p>
+            <a:pPr>
+              <a:defRPr sz="1300">
+                <a:solidFill>
+                  <a:srgbClr val="A1A1AA"/>
+                </a:solidFill>
+              </a:defRPr>
+            </a:pPr>
+            <a:r>
+              <a:t>Route + tools</a:t>
+            </a:r>
+          </a:p>
+        </p:txBody>
+      </p:sp>
+      <p:sp>
+        <p:nvSpPr>
+          <p:cNvPr id="6" name="Right Arrow 5"/>
+          <p:cNvSpPr/>
+          <p:nvPr/>
+        </p:nvSpPr>
+        <p:spPr>
+          <a:xfrm>
+            <a:off x="5669280" y="2560320"/>
+            <a:ext cx="228599" cy="320040"/>
+          </a:xfrm>
+          <a:prstGeom prst="rightArrow">
+            <a:avLst/>
+          </a:prstGeom>
+          <a:solidFill>
+            <a:srgbClr val="A1A1AA"/>
+          </a:solidFill>
+          <a:ln>
+            <a:noFill/>
+          </a:ln>
+        </p:spPr>
+        <p:style>
+          <a:lnRef idx="1">
+            <a:schemeClr val="accent1"/>
+          </a:lnRef>
+          <a:fillRef idx="3">
+            <a:schemeClr val="accent1"/>
+          </a:fillRef>
+          <a:effectRef idx="2">
+            <a:schemeClr val="accent1"/>
+          </a:effectRef>
+          <a:fontRef idx="minor">
+            <a:schemeClr val="lt1"/>
+          </a:fontRef>
+        </p:style>
+        <p:txBody>
+          <a:bodyPr rtlCol="0" anchor="ctr"/>
+          <a:lstStyle/>
+          <a:p>
+            <a:pPr algn="ctr"/>
+          </a:p>
+        </p:txBody>
+      </p:sp>
+      <p:sp>
+        <p:nvSpPr>
+          <p:cNvPr id="7" name="Rounded Rectangle 6"/>
+          <p:cNvSpPr/>
+          <p:nvPr/>
+        </p:nvSpPr>
+        <p:spPr>
+          <a:xfrm>
+            <a:off x="5943600" y="2148840"/>
+            <a:ext cx="2377440" cy="1234440"/>
+          </a:xfrm>
+          <a:prstGeom prst="roundRect">
+            <a:avLst/>
+          </a:prstGeom>
+          <a:solidFill>
+            <a:srgbClr val="1C1C1E"/>
+          </a:solidFill>
+          <a:ln>
+            <a:solidFill>
+              <a:srgbClr val="F97316"/>
+            </a:solidFill>
+          </a:ln>
+        </p:spPr>
+        <p:style>
+          <a:lnRef idx="1">
+            <a:schemeClr val="accent1"/>
+          </a:lnRef>
+          <a:fillRef idx="3">
+            <a:schemeClr val="accent1"/>
+          </a:fillRef>
+          <a:effectRef idx="2">
+            <a:schemeClr val="accent1"/>
+          </a:effectRef>
+          <a:fontRef idx="minor">
+            <a:schemeClr val="lt1"/>
+          </a:fontRef>
+        </p:style>
+        <p:txBody>
+          <a:bodyPr rtlCol="0" anchor="ctr"/>
+          <a:lstStyle/>
+          <a:p>
+            <a:pPr algn="ctr">
+              <a:defRPr sz="1800" b="1">
+                <a:solidFill>
+                  <a:srgbClr val="FAFAFA"/>
+                </a:solidFill>
+              </a:defRPr>
+            </a:pPr>
+            <a:r>
+              <a:t>Map + GitHub</a:t>
+            </a:r>
+          </a:p>
+          <a:p>
+            <a:pPr>
+              <a:defRPr sz="1300">
+                <a:solidFill>
+                  <a:srgbClr val="A1A1AA"/>
+                </a:solidFill>
+              </a:defRPr>
+            </a:pPr>
+            <a:r>
+              <a:t>Ground truth</a:t>
+            </a:r>
+          </a:p>
+        </p:txBody>
+      </p:sp>
+      <p:sp>
+        <p:nvSpPr>
+          <p:cNvPr id="8" name="Right Arrow 7"/>
+          <p:cNvSpPr/>
+          <p:nvPr/>
+        </p:nvSpPr>
+        <p:spPr>
+          <a:xfrm>
+            <a:off x="8366760" y="2560320"/>
+            <a:ext cx="228599" cy="320040"/>
+          </a:xfrm>
+          <a:prstGeom prst="rightArrow">
+            <a:avLst/>
+          </a:prstGeom>
+          <a:solidFill>
+            <a:srgbClr val="A1A1AA"/>
+          </a:solidFill>
+          <a:ln>
+            <a:noFill/>
+          </a:ln>
+        </p:spPr>
+        <p:style>
+          <a:lnRef idx="1">
+            <a:schemeClr val="accent1"/>
+          </a:lnRef>
+          <a:fillRef idx="3">
+            <a:schemeClr val="accent1"/>
+          </a:fillRef>
+          <a:effectRef idx="2">
+            <a:schemeClr val="accent1"/>
+          </a:effectRef>
+          <a:fontRef idx="minor">
+            <a:schemeClr val="lt1"/>
+          </a:fontRef>
+        </p:style>
+        <p:txBody>
+          <a:bodyPr rtlCol="0" anchor="ctr"/>
+          <a:lstStyle/>
+          <a:p>
+            <a:pPr algn="ctr"/>
+          </a:p>
+        </p:txBody>
+      </p:sp>
+      <p:sp>
+        <p:nvSpPr>
+          <p:cNvPr id="9" name="Rounded Rectangle 8"/>
+          <p:cNvSpPr/>
+          <p:nvPr/>
+        </p:nvSpPr>
+        <p:spPr>
+          <a:xfrm>
+            <a:off x="8641080" y="2148840"/>
+            <a:ext cx="2377440" cy="1234440"/>
+          </a:xfrm>
+          <a:prstGeom prst="roundRect">
+            <a:avLst/>
+          </a:prstGeom>
+          <a:solidFill>
+            <a:srgbClr val="1C1C1E"/>
+          </a:solidFill>
+          <a:ln>
+            <a:solidFill>
+              <a:srgbClr val="F97316"/>
+            </a:solidFill>
+          </a:ln>
+        </p:spPr>
+        <p:style>
+          <a:lnRef idx="1">
+            <a:schemeClr val="accent1"/>
+          </a:lnRef>
+          <a:fillRef idx="3">
+            <a:schemeClr val="accent1"/>
+          </a:fillRef>
+          <a:effectRef idx="2">
+            <a:schemeClr val="accent1"/>
+          </a:effectRef>
+          <a:fontRef idx="minor">
+            <a:schemeClr val="lt1"/>
+          </a:fontRef>
+        </p:style>
+        <p:txBody>
+          <a:bodyPr rtlCol="0" anchor="ctr"/>
+          <a:lstStyle/>
+          <a:p>
+            <a:pPr algn="ctr">
+              <a:defRPr sz="1800" b="1">
+                <a:solidFill>
+                  <a:srgbClr val="FAFAFA"/>
+                </a:solidFill>
+              </a:defRPr>
+            </a:pPr>
+            <a:r>
+              <a:t>You</a:t>
+            </a:r>
+          </a:p>
+          <a:p>
+            <a:pPr>
+              <a:defRPr sz="1300">
+                <a:solidFill>
+                  <a:srgbClr val="A1A1AA"/>
+                </a:solidFill>
+              </a:defRPr>
+            </a:pPr>
+            <a:r>
+              <a:t>Yes to post</a:t>
+            </a:r>
+          </a:p>
+        </p:txBody>
+      </p:sp>
+      <p:sp>
+        <p:nvSpPr>
+          <p:cNvPr id="10" name="TextBox 9"/>
           <p:cNvSpPr txBox="1"/>
           <p:nvPr/>
         </p:nvSpPr>
         <p:spPr>
           <a:xfrm>
-            <a:off x="731520" y="1188720"/>
-            <a:ext cx="10515600" cy="5029200"/>
+            <a:off x="685800" y="3794760"/>
+            <a:ext cx="10515600" cy="1097280"/>
           </a:xfrm>
           <a:prstGeom prst="rect">
             <a:avLst/>
@@ -4162,34 +4691,14 @@
           <a:lstStyle/>
           <a:p>
             <a:pPr>
-              <a:defRPr sz="1800"/>
+              <a:defRPr sz="1600">
+                <a:solidFill>
+                  <a:srgbClr val="A1A1AA"/>
+                </a:solidFill>
+              </a:defRPr>
             </a:pPr>
             <a:r>
-              <a:t>command: parsers and map shortcuts</a:t>
-            </a:r>
-          </a:p>
-          <a:p>
-            <a:pPr>
-              <a:defRPr sz="1800"/>
-            </a:pPr>
-            <a:r>
-              <a:t>gateway: multi-step GitHub triage</a:t>
-            </a:r>
-          </a:p>
-          <a:p>
-            <a:pPr>
-              <a:defRPr sz="1800"/>
-            </a:pPr>
-            <a:r>
-              <a:t>jev: single confident map tool</a:t>
-            </a:r>
-          </a:p>
-          <a:p>
-            <a:pPr>
-              <a:defRPr sz="1800"/>
-            </a:pPr>
-            <a:r>
-              <a:t>K2 when Jev confidence is low</a:t>
+              <a:t>Jev picks map tools · Gateway loop for multi-step GitHub · Writes never auto-post</a:t>
             </a:r>
           </a:p>
         </p:txBody>
@@ -4205,6 +4714,14 @@
 <file path=ppt/slides/slide8.xml><?xml version="1.0" encoding="utf-8"?>
 <p:sld xmlns:a="http://schemas.openxmlformats.org/drawingml/2006/main" xmlns:p="http://schemas.openxmlformats.org/presentationml/2006/main" xmlns:r="http://schemas.openxmlformats.org/officeDocument/2006/relationships">
   <p:cSld>
+    <p:bg>
+      <p:bgPr>
+        <a:solidFill>
+          <a:srgbClr val="0A0A0A"/>
+        </a:solidFill>
+        <a:effectLst/>
+      </p:bgPr>
+    </p:bg>
     <p:spTree>
       <p:nvGrpSpPr>
         <p:cNvPr id="1" name=""/>
@@ -4220,8 +4737,8 @@
         </p:nvSpPr>
         <p:spPr>
           <a:xfrm>
-            <a:off x="548640" y="365760"/>
-            <a:ext cx="10972800" cy="731520"/>
+            <a:off x="685800" y="502920"/>
+            <a:ext cx="10515600" cy="1280160"/>
           </a:xfrm>
           <a:prstGeom prst="rect">
             <a:avLst/>
@@ -4229,20 +4746,20 @@
           <a:noFill/>
         </p:spPr>
         <p:txBody>
-          <a:bodyPr wrap="none">
+          <a:bodyPr wrap="square">
             <a:spAutoFit/>
           </a:bodyPr>
           <a:lstStyle/>
           <a:p>
-            <a:pPr>
-              <a:defRPr sz="2800" b="1">
-                <a:solidFill>
-                  <a:srgbClr val="38BDF8"/>
+            <a:pPr algn="l">
+              <a:defRPr sz="3200" b="1">
+                <a:solidFill>
+                  <a:srgbClr val="F97316"/>
                 </a:solidFill>
               </a:defRPr>
             </a:pPr>
             <a:r>
-              <a:t>AssemblyAI</a:t>
+              <a:t>Human in the loop</a:t>
             </a:r>
           </a:p>
         </p:txBody>
@@ -4255,8 +4772,8 @@
         </p:nvSpPr>
         <p:spPr>
           <a:xfrm>
-            <a:off x="731520" y="1188720"/>
-            <a:ext cx="10515600" cy="5029200"/>
+            <a:off x="777240" y="1325880"/>
+            <a:ext cx="10241280" cy="4754880"/>
           </a:xfrm>
           <a:prstGeom prst="rect">
             <a:avLst/>
@@ -4264,40 +4781,68 @@
           <a:noFill/>
         </p:spPr>
         <p:txBody>
-          <a:bodyPr wrap="none">
+          <a:bodyPr wrap="square">
             <a:spAutoFit/>
           </a:bodyPr>
           <a:lstStyle/>
           <a:p>
             <a:pPr>
-              <a:defRPr sz="1800"/>
+              <a:spcAft>
+                <a:spcPts val="1400"/>
+              </a:spcAft>
+              <a:defRPr sz="2000">
+                <a:solidFill>
+                  <a:srgbClr val="FAFAFA"/>
+                </a:solidFill>
+              </a:defRPr>
             </a:pPr>
             <a:r>
-              <a:t>Voice Agent live STT and TTS</a:t>
+              <a:t>create_issue / add_comment → draft only</a:t>
             </a:r>
           </a:p>
           <a:p>
             <a:pPr>
-              <a:defRPr sz="1800"/>
+              <a:spcAft>
+                <a:spcPts val="1400"/>
+              </a:spcAft>
+              <a:defRPr sz="2000">
+                <a:solidFill>
+                  <a:srgbClr val="FAFAFA"/>
+                </a:solidFill>
+              </a:defRPr>
             </a:pPr>
             <a:r>
-              <a:t>Sync API for /api/run</a:t>
+              <a:t>Separate turn: yes → confirm_write posts</a:t>
             </a:r>
           </a:p>
           <a:p>
             <a:pPr>
-              <a:defRPr sz="1800"/>
+              <a:spcAft>
+                <a:spcPts val="1400"/>
+              </a:spcAft>
+              <a:defRPr sz="2000">
+                <a:solidFill>
+                  <a:srgbClr val="FAFAFA"/>
+                </a:solidFill>
+              </a:defRPr>
             </a:pPr>
             <a:r>
-              <a:t>LLM Gateway tool calling</a:t>
+              <a:t>No silent auto-merge, no drive-by comments</a:t>
             </a:r>
           </a:p>
           <a:p>
             <a:pPr>
-              <a:defRPr sz="1800"/>
+              <a:spcAft>
+                <a:spcPts val="1400"/>
+              </a:spcAft>
+              <a:defRPr sz="2000">
+                <a:solidFill>
+                  <a:srgbClr val="FAFAFA"/>
+                </a:solidFill>
+              </a:defRPr>
             </a:pPr>
             <a:r>
-              <a:t>Different auth per surface</a:t>
+              <a:t>OAuth + tokens stay server-side</a:t>
             </a:r>
           </a:p>
         </p:txBody>
@@ -4313,6 +4858,14 @@
 <file path=ppt/slides/slide9.xml><?xml version="1.0" encoding="utf-8"?>
 <p:sld xmlns:a="http://schemas.openxmlformats.org/drawingml/2006/main" xmlns:p="http://schemas.openxmlformats.org/presentationml/2006/main" xmlns:r="http://schemas.openxmlformats.org/officeDocument/2006/relationships">
   <p:cSld>
+    <p:bg>
+      <p:bgPr>
+        <a:solidFill>
+          <a:srgbClr val="0A0A0A"/>
+        </a:solidFill>
+        <a:effectLst/>
+      </p:bgPr>
+    </p:bg>
     <p:spTree>
       <p:nvGrpSpPr>
         <p:cNvPr id="1" name=""/>
@@ -4328,8 +4881,8 @@
         </p:nvSpPr>
         <p:spPr>
           <a:xfrm>
-            <a:off x="548640" y="365760"/>
-            <a:ext cx="10972800" cy="731520"/>
+            <a:off x="685800" y="502920"/>
+            <a:ext cx="10515600" cy="1280160"/>
           </a:xfrm>
           <a:prstGeom prst="rect">
             <a:avLst/>
@@ -4337,20 +4890,20 @@
           <a:noFill/>
         </p:spPr>
         <p:txBody>
-          <a:bodyPr wrap="none">
+          <a:bodyPr wrap="square">
             <a:spAutoFit/>
           </a:bodyPr>
           <a:lstStyle/>
           <a:p>
-            <a:pPr>
-              <a:defRPr sz="2800" b="1">
-                <a:solidFill>
-                  <a:srgbClr val="38BDF8"/>
+            <a:pPr algn="l">
+              <a:defRPr sz="3200" b="1">
+                <a:solidFill>
+                  <a:srgbClr val="F97316"/>
                 </a:solidFill>
               </a:defRPr>
             </a:pPr>
             <a:r>
-              <a:t>GitHub safety</a:t>
+              <a:t>Judgment, not vibes</a:t>
             </a:r>
           </a:p>
         </p:txBody>
@@ -4363,8 +4916,8 @@
         </p:nvSpPr>
         <p:spPr>
           <a:xfrm>
-            <a:off x="731520" y="1188720"/>
-            <a:ext cx="10515600" cy="5029200"/>
+            <a:off x="777240" y="1325880"/>
+            <a:ext cx="10241280" cy="4754880"/>
           </a:xfrm>
           <a:prstGeom prst="rect">
             <a:avLst/>
@@ -4372,40 +4925,68 @@
           <a:noFill/>
         </p:spPr>
         <p:txBody>
-          <a:bodyPr wrap="none">
+          <a:bodyPr wrap="square">
             <a:spAutoFit/>
           </a:bodyPr>
           <a:lstStyle/>
           <a:p>
             <a:pPr>
-              <a:defRPr sz="1800"/>
+              <a:spcAft>
+                <a:spcPts val="1400"/>
+              </a:spcAft>
+              <a:defRPr sz="2000">
+                <a:solidFill>
+                  <a:srgbClr val="FAFAFA"/>
+                </a:solidFill>
+              </a:defRPr>
             </a:pPr>
             <a:r>
-              <a:t>Issues and comments staged only</a:t>
+              <a:t>Jev: confident tool routing for map questions</a:t>
             </a:r>
           </a:p>
           <a:p>
             <a:pPr>
-              <a:defRPr sz="1800"/>
+              <a:spcAft>
+                <a:spcPts val="1400"/>
+              </a:spcAft>
+              <a:defRPr sz="2000">
+                <a:solidFill>
+                  <a:srgbClr val="FAFAFA"/>
+                </a:solidFill>
+              </a:defRPr>
             </a:pPr>
             <a:r>
-              <a:t>confirm_write on later yes</a:t>
+              <a:t>Review gate: structured safe-to-merge narrative</a:t>
             </a:r>
           </a:p>
           <a:p>
             <a:pPr>
-              <a:defRPr sz="1800"/>
+              <a:spcAft>
+                <a:spcPts val="1400"/>
+              </a:spcAft>
+              <a:defRPr sz="2000">
+                <a:solidFill>
+                  <a:srgbClr val="FAFAFA"/>
+                </a:solidFill>
+              </a:defRPr>
             </a:pPr>
             <a:r>
-              <a:t>OAuth optional; secrets server-side</a:t>
+              <a:t>Escalate when confidence is low (Vertex / K2)</a:t>
             </a:r>
           </a:p>
           <a:p>
             <a:pPr>
-              <a:defRPr sz="1800"/>
+              <a:spcAft>
+                <a:spcPts val="1400"/>
+              </a:spcAft>
+              <a:defRPr sz="2000">
+                <a:solidFill>
+                  <a:srgbClr val="FAFAFA"/>
+                </a:solidFill>
+              </a:defRPr>
             </a:pPr>
             <a:r>
-              <a:t>No close/delete on issues or PRs</a:t>
+              <a:t>Honest give-up when the repo cannot answer</a:t>
             </a:r>
           </a:p>
         </p:txBody>

--- a/docs/presentation/Friday-Voice-Agent.pptx
+++ b/docs/presentation/Friday-Voice-Agent.pptx
@@ -16,8 +16,6 @@
     <p:sldId id="264" r:id="rId15"/>
     <p:sldId id="265" r:id="rId16"/>
     <p:sldId id="266" r:id="rId17"/>
-    <p:sldId id="267" r:id="rId18"/>
-    <p:sldId id="268" r:id="rId19"/>
   </p:sldIdLst>
   <p:sldSz cx="12191695" cy="6858000" type="screen4x3"/>
   <p:notesSz cx="6858000" cy="9144000"/>
@@ -3093,14 +3091,6 @@
 <file path=ppt/slides/slide1.xml><?xml version="1.0" encoding="utf-8"?>
 <p:sld xmlns:a="http://schemas.openxmlformats.org/drawingml/2006/main" xmlns:p="http://schemas.openxmlformats.org/presentationml/2006/main" xmlns:r="http://schemas.openxmlformats.org/officeDocument/2006/relationships">
   <p:cSld>
-    <p:bg>
-      <p:bgPr>
-        <a:solidFill>
-          <a:srgbClr val="0A0A0A"/>
-        </a:solidFill>
-        <a:effectLst/>
-      </p:bgPr>
-    </p:bg>
     <p:spTree>
       <p:nvGrpSpPr>
         <p:cNvPr id="1" name=""/>
@@ -3110,36 +3100,44 @@
       <p:grpSpPr/>
       <p:sp>
         <p:nvSpPr>
-          <p:cNvPr id="2" name="TextBox 1"/>
-          <p:cNvSpPr txBox="1"/>
-          <p:nvPr/>
-        </p:nvSpPr>
-        <p:spPr>
-          <a:xfrm>
-            <a:off x="685800" y="2103120"/>
-            <a:ext cx="10515600" cy="1280160"/>
+          <p:cNvPr id="2" name="Rectangle 1"/>
+          <p:cNvSpPr/>
+          <p:nvPr/>
+        </p:nvSpPr>
+        <p:spPr>
+          <a:xfrm>
+            <a:off x="0" y="0"/>
+            <a:ext cx="12191695" cy="6858000"/>
           </a:xfrm>
           <a:prstGeom prst="rect">
             <a:avLst/>
           </a:prstGeom>
-          <a:noFill/>
-        </p:spPr>
-        <p:txBody>
-          <a:bodyPr wrap="square">
-            <a:spAutoFit/>
-          </a:bodyPr>
-          <a:lstStyle/>
-          <a:p>
-            <a:pPr algn="l">
-              <a:defRPr sz="5200" b="1">
-                <a:solidFill>
-                  <a:srgbClr val="FAFAFA"/>
-                </a:solidFill>
-              </a:defRPr>
-            </a:pPr>
-            <a:r>
-              <a:t>Friday</a:t>
-            </a:r>
+          <a:solidFill>
+            <a:srgbClr val="0B0B0C"/>
+          </a:solidFill>
+          <a:ln>
+            <a:noFill/>
+          </a:ln>
+        </p:spPr>
+        <p:style>
+          <a:lnRef idx="1">
+            <a:schemeClr val="accent1"/>
+          </a:lnRef>
+          <a:fillRef idx="3">
+            <a:schemeClr val="accent1"/>
+          </a:fillRef>
+          <a:effectRef idx="2">
+            <a:schemeClr val="accent1"/>
+          </a:effectRef>
+          <a:fontRef idx="minor">
+            <a:schemeClr val="lt1"/>
+          </a:fontRef>
+        </p:style>
+        <p:txBody>
+          <a:bodyPr rtlCol="0" anchor="ctr"/>
+          <a:lstStyle/>
+          <a:p>
+            <a:pPr algn="ctr"/>
           </a:p>
         </p:txBody>
       </p:sp>
@@ -3151,8 +3149,8 @@
         </p:nvSpPr>
         <p:spPr>
           <a:xfrm>
-            <a:off x="685800" y="3063240"/>
-            <a:ext cx="10515600" cy="1097280"/>
+            <a:off x="548640" y="1965960"/>
+            <a:ext cx="10972800" cy="822960"/>
           </a:xfrm>
           <a:prstGeom prst="rect">
             <a:avLst/>
@@ -3160,20 +3158,87 @@
           <a:noFill/>
         </p:spPr>
         <p:txBody>
-          <a:bodyPr wrap="none">
-            <a:spAutoFit/>
-          </a:bodyPr>
-          <a:lstStyle/>
-          <a:p>
-            <a:pPr>
-              <a:defRPr sz="2400">
+          <a:bodyPr wrap="square"/>
+          <a:lstStyle/>
+          <a:p>
+            <a:pPr algn="l">
+              <a:defRPr sz="6000" b="1">
+                <a:solidFill>
+                  <a:srgbClr val="FAFAFA"/>
+                </a:solidFill>
+                <a:latin typeface="Calibri"/>
+              </a:defRPr>
+            </a:pPr>
+            <a:r>
+              <a:t>FRIDAY</a:t>
+            </a:r>
+          </a:p>
+        </p:txBody>
+      </p:sp>
+      <p:sp>
+        <p:nvSpPr>
+          <p:cNvPr id="4" name="TextBox 3"/>
+          <p:cNvSpPr txBox="1"/>
+          <p:nvPr/>
+        </p:nvSpPr>
+        <p:spPr>
+          <a:xfrm>
+            <a:off x="548640" y="2926080"/>
+            <a:ext cx="10058400" cy="822960"/>
+          </a:xfrm>
+          <a:prstGeom prst="rect">
+            <a:avLst/>
+          </a:prstGeom>
+          <a:noFill/>
+        </p:spPr>
+        <p:txBody>
+          <a:bodyPr wrap="square"/>
+          <a:lstStyle/>
+          <a:p>
+            <a:pPr algn="l">
+              <a:defRPr sz="2400" b="0">
                 <a:solidFill>
                   <a:srgbClr val="A1A1AA"/>
                 </a:solidFill>
-              </a:defRPr>
-            </a:pPr>
-            <a:r>
-              <a:t>Stay in control when code—and threats—move faster than review.</a:t>
+                <a:latin typeface="Calibri"/>
+              </a:defRPr>
+            </a:pPr>
+            <a:r>
+              <a:t>Stay in control when code — and threats — move faster than review.</a:t>
+            </a:r>
+          </a:p>
+        </p:txBody>
+      </p:sp>
+      <p:sp>
+        <p:nvSpPr>
+          <p:cNvPr id="5" name="TextBox 4"/>
+          <p:cNvSpPr txBox="1"/>
+          <p:nvPr/>
+        </p:nvSpPr>
+        <p:spPr>
+          <a:xfrm>
+            <a:off x="548640" y="3931920"/>
+            <a:ext cx="9144000" cy="365760"/>
+          </a:xfrm>
+          <a:prstGeom prst="rect">
+            <a:avLst/>
+          </a:prstGeom>
+          <a:noFill/>
+        </p:spPr>
+        <p:txBody>
+          <a:bodyPr wrap="square"/>
+          <a:lstStyle/>
+          <a:p>
+            <a:pPr algn="l">
+              <a:defRPr sz="1800" b="0">
+                <a:solidFill>
+                  <a:srgbClr val="F97316"/>
+                </a:solidFill>
+                <a:latin typeface="Calibri"/>
+              </a:defRPr>
+            </a:pPr>
+            <a:r>
+              <a:t>Voice-first control surface for the repo you already have open.</a:t>
             </a:r>
           </a:p>
         </p:txBody>
@@ -3189,14 +3254,6 @@
 <file path=ppt/slides/slide10.xml><?xml version="1.0" encoding="utf-8"?>
 <p:sld xmlns:a="http://schemas.openxmlformats.org/drawingml/2006/main" xmlns:p="http://schemas.openxmlformats.org/presentationml/2006/main" xmlns:r="http://schemas.openxmlformats.org/officeDocument/2006/relationships">
   <p:cSld>
-    <p:bg>
-      <p:bgPr>
-        <a:solidFill>
-          <a:srgbClr val="0A0A0A"/>
-        </a:solidFill>
-        <a:effectLst/>
-      </p:bgPr>
-    </p:bg>
     <p:spTree>
       <p:nvGrpSpPr>
         <p:cNvPr id="1" name=""/>
@@ -3206,14 +3263,57 @@
       <p:grpSpPr/>
       <p:sp>
         <p:nvSpPr>
-          <p:cNvPr id="2" name="TextBox 1"/>
+          <p:cNvPr id="2" name="Rectangle 1"/>
+          <p:cNvSpPr/>
+          <p:nvPr/>
+        </p:nvSpPr>
+        <p:spPr>
+          <a:xfrm>
+            <a:off x="0" y="0"/>
+            <a:ext cx="12191695" cy="6858000"/>
+          </a:xfrm>
+          <a:prstGeom prst="rect">
+            <a:avLst/>
+          </a:prstGeom>
+          <a:solidFill>
+            <a:srgbClr val="0B0B0C"/>
+          </a:solidFill>
+          <a:ln>
+            <a:noFill/>
+          </a:ln>
+        </p:spPr>
+        <p:style>
+          <a:lnRef idx="1">
+            <a:schemeClr val="accent1"/>
+          </a:lnRef>
+          <a:fillRef idx="3">
+            <a:schemeClr val="accent1"/>
+          </a:fillRef>
+          <a:effectRef idx="2">
+            <a:schemeClr val="accent1"/>
+          </a:effectRef>
+          <a:fontRef idx="minor">
+            <a:schemeClr val="lt1"/>
+          </a:fontRef>
+        </p:style>
+        <p:txBody>
+          <a:bodyPr rtlCol="0" anchor="ctr"/>
+          <a:lstStyle/>
+          <a:p>
+            <a:pPr algn="ctr"/>
+          </a:p>
+        </p:txBody>
+      </p:sp>
+      <p:sp>
+        <p:nvSpPr>
+          <p:cNvPr id="3" name="TextBox 2"/>
           <p:cNvSpPr txBox="1"/>
           <p:nvPr/>
         </p:nvSpPr>
         <p:spPr>
           <a:xfrm>
-            <a:off x="685800" y="502920"/>
-            <a:ext cx="10515600" cy="1280160"/>
+            <a:off x="502920" y="292608"/>
+            <a:ext cx="7315200" cy="292608"/>
           </a:xfrm>
           <a:prstGeom prst="rect">
             <a:avLst/>
@@ -3221,34 +3321,67 @@
           <a:noFill/>
         </p:spPr>
         <p:txBody>
-          <a:bodyPr wrap="square">
-            <a:spAutoFit/>
-          </a:bodyPr>
+          <a:bodyPr wrap="square"/>
+          <a:lstStyle/>
+          <a:p>
+            <a:pPr algn="l">
+              <a:defRPr sz="1200" b="1">
+                <a:solidFill>
+                  <a:srgbClr val="F97316"/>
+                </a:solidFill>
+                <a:latin typeface="Calibri"/>
+              </a:defRPr>
+            </a:pPr>
+            <a:r>
+              <a:t>DEMO SCRIPT · 90 SECONDS</a:t>
+            </a:r>
+          </a:p>
+        </p:txBody>
+      </p:sp>
+      <p:sp>
+        <p:nvSpPr>
+          <p:cNvPr id="4" name="TextBox 3"/>
+          <p:cNvSpPr txBox="1"/>
+          <p:nvPr/>
+        </p:nvSpPr>
+        <p:spPr>
+          <a:xfrm>
+            <a:off x="502920" y="566928"/>
+            <a:ext cx="11155680" cy="640080"/>
+          </a:xfrm>
+          <a:prstGeom prst="rect">
+            <a:avLst/>
+          </a:prstGeom>
+          <a:noFill/>
+        </p:spPr>
+        <p:txBody>
+          <a:bodyPr wrap="square"/>
           <a:lstStyle/>
           <a:p>
             <a:pPr algn="l">
               <a:defRPr sz="3200" b="1">
                 <a:solidFill>
-                  <a:srgbClr val="F97316"/>
-                </a:solidFill>
-              </a:defRPr>
-            </a:pPr>
-            <a:r>
-              <a:t>Stack</a:t>
-            </a:r>
-          </a:p>
-        </p:txBody>
-      </p:sp>
-      <p:sp>
-        <p:nvSpPr>
-          <p:cNvPr id="3" name="TextBox 2"/>
+                  <a:srgbClr val="FAFAFA"/>
+                </a:solidFill>
+                <a:latin typeface="Calibri"/>
+              </a:defRPr>
+            </a:pPr>
+            <a:r>
+              <a:t>Show the map. Then the consent.</a:t>
+            </a:r>
+          </a:p>
+        </p:txBody>
+      </p:sp>
+      <p:sp>
+        <p:nvSpPr>
+          <p:cNvPr id="5" name="TextBox 4"/>
           <p:cNvSpPr txBox="1"/>
           <p:nvPr/>
         </p:nvSpPr>
         <p:spPr>
           <a:xfrm>
-            <a:off x="777240" y="1325880"/>
-            <a:ext cx="10241280" cy="4754880"/>
+            <a:off x="640080" y="1554480"/>
+            <a:ext cx="10972800" cy="640080"/>
           </a:xfrm>
           <a:prstGeom prst="rect">
             <a:avLst/>
@@ -3256,53 +3389,155 @@
           <a:noFill/>
         </p:spPr>
         <p:txBody>
-          <a:bodyPr wrap="square">
-            <a:spAutoFit/>
-          </a:bodyPr>
-          <a:lstStyle/>
-          <a:p>
-            <a:pPr>
-              <a:spcAft>
-                <a:spcPts val="1400"/>
-              </a:spcAft>
-              <a:defRPr sz="2000">
+          <a:bodyPr wrap="square"/>
+          <a:lstStyle/>
+          <a:p>
+            <a:pPr algn="l">
+              <a:defRPr sz="2200" b="0">
                 <a:solidFill>
                   <a:srgbClr val="FAFAFA"/>
                 </a:solidFill>
-              </a:defRPr>
-            </a:pPr>
-            <a:r>
-              <a:t>FastAPI · AssemblyAI Voice + STT + LLM Gateway</a:t>
-            </a:r>
-          </a:p>
-          <a:p>
-            <a:pPr>
-              <a:spcAft>
-                <a:spcPts val="1400"/>
-              </a:spcAft>
-              <a:defRPr sz="2000">
+                <a:latin typeface="Calibri"/>
+              </a:defRPr>
+            </a:pPr>
+            <a:r>
+              <a:t>1   Open the live URL with ?repo=owner/name. Point at hotspots.</a:t>
+            </a:r>
+          </a:p>
+        </p:txBody>
+      </p:sp>
+      <p:sp>
+        <p:nvSpPr>
+          <p:cNvPr id="6" name="TextBox 5"/>
+          <p:cNvSpPr txBox="1"/>
+          <p:nvPr/>
+        </p:nvSpPr>
+        <p:spPr>
+          <a:xfrm>
+            <a:off x="640080" y="2331720"/>
+            <a:ext cx="10972800" cy="640080"/>
+          </a:xfrm>
+          <a:prstGeom prst="rect">
+            <a:avLst/>
+          </a:prstGeom>
+          <a:noFill/>
+        </p:spPr>
+        <p:txBody>
+          <a:bodyPr wrap="square"/>
+          <a:lstStyle/>
+          <a:p>
+            <a:pPr algn="l">
+              <a:defRPr sz="2200" b="0">
                 <a:solidFill>
                   <a:srgbClr val="FAFAFA"/>
                 </a:solidFill>
-              </a:defRPr>
-            </a:pPr>
-            <a:r>
-              <a:t>GitHub REST / OAuth · D3 map ingest</a:t>
-            </a:r>
-          </a:p>
-          <a:p>
-            <a:pPr>
-              <a:spcAft>
-                <a:spcPts val="1400"/>
-              </a:spcAft>
-              <a:defRPr sz="2000">
+                <a:latin typeface="Calibri"/>
+              </a:defRPr>
+            </a:pPr>
+            <a:r>
+              <a:t>2   “Explain the landmarks.” Then “What changed in the latest commit?”</a:t>
+            </a:r>
+          </a:p>
+        </p:txBody>
+      </p:sp>
+      <p:sp>
+        <p:nvSpPr>
+          <p:cNvPr id="7" name="TextBox 6"/>
+          <p:cNvSpPr txBox="1"/>
+          <p:nvPr/>
+        </p:nvSpPr>
+        <p:spPr>
+          <a:xfrm>
+            <a:off x="640080" y="3108960"/>
+            <a:ext cx="10972800" cy="640080"/>
+          </a:xfrm>
+          <a:prstGeom prst="rect">
+            <a:avLst/>
+          </a:prstGeom>
+          <a:noFill/>
+        </p:spPr>
+        <p:txBody>
+          <a:bodyPr wrap="square"/>
+          <a:lstStyle/>
+          <a:p>
+            <a:pPr algn="l">
+              <a:defRPr sz="2200" b="0">
                 <a:solidFill>
                   <a:srgbClr val="FAFAFA"/>
                 </a:solidFill>
-              </a:defRPr>
-            </a:pPr>
-            <a:r>
-              <a:t>Deployed on Google Cloud Run</a:t>
+                <a:latin typeface="Calibri"/>
+              </a:defRPr>
+            </a:pPr>
+            <a:r>
+              <a:t>3   “Scan this repository for security issues.”</a:t>
+            </a:r>
+          </a:p>
+        </p:txBody>
+      </p:sp>
+      <p:sp>
+        <p:nvSpPr>
+          <p:cNvPr id="8" name="TextBox 7"/>
+          <p:cNvSpPr txBox="1"/>
+          <p:nvPr/>
+        </p:nvSpPr>
+        <p:spPr>
+          <a:xfrm>
+            <a:off x="640080" y="3886200"/>
+            <a:ext cx="10972800" cy="640080"/>
+          </a:xfrm>
+          <a:prstGeom prst="rect">
+            <a:avLst/>
+          </a:prstGeom>
+          <a:noFill/>
+        </p:spPr>
+        <p:txBody>
+          <a:bodyPr wrap="square"/>
+          <a:lstStyle/>
+          <a:p>
+            <a:pPr algn="l">
+              <a:defRPr sz="2200" b="0">
+                <a:solidFill>
+                  <a:srgbClr val="FAFAFA"/>
+                </a:solidFill>
+                <a:latin typeface="Calibri"/>
+              </a:defRPr>
+            </a:pPr>
+            <a:r>
+              <a:t>4   “Open an issue titled Friday demo.” Show the draft. Do not post yet.</a:t>
+            </a:r>
+          </a:p>
+        </p:txBody>
+      </p:sp>
+      <p:sp>
+        <p:nvSpPr>
+          <p:cNvPr id="9" name="TextBox 8"/>
+          <p:cNvSpPr txBox="1"/>
+          <p:nvPr/>
+        </p:nvSpPr>
+        <p:spPr>
+          <a:xfrm>
+            <a:off x="640080" y="4663440"/>
+            <a:ext cx="10972800" cy="640080"/>
+          </a:xfrm>
+          <a:prstGeom prst="rect">
+            <a:avLst/>
+          </a:prstGeom>
+          <a:noFill/>
+        </p:spPr>
+        <p:txBody>
+          <a:bodyPr wrap="square"/>
+          <a:lstStyle/>
+          <a:p>
+            <a:pPr algn="l">
+              <a:defRPr sz="2200" b="0">
+                <a:solidFill>
+                  <a:srgbClr val="FAFAFA"/>
+                </a:solidFill>
+                <a:latin typeface="Calibri"/>
+              </a:defRPr>
+            </a:pPr>
+            <a:r>
+              <a:t>5   Next turn: “yes.” Show the GitHub link.</a:t>
             </a:r>
           </a:p>
         </p:txBody>
@@ -3318,14 +3553,6 @@
 <file path=ppt/slides/slide11.xml><?xml version="1.0" encoding="utf-8"?>
 <p:sld xmlns:a="http://schemas.openxmlformats.org/drawingml/2006/main" xmlns:p="http://schemas.openxmlformats.org/presentationml/2006/main" xmlns:r="http://schemas.openxmlformats.org/officeDocument/2006/relationships">
   <p:cSld>
-    <p:bg>
-      <p:bgPr>
-        <a:solidFill>
-          <a:srgbClr val="0A0A0A"/>
-        </a:solidFill>
-        <a:effectLst/>
-      </p:bgPr>
-    </p:bg>
     <p:spTree>
       <p:nvGrpSpPr>
         <p:cNvPr id="1" name=""/>
@@ -3335,14 +3562,57 @@
       <p:grpSpPr/>
       <p:sp>
         <p:nvSpPr>
-          <p:cNvPr id="2" name="TextBox 1"/>
+          <p:cNvPr id="2" name="Rectangle 1"/>
+          <p:cNvSpPr/>
+          <p:nvPr/>
+        </p:nvSpPr>
+        <p:spPr>
+          <a:xfrm>
+            <a:off x="0" y="0"/>
+            <a:ext cx="12191695" cy="6858000"/>
+          </a:xfrm>
+          <a:prstGeom prst="rect">
+            <a:avLst/>
+          </a:prstGeom>
+          <a:solidFill>
+            <a:srgbClr val="0B0B0C"/>
+          </a:solidFill>
+          <a:ln>
+            <a:noFill/>
+          </a:ln>
+        </p:spPr>
+        <p:style>
+          <a:lnRef idx="1">
+            <a:schemeClr val="accent1"/>
+          </a:lnRef>
+          <a:fillRef idx="3">
+            <a:schemeClr val="accent1"/>
+          </a:fillRef>
+          <a:effectRef idx="2">
+            <a:schemeClr val="accent1"/>
+          </a:effectRef>
+          <a:fontRef idx="minor">
+            <a:schemeClr val="lt1"/>
+          </a:fontRef>
+        </p:style>
+        <p:txBody>
+          <a:bodyPr rtlCol="0" anchor="ctr"/>
+          <a:lstStyle/>
+          <a:p>
+            <a:pPr algn="ctr"/>
+          </a:p>
+        </p:txBody>
+      </p:sp>
+      <p:sp>
+        <p:nvSpPr>
+          <p:cNvPr id="3" name="TextBox 2"/>
           <p:cNvSpPr txBox="1"/>
           <p:nvPr/>
         </p:nvSpPr>
         <p:spPr>
           <a:xfrm>
-            <a:off x="685800" y="1828800"/>
-            <a:ext cx="10515600" cy="1280160"/>
+            <a:off x="502920" y="292608"/>
+            <a:ext cx="7315200" cy="292608"/>
           </a:xfrm>
           <a:prstGeom prst="rect">
             <a:avLst/>
@@ -3350,9 +3620,109 @@
           <a:noFill/>
         </p:spPr>
         <p:txBody>
-          <a:bodyPr wrap="square">
-            <a:spAutoFit/>
-          </a:bodyPr>
+          <a:bodyPr wrap="square"/>
+          <a:lstStyle/>
+          <a:p>
+            <a:pPr algn="l">
+              <a:defRPr sz="1200" b="1">
+                <a:solidFill>
+                  <a:srgbClr val="F97316"/>
+                </a:solidFill>
+                <a:latin typeface="Calibri"/>
+              </a:defRPr>
+            </a:pPr>
+            <a:r>
+              <a:t>WHY NOW</a:t>
+            </a:r>
+          </a:p>
+        </p:txBody>
+      </p:sp>
+      <p:sp>
+        <p:nvSpPr>
+          <p:cNvPr id="4" name="TextBox 3"/>
+          <p:cNvSpPr txBox="1"/>
+          <p:nvPr/>
+        </p:nvSpPr>
+        <p:spPr>
+          <a:xfrm>
+            <a:off x="502920" y="566928"/>
+            <a:ext cx="11155680" cy="640080"/>
+          </a:xfrm>
+          <a:prstGeom prst="rect">
+            <a:avLst/>
+          </a:prstGeom>
+          <a:noFill/>
+        </p:spPr>
+        <p:txBody>
+          <a:bodyPr wrap="square"/>
+          <a:lstStyle/>
+          <a:p>
+            <a:pPr algn="l">
+              <a:defRPr sz="3200" b="1">
+                <a:solidFill>
+                  <a:srgbClr val="FAFAFA"/>
+                </a:solidFill>
+                <a:latin typeface="Calibri"/>
+              </a:defRPr>
+            </a:pPr>
+            <a:r>
+              <a:t>The approval window is narrowing.</a:t>
+            </a:r>
+          </a:p>
+        </p:txBody>
+      </p:sp>
+      <p:sp>
+        <p:nvSpPr>
+          <p:cNvPr id="5" name="TextBox 4"/>
+          <p:cNvSpPr txBox="1"/>
+          <p:nvPr/>
+        </p:nvSpPr>
+        <p:spPr>
+          <a:xfrm>
+            <a:off x="502920" y="1554480"/>
+            <a:ext cx="10972800" cy="1280160"/>
+          </a:xfrm>
+          <a:prstGeom prst="rect">
+            <a:avLst/>
+          </a:prstGeom>
+          <a:noFill/>
+        </p:spPr>
+        <p:txBody>
+          <a:bodyPr wrap="square"/>
+          <a:lstStyle/>
+          <a:p>
+            <a:pPr algn="l">
+              <a:defRPr sz="2200" b="0">
+                <a:solidFill>
+                  <a:srgbClr val="FAFAFA"/>
+                </a:solidFill>
+                <a:latin typeface="Calibri"/>
+              </a:defRPr>
+            </a:pPr>
+            <a:r>
+              <a:t>We can keep generating faster than we understand. Or we can put a map, a voice, and a hard yes in front of every action that leaves the building.</a:t>
+            </a:r>
+          </a:p>
+        </p:txBody>
+      </p:sp>
+      <p:sp>
+        <p:nvSpPr>
+          <p:cNvPr id="6" name="TextBox 5"/>
+          <p:cNvSpPr txBox="1"/>
+          <p:nvPr/>
+        </p:nvSpPr>
+        <p:spPr>
+          <a:xfrm>
+            <a:off x="502920" y="3291840"/>
+            <a:ext cx="10972800" cy="640080"/>
+          </a:xfrm>
+          <a:prstGeom prst="rect">
+            <a:avLst/>
+          </a:prstGeom>
+          <a:noFill/>
+        </p:spPr>
+        <p:txBody>
+          <a:bodyPr wrap="square"/>
           <a:lstStyle/>
           <a:p>
             <a:pPr algn="l">
@@ -3360,24 +3730,25 @@
                 <a:solidFill>
                   <a:srgbClr val="F97316"/>
                 </a:solidFill>
-              </a:defRPr>
-            </a:pPr>
-            <a:r>
-              <a:t>Try it</a:t>
-            </a:r>
-          </a:p>
-        </p:txBody>
-      </p:sp>
-      <p:sp>
-        <p:nvSpPr>
-          <p:cNvPr id="3" name="TextBox 2"/>
+                <a:latin typeface="Calibri"/>
+              </a:defRPr>
+            </a:pPr>
+            <a:r>
+              <a:t>Friday</a:t>
+            </a:r>
+          </a:p>
+        </p:txBody>
+      </p:sp>
+      <p:sp>
+        <p:nvSpPr>
+          <p:cNvPr id="7" name="TextBox 6"/>
           <p:cNvSpPr txBox="1"/>
           <p:nvPr/>
         </p:nvSpPr>
         <p:spPr>
           <a:xfrm>
-            <a:off x="685800" y="2743200"/>
-            <a:ext cx="10515600" cy="1097280"/>
+            <a:off x="502920" y="4114800"/>
+            <a:ext cx="10972800" cy="365760"/>
           </a:xfrm>
           <a:prstGeom prst="rect">
             <a:avLst/>
@@ -3385,225 +3756,53 @@
           <a:noFill/>
         </p:spPr>
         <p:txBody>
-          <a:bodyPr wrap="none">
-            <a:spAutoFit/>
-          </a:bodyPr>
-          <a:lstStyle/>
-          <a:p>
-            <a:pPr>
-              <a:defRPr sz="2000">
+          <a:bodyPr wrap="square"/>
+          <a:lstStyle/>
+          <a:p>
+            <a:pPr algn="l">
+              <a:defRPr sz="2000" b="0">
+                <a:solidFill>
+                  <a:srgbClr val="FAFAFA"/>
+                </a:solidFill>
+                <a:latin typeface="Calibri"/>
+              </a:defRPr>
+            </a:pPr>
+            <a:r>
+              <a:t>github.com/hatif03/friday-voice-agent</a:t>
+            </a:r>
+          </a:p>
+        </p:txBody>
+      </p:sp>
+      <p:sp>
+        <p:nvSpPr>
+          <p:cNvPr id="8" name="TextBox 7"/>
+          <p:cNvSpPr txBox="1"/>
+          <p:nvPr/>
+        </p:nvSpPr>
+        <p:spPr>
+          <a:xfrm>
+            <a:off x="502920" y="4663440"/>
+            <a:ext cx="10972800" cy="365760"/>
+          </a:xfrm>
+          <a:prstGeom prst="rect">
+            <a:avLst/>
+          </a:prstGeom>
+          <a:noFill/>
+        </p:spPr>
+        <p:txBody>
+          <a:bodyPr wrap="square"/>
+          <a:lstStyle/>
+          <a:p>
+            <a:pPr algn="l">
+              <a:defRPr sz="1800" b="0">
                 <a:solidFill>
                   <a:srgbClr val="A1A1AA"/>
                 </a:solidFill>
-              </a:defRPr>
-            </a:pPr>
-            <a:r>
-              <a:t>https://friday-voice-agent-147606977567.us-central1.run.app</a:t>
-            </a:r>
-            <a:br/>
-            <a:r>
-              <a:t>?repo=owner/name</a:t>
-            </a:r>
-            <a:br/>
-            <a:br/>
-            <a:r>
-              <a:t>Hold the mic · Explain the map · Check the latest commit</a:t>
-            </a:r>
-          </a:p>
-        </p:txBody>
-      </p:sp>
-    </p:spTree>
-  </p:cSld>
-  <p:clrMapOvr>
-    <a:masterClrMapping/>
-  </p:clrMapOvr>
-</p:sld>
-</file>
-
-<file path=ppt/slides/slide12.xml><?xml version="1.0" encoding="utf-8"?>
-<p:sld xmlns:a="http://schemas.openxmlformats.org/drawingml/2006/main" xmlns:p="http://schemas.openxmlformats.org/presentationml/2006/main" xmlns:r="http://schemas.openxmlformats.org/officeDocument/2006/relationships">
-  <p:cSld>
-    <p:bg>
-      <p:bgPr>
-        <a:solidFill>
-          <a:srgbClr val="0A0A0A"/>
-        </a:solidFill>
-        <a:effectLst/>
-      </p:bgPr>
-    </p:bg>
-    <p:spTree>
-      <p:nvGrpSpPr>
-        <p:cNvPr id="1" name=""/>
-        <p:cNvGrpSpPr/>
-        <p:nvPr/>
-      </p:nvGrpSpPr>
-      <p:grpSpPr/>
-      <p:sp>
-        <p:nvSpPr>
-          <p:cNvPr id="2" name="TextBox 1"/>
-          <p:cNvSpPr txBox="1"/>
-          <p:nvPr/>
-        </p:nvSpPr>
-        <p:spPr>
-          <a:xfrm>
-            <a:off x="685800" y="1737360"/>
-            <a:ext cx="10515600" cy="1280160"/>
-          </a:xfrm>
-          <a:prstGeom prst="rect">
-            <a:avLst/>
-          </a:prstGeom>
-          <a:noFill/>
-        </p:spPr>
-        <p:txBody>
-          <a:bodyPr wrap="square">
-            <a:spAutoFit/>
-          </a:bodyPr>
-          <a:lstStyle/>
-          <a:p>
-            <a:pPr algn="l">
-              <a:defRPr sz="3600" b="1">
-                <a:solidFill>
-                  <a:srgbClr val="FAFAFA"/>
-                </a:solidFill>
-              </a:defRPr>
-            </a:pPr>
-            <a:r>
-              <a:t>Why now</a:t>
-            </a:r>
-          </a:p>
-        </p:txBody>
-      </p:sp>
-      <p:sp>
-        <p:nvSpPr>
-          <p:cNvPr id="3" name="TextBox 2"/>
-          <p:cNvSpPr txBox="1"/>
-          <p:nvPr/>
-        </p:nvSpPr>
-        <p:spPr>
-          <a:xfrm>
-            <a:off x="685800" y="2743200"/>
-            <a:ext cx="10515600" cy="1097280"/>
-          </a:xfrm>
-          <a:prstGeom prst="rect">
-            <a:avLst/>
-          </a:prstGeom>
-          <a:noFill/>
-        </p:spPr>
-        <p:txBody>
-          <a:bodyPr wrap="none">
-            <a:spAutoFit/>
-          </a:bodyPr>
-          <a:lstStyle/>
-          <a:p>
-            <a:pPr>
-              <a:defRPr sz="2200">
-                <a:solidFill>
-                  <a:srgbClr val="A1A1AA"/>
-                </a:solidFill>
-              </a:defRPr>
-            </a:pPr>
-            <a:r>
-              <a:t>The window where humans still approve what ships is narrowing.</a:t>
-            </a:r>
-            <a:br/>
-            <a:r>
-              <a:t>Friday is how you keep orientation and consent in that window.</a:t>
-            </a:r>
-          </a:p>
-        </p:txBody>
-      </p:sp>
-    </p:spTree>
-  </p:cSld>
-  <p:clrMapOvr>
-    <a:masterClrMapping/>
-  </p:clrMapOvr>
-</p:sld>
-</file>
-
-<file path=ppt/slides/slide13.xml><?xml version="1.0" encoding="utf-8"?>
-<p:sld xmlns:a="http://schemas.openxmlformats.org/drawingml/2006/main" xmlns:p="http://schemas.openxmlformats.org/presentationml/2006/main" xmlns:r="http://schemas.openxmlformats.org/officeDocument/2006/relationships">
-  <p:cSld>
-    <p:bg>
-      <p:bgPr>
-        <a:solidFill>
-          <a:srgbClr val="0A0A0A"/>
-        </a:solidFill>
-        <a:effectLst/>
-      </p:bgPr>
-    </p:bg>
-    <p:spTree>
-      <p:nvGrpSpPr>
-        <p:cNvPr id="1" name=""/>
-        <p:cNvGrpSpPr/>
-        <p:nvPr/>
-      </p:nvGrpSpPr>
-      <p:grpSpPr/>
-      <p:sp>
-        <p:nvSpPr>
-          <p:cNvPr id="2" name="TextBox 1"/>
-          <p:cNvSpPr txBox="1"/>
-          <p:nvPr/>
-        </p:nvSpPr>
-        <p:spPr>
-          <a:xfrm>
-            <a:off x="685800" y="2286000"/>
-            <a:ext cx="10515600" cy="1280160"/>
-          </a:xfrm>
-          <a:prstGeom prst="rect">
-            <a:avLst/>
-          </a:prstGeom>
-          <a:noFill/>
-        </p:spPr>
-        <p:txBody>
-          <a:bodyPr wrap="square">
-            <a:spAutoFit/>
-          </a:bodyPr>
-          <a:lstStyle/>
-          <a:p>
-            <a:pPr algn="l">
-              <a:defRPr sz="4800" b="1">
-                <a:solidFill>
-                  <a:srgbClr val="FAFAFA"/>
-                </a:solidFill>
-              </a:defRPr>
-            </a:pPr>
-            <a:r>
-              <a:t>Friday</a:t>
-            </a:r>
-          </a:p>
-        </p:txBody>
-      </p:sp>
-      <p:sp>
-        <p:nvSpPr>
-          <p:cNvPr id="3" name="TextBox 2"/>
-          <p:cNvSpPr txBox="1"/>
-          <p:nvPr/>
-        </p:nvSpPr>
-        <p:spPr>
-          <a:xfrm>
-            <a:off x="685800" y="3108960"/>
-            <a:ext cx="10515600" cy="1097280"/>
-          </a:xfrm>
-          <a:prstGeom prst="rect">
-            <a:avLst/>
-          </a:prstGeom>
-          <a:noFill/>
-        </p:spPr>
-        <p:txBody>
-          <a:bodyPr wrap="none">
-            <a:spAutoFit/>
-          </a:bodyPr>
-          <a:lstStyle/>
-          <a:p>
-            <a:pPr>
-              <a:defRPr sz="2200">
-                <a:solidFill>
-                  <a:srgbClr val="A1A1AA"/>
-                </a:solidFill>
-              </a:defRPr>
-            </a:pPr>
-            <a:r>
-              <a:t>github.com/hatif03/friday-voice-agent</a:t>
+                <a:latin typeface="Calibri"/>
+              </a:defRPr>
+            </a:pPr>
+            <a:r>
+              <a:t>friday-voice-agent-147606977567.us-central1.run.app</a:t>
             </a:r>
           </a:p>
         </p:txBody>
@@ -3619,14 +3818,6 @@
 <file path=ppt/slides/slide2.xml><?xml version="1.0" encoding="utf-8"?>
 <p:sld xmlns:a="http://schemas.openxmlformats.org/drawingml/2006/main" xmlns:p="http://schemas.openxmlformats.org/presentationml/2006/main" xmlns:r="http://schemas.openxmlformats.org/officeDocument/2006/relationships">
   <p:cSld>
-    <p:bg>
-      <p:bgPr>
-        <a:solidFill>
-          <a:srgbClr val="0A0A0A"/>
-        </a:solidFill>
-        <a:effectLst/>
-      </p:bgPr>
-    </p:bg>
     <p:spTree>
       <p:nvGrpSpPr>
         <p:cNvPr id="1" name=""/>
@@ -3636,36 +3827,44 @@
       <p:grpSpPr/>
       <p:sp>
         <p:nvSpPr>
-          <p:cNvPr id="2" name="TextBox 1"/>
-          <p:cNvSpPr txBox="1"/>
-          <p:nvPr/>
-        </p:nvSpPr>
-        <p:spPr>
-          <a:xfrm>
-            <a:off x="685800" y="1828800"/>
-            <a:ext cx="10515600" cy="1280160"/>
+          <p:cNvPr id="2" name="Rectangle 1"/>
+          <p:cNvSpPr/>
+          <p:nvPr/>
+        </p:nvSpPr>
+        <p:spPr>
+          <a:xfrm>
+            <a:off x="0" y="0"/>
+            <a:ext cx="12191695" cy="6858000"/>
           </a:xfrm>
           <a:prstGeom prst="rect">
             <a:avLst/>
           </a:prstGeom>
-          <a:noFill/>
-        </p:spPr>
-        <p:txBody>
-          <a:bodyPr wrap="square">
-            <a:spAutoFit/>
-          </a:bodyPr>
-          <a:lstStyle/>
-          <a:p>
-            <a:pPr algn="l">
-              <a:defRPr sz="3800" b="1">
-                <a:solidFill>
-                  <a:srgbClr val="FAFAFA"/>
-                </a:solidFill>
-              </a:defRPr>
-            </a:pPr>
-            <a:r>
-              <a:t>We are in an existential squeeze.</a:t>
-            </a:r>
+          <a:solidFill>
+            <a:srgbClr val="0B0B0C"/>
+          </a:solidFill>
+          <a:ln>
+            <a:noFill/>
+          </a:ln>
+        </p:spPr>
+        <p:style>
+          <a:lnRef idx="1">
+            <a:schemeClr val="accent1"/>
+          </a:lnRef>
+          <a:fillRef idx="3">
+            <a:schemeClr val="accent1"/>
+          </a:fillRef>
+          <a:effectRef idx="2">
+            <a:schemeClr val="accent1"/>
+          </a:effectRef>
+          <a:fontRef idx="minor">
+            <a:schemeClr val="lt1"/>
+          </a:fontRef>
+        </p:style>
+        <p:txBody>
+          <a:bodyPr rtlCol="0" anchor="ctr"/>
+          <a:lstStyle/>
+          <a:p>
+            <a:pPr algn="ctr"/>
           </a:p>
         </p:txBody>
       </p:sp>
@@ -3677,8 +3876,8 @@
         </p:nvSpPr>
         <p:spPr>
           <a:xfrm>
-            <a:off x="685800" y="2926080"/>
-            <a:ext cx="10515600" cy="1097280"/>
+            <a:off x="502920" y="292608"/>
+            <a:ext cx="7315200" cy="292608"/>
           </a:xfrm>
           <a:prstGeom prst="rect">
             <a:avLst/>
@@ -3686,28 +3885,364 @@
           <a:noFill/>
         </p:spPr>
         <p:txBody>
-          <a:bodyPr wrap="none">
-            <a:spAutoFit/>
-          </a:bodyPr>
-          <a:lstStyle/>
+          <a:bodyPr wrap="square"/>
+          <a:lstStyle/>
+          <a:p>
+            <a:pPr algn="l">
+              <a:defRPr sz="1200" b="1">
+                <a:solidFill>
+                  <a:srgbClr val="F97316"/>
+                </a:solidFill>
+                <a:latin typeface="Calibri"/>
+              </a:defRPr>
+            </a:pPr>
+            <a:r>
+              <a:t>THE MOMENT</a:t>
+            </a:r>
+          </a:p>
+        </p:txBody>
+      </p:sp>
+      <p:sp>
+        <p:nvSpPr>
+          <p:cNvPr id="4" name="TextBox 3"/>
+          <p:cNvSpPr txBox="1"/>
+          <p:nvPr/>
+        </p:nvSpPr>
+        <p:spPr>
+          <a:xfrm>
+            <a:off x="502920" y="566928"/>
+            <a:ext cx="11155680" cy="640080"/>
+          </a:xfrm>
+          <a:prstGeom prst="rect">
+            <a:avLst/>
+          </a:prstGeom>
+          <a:noFill/>
+        </p:spPr>
+        <p:txBody>
+          <a:bodyPr wrap="square"/>
+          <a:lstStyle/>
+          <a:p>
+            <a:pPr algn="l">
+              <a:defRPr sz="3200" b="1">
+                <a:solidFill>
+                  <a:srgbClr val="FAFAFA"/>
+                </a:solidFill>
+                <a:latin typeface="Calibri"/>
+              </a:defRPr>
+            </a:pPr>
+            <a:r>
+              <a:t>Generation outran review.</a:t>
+            </a:r>
+          </a:p>
+        </p:txBody>
+      </p:sp>
+      <p:sp>
+        <p:nvSpPr>
+          <p:cNvPr id="5" name="TextBox 4"/>
+          <p:cNvSpPr txBox="1"/>
+          <p:nvPr/>
+        </p:nvSpPr>
+        <p:spPr>
+          <a:xfrm>
+            <a:off x="502920" y="1371600"/>
+            <a:ext cx="10972800" cy="1005840"/>
+          </a:xfrm>
+          <a:prstGeom prst="rect">
+            <a:avLst/>
+          </a:prstGeom>
+          <a:noFill/>
+        </p:spPr>
+        <p:txBody>
+          <a:bodyPr wrap="square"/>
+          <a:lstStyle/>
+          <a:p>
+            <a:pPr algn="l">
+              <a:defRPr sz="2000" b="0">
+                <a:solidFill>
+                  <a:srgbClr val="FAFAFA"/>
+                </a:solidFill>
+                <a:latin typeface="Calibri"/>
+              </a:defRPr>
+            </a:pPr>
+            <a:r>
+              <a:t>Models write code at machine speed. Humans are still the approval layer — expected to read every diff, catch logic bugs, and sign off on security. That does not scale.</a:t>
+            </a:r>
+          </a:p>
+        </p:txBody>
+      </p:sp>
+      <p:sp>
+        <p:nvSpPr>
+          <p:cNvPr id="6" name="Rounded Rectangle 5"/>
+          <p:cNvSpPr/>
+          <p:nvPr/>
+        </p:nvSpPr>
+        <p:spPr>
+          <a:xfrm>
+            <a:off x="502920" y="2743200"/>
+            <a:ext cx="3566160" cy="2194560"/>
+          </a:xfrm>
+          <a:prstGeom prst="roundRect">
+            <a:avLst/>
+          </a:prstGeom>
+          <a:solidFill>
+            <a:srgbClr val="18181B"/>
+          </a:solidFill>
+          <a:ln>
+            <a:solidFill>
+              <a:srgbClr val="3F3F46"/>
+            </a:solidFill>
+          </a:ln>
+        </p:spPr>
+        <p:style>
+          <a:lnRef idx="1">
+            <a:schemeClr val="accent1"/>
+          </a:lnRef>
+          <a:fillRef idx="3">
+            <a:schemeClr val="accent1"/>
+          </a:fillRef>
+          <a:effectRef idx="2">
+            <a:schemeClr val="accent1"/>
+          </a:effectRef>
+          <a:fontRef idx="minor">
+            <a:schemeClr val="lt1"/>
+          </a:fontRef>
+        </p:style>
+        <p:txBody>
+          <a:bodyPr rtlCol="0" anchor="ctr" wrap="square" lIns="164592" rIns="146304" tIns="128016"/>
+          <a:lstStyle/>
+          <a:p>
+            <a:pPr algn="ctr">
+              <a:defRPr sz="3200" b="1">
+                <a:solidFill>
+                  <a:srgbClr val="F97316"/>
+                </a:solidFill>
+                <a:latin typeface="Calibri"/>
+              </a:defRPr>
+            </a:pPr>
+            <a:r>
+              <a:t>↑ volume</a:t>
+            </a:r>
+          </a:p>
           <a:p>
             <a:pPr>
-              <a:defRPr sz="2200">
+              <a:defRPr sz="1600" b="1">
+                <a:solidFill>
+                  <a:srgbClr val="FAFAFA"/>
+                </a:solidFill>
+                <a:latin typeface="Calibri"/>
+              </a:defRPr>
+            </a:pPr>
+            <a:r>
+              <a:t>Output</a:t>
+            </a:r>
+          </a:p>
+          <a:p>
+            <a:pPr>
+              <a:defRPr sz="1300">
                 <a:solidFill>
                   <a:srgbClr val="A1A1AA"/>
                 </a:solidFill>
-              </a:defRPr>
-            </a:pPr>
-            <a:r>
-              <a:t>AI generates code at machine speed.</a:t>
-            </a:r>
-            <a:br/>
-            <a:r>
-              <a:t>Humans are still asked to review all of it.</a:t>
-            </a:r>
-            <a:br/>
-            <a:r>
-              <a:t>That math does not work.</a:t>
+                <a:latin typeface="Calibri"/>
+              </a:defRPr>
+            </a:pPr>
+            <a:r>
+              <a:t>AI coding tools are now default in daily work.</a:t>
+            </a:r>
+          </a:p>
+        </p:txBody>
+      </p:sp>
+      <p:sp>
+        <p:nvSpPr>
+          <p:cNvPr id="7" name="Rounded Rectangle 6"/>
+          <p:cNvSpPr/>
+          <p:nvPr/>
+        </p:nvSpPr>
+        <p:spPr>
+          <a:xfrm>
+            <a:off x="4297680" y="2743200"/>
+            <a:ext cx="3566160" cy="2194560"/>
+          </a:xfrm>
+          <a:prstGeom prst="roundRect">
+            <a:avLst/>
+          </a:prstGeom>
+          <a:solidFill>
+            <a:srgbClr val="18181B"/>
+          </a:solidFill>
+          <a:ln>
+            <a:solidFill>
+              <a:srgbClr val="3F3F46"/>
+            </a:solidFill>
+          </a:ln>
+        </p:spPr>
+        <p:style>
+          <a:lnRef idx="1">
+            <a:schemeClr val="accent1"/>
+          </a:lnRef>
+          <a:fillRef idx="3">
+            <a:schemeClr val="accent1"/>
+          </a:fillRef>
+          <a:effectRef idx="2">
+            <a:schemeClr val="accent1"/>
+          </a:effectRef>
+          <a:fontRef idx="minor">
+            <a:schemeClr val="lt1"/>
+          </a:fontRef>
+        </p:style>
+        <p:txBody>
+          <a:bodyPr rtlCol="0" anchor="ctr" wrap="square" lIns="164592" rIns="146304" tIns="128016"/>
+          <a:lstStyle/>
+          <a:p>
+            <a:pPr algn="ctr">
+              <a:defRPr sz="3200" b="1">
+                <a:solidFill>
+                  <a:srgbClr val="F97316"/>
+                </a:solidFill>
+                <a:latin typeface="Calibri"/>
+              </a:defRPr>
+            </a:pPr>
+            <a:r>
+              <a:t>flat</a:t>
+            </a:r>
+          </a:p>
+          <a:p>
+            <a:pPr>
+              <a:defRPr sz="1600" b="1">
+                <a:solidFill>
+                  <a:srgbClr val="FAFAFA"/>
+                </a:solidFill>
+                <a:latin typeface="Calibri"/>
+              </a:defRPr>
+            </a:pPr>
+            <a:r>
+              <a:t>Review</a:t>
+            </a:r>
+          </a:p>
+          <a:p>
+            <a:pPr>
+              <a:defRPr sz="1300">
+                <a:solidFill>
+                  <a:srgbClr val="A1A1AA"/>
+                </a:solidFill>
+                <a:latin typeface="Calibri"/>
+              </a:defRPr>
+            </a:pPr>
+            <a:r>
+              <a:t>Same humans, more diffs, same calendar.</a:t>
+            </a:r>
+          </a:p>
+        </p:txBody>
+      </p:sp>
+      <p:sp>
+        <p:nvSpPr>
+          <p:cNvPr id="8" name="Rounded Rectangle 7"/>
+          <p:cNvSpPr/>
+          <p:nvPr/>
+        </p:nvSpPr>
+        <p:spPr>
+          <a:xfrm>
+            <a:off x="8092440" y="2743200"/>
+            <a:ext cx="3566160" cy="2194560"/>
+          </a:xfrm>
+          <a:prstGeom prst="roundRect">
+            <a:avLst/>
+          </a:prstGeom>
+          <a:solidFill>
+            <a:srgbClr val="18181B"/>
+          </a:solidFill>
+          <a:ln>
+            <a:solidFill>
+              <a:srgbClr val="3F3F46"/>
+            </a:solidFill>
+          </a:ln>
+        </p:spPr>
+        <p:style>
+          <a:lnRef idx="1">
+            <a:schemeClr val="accent1"/>
+          </a:lnRef>
+          <a:fillRef idx="3">
+            <a:schemeClr val="accent1"/>
+          </a:fillRef>
+          <a:effectRef idx="2">
+            <a:schemeClr val="accent1"/>
+          </a:effectRef>
+          <a:fontRef idx="minor">
+            <a:schemeClr val="lt1"/>
+          </a:fontRef>
+        </p:style>
+        <p:txBody>
+          <a:bodyPr rtlCol="0" anchor="ctr" wrap="square" lIns="164592" rIns="146304" tIns="128016"/>
+          <a:lstStyle/>
+          <a:p>
+            <a:pPr algn="ctr">
+              <a:defRPr sz="3200" b="1">
+                <a:solidFill>
+                  <a:srgbClr val="F97316"/>
+                </a:solidFill>
+                <a:latin typeface="Calibri"/>
+              </a:defRPr>
+            </a:pPr>
+            <a:r>
+              <a:t>gap</a:t>
+            </a:r>
+          </a:p>
+          <a:p>
+            <a:pPr>
+              <a:defRPr sz="1600" b="1">
+                <a:solidFill>
+                  <a:srgbClr val="FAFAFA"/>
+                </a:solidFill>
+                <a:latin typeface="Calibri"/>
+              </a:defRPr>
+            </a:pPr>
+            <a:r>
+              <a:t>Risk</a:t>
+            </a:r>
+          </a:p>
+          <a:p>
+            <a:pPr>
+              <a:defRPr sz="1300">
+                <a:solidFill>
+                  <a:srgbClr val="A1A1AA"/>
+                </a:solidFill>
+                <a:latin typeface="Calibri"/>
+              </a:defRPr>
+            </a:pPr>
+            <a:r>
+              <a:t>Weak code ships before anyone holds the shape.</a:t>
+            </a:r>
+          </a:p>
+        </p:txBody>
+      </p:sp>
+      <p:sp>
+        <p:nvSpPr>
+          <p:cNvPr id="9" name="TextBox 8"/>
+          <p:cNvSpPr txBox="1"/>
+          <p:nvPr/>
+        </p:nvSpPr>
+        <p:spPr>
+          <a:xfrm>
+            <a:off x="502920" y="6446520"/>
+            <a:ext cx="11155680" cy="292608"/>
+          </a:xfrm>
+          <a:prstGeom prst="rect">
+            <a:avLst/>
+          </a:prstGeom>
+          <a:noFill/>
+        </p:spPr>
+        <p:txBody>
+          <a:bodyPr wrap="square"/>
+          <a:lstStyle/>
+          <a:p>
+            <a:pPr algn="l">
+              <a:defRPr sz="1100" b="0">
+                <a:solidFill>
+                  <a:srgbClr val="A1A1AA"/>
+                </a:solidFill>
+                <a:latin typeface="Calibri"/>
+              </a:defRPr>
+            </a:pPr>
+            <a:r>
+              <a:t>Thesis: orientation and consent have to move as fast as generation.</a:t>
             </a:r>
           </a:p>
         </p:txBody>
@@ -3723,14 +4258,6 @@
 <file path=ppt/slides/slide3.xml><?xml version="1.0" encoding="utf-8"?>
 <p:sld xmlns:a="http://schemas.openxmlformats.org/drawingml/2006/main" xmlns:p="http://schemas.openxmlformats.org/presentationml/2006/main" xmlns:r="http://schemas.openxmlformats.org/officeDocument/2006/relationships">
   <p:cSld>
-    <p:bg>
-      <p:bgPr>
-        <a:solidFill>
-          <a:srgbClr val="0A0A0A"/>
-        </a:solidFill>
-        <a:effectLst/>
-      </p:bgPr>
-    </p:bg>
     <p:spTree>
       <p:nvGrpSpPr>
         <p:cNvPr id="1" name=""/>
@@ -3740,14 +4267,57 @@
       <p:grpSpPr/>
       <p:sp>
         <p:nvSpPr>
-          <p:cNvPr id="2" name="TextBox 1"/>
+          <p:cNvPr id="2" name="Rectangle 1"/>
+          <p:cNvSpPr/>
+          <p:nvPr/>
+        </p:nvSpPr>
+        <p:spPr>
+          <a:xfrm>
+            <a:off x="0" y="0"/>
+            <a:ext cx="12191695" cy="6858000"/>
+          </a:xfrm>
+          <a:prstGeom prst="rect">
+            <a:avLst/>
+          </a:prstGeom>
+          <a:solidFill>
+            <a:srgbClr val="0B0B0C"/>
+          </a:solidFill>
+          <a:ln>
+            <a:noFill/>
+          </a:ln>
+        </p:spPr>
+        <p:style>
+          <a:lnRef idx="1">
+            <a:schemeClr val="accent1"/>
+          </a:lnRef>
+          <a:fillRef idx="3">
+            <a:schemeClr val="accent1"/>
+          </a:fillRef>
+          <a:effectRef idx="2">
+            <a:schemeClr val="accent1"/>
+          </a:effectRef>
+          <a:fontRef idx="minor">
+            <a:schemeClr val="lt1"/>
+          </a:fontRef>
+        </p:style>
+        <p:txBody>
+          <a:bodyPr rtlCol="0" anchor="ctr"/>
+          <a:lstStyle/>
+          <a:p>
+            <a:pPr algn="ctr"/>
+          </a:p>
+        </p:txBody>
+      </p:sp>
+      <p:sp>
+        <p:nvSpPr>
+          <p:cNvPr id="3" name="TextBox 2"/>
           <p:cNvSpPr txBox="1"/>
           <p:nvPr/>
         </p:nvSpPr>
         <p:spPr>
           <a:xfrm>
-            <a:off x="685800" y="502920"/>
-            <a:ext cx="10515600" cy="1280160"/>
+            <a:off x="502920" y="292608"/>
+            <a:ext cx="7315200" cy="292608"/>
           </a:xfrm>
           <a:prstGeom prst="rect">
             <a:avLst/>
@@ -3755,34 +4325,310 @@
           <a:noFill/>
         </p:spPr>
         <p:txBody>
-          <a:bodyPr wrap="square">
-            <a:spAutoFit/>
-          </a:bodyPr>
+          <a:bodyPr wrap="square"/>
+          <a:lstStyle/>
+          <a:p>
+            <a:pPr algn="l">
+              <a:defRPr sz="1200" b="1">
+                <a:solidFill>
+                  <a:srgbClr val="F97316"/>
+                </a:solidFill>
+                <a:latin typeface="Calibri"/>
+              </a:defRPr>
+            </a:pPr>
+            <a:r>
+              <a:t>WHAT THE RESEARCH SAYS</a:t>
+            </a:r>
+          </a:p>
+        </p:txBody>
+      </p:sp>
+      <p:sp>
+        <p:nvSpPr>
+          <p:cNvPr id="4" name="TextBox 3"/>
+          <p:cNvSpPr txBox="1"/>
+          <p:nvPr/>
+        </p:nvSpPr>
+        <p:spPr>
+          <a:xfrm>
+            <a:off x="502920" y="566928"/>
+            <a:ext cx="11155680" cy="640080"/>
+          </a:xfrm>
+          <a:prstGeom prst="rect">
+            <a:avLst/>
+          </a:prstGeom>
+          <a:noFill/>
+        </p:spPr>
+        <p:txBody>
+          <a:bodyPr wrap="square"/>
           <a:lstStyle/>
           <a:p>
             <a:pPr algn="l">
               <a:defRPr sz="3200" b="1">
                 <a:solidFill>
+                  <a:srgbClr val="FAFAFA"/>
+                </a:solidFill>
+                <a:latin typeface="Calibri"/>
+              </a:defRPr>
+            </a:pPr>
+            <a:r>
+              <a:t>Adoption is done. Control is not.</a:t>
+            </a:r>
+          </a:p>
+        </p:txBody>
+      </p:sp>
+      <p:sp>
+        <p:nvSpPr>
+          <p:cNvPr id="5" name="Rounded Rectangle 4"/>
+          <p:cNvSpPr/>
+          <p:nvPr/>
+        </p:nvSpPr>
+        <p:spPr>
+          <a:xfrm>
+            <a:off x="457200" y="1554480"/>
+            <a:ext cx="3657600" cy="4206240"/>
+          </a:xfrm>
+          <a:prstGeom prst="roundRect">
+            <a:avLst/>
+          </a:prstGeom>
+          <a:solidFill>
+            <a:srgbClr val="18181B"/>
+          </a:solidFill>
+          <a:ln>
+            <a:solidFill>
+              <a:srgbClr val="3F3F46"/>
+            </a:solidFill>
+          </a:ln>
+        </p:spPr>
+        <p:style>
+          <a:lnRef idx="1">
+            <a:schemeClr val="accent1"/>
+          </a:lnRef>
+          <a:fillRef idx="3">
+            <a:schemeClr val="accent1"/>
+          </a:fillRef>
+          <a:effectRef idx="2">
+            <a:schemeClr val="accent1"/>
+          </a:effectRef>
+          <a:fontRef idx="minor">
+            <a:schemeClr val="lt1"/>
+          </a:fontRef>
+        </p:style>
+        <p:txBody>
+          <a:bodyPr rtlCol="0" anchor="ctr" wrap="square" lIns="164592" rIns="146304" tIns="128016"/>
+          <a:lstStyle/>
+          <a:p>
+            <a:pPr algn="ctr">
+              <a:defRPr sz="3200" b="1">
+                <a:solidFill>
                   <a:srgbClr val="F97316"/>
                 </a:solidFill>
-              </a:defRPr>
-            </a:pPr>
-            <a:r>
-              <a:t>The review bottleneck</a:t>
-            </a:r>
-          </a:p>
-        </p:txBody>
-      </p:sp>
-      <p:sp>
-        <p:nvSpPr>
-          <p:cNvPr id="3" name="TextBox 2"/>
+                <a:latin typeface="Calibri"/>
+              </a:defRPr>
+            </a:pPr>
+            <a:r>
+              <a:t>97%+</a:t>
+            </a:r>
+          </a:p>
+          <a:p>
+            <a:pPr>
+              <a:defRPr sz="1600" b="1">
+                <a:solidFill>
+                  <a:srgbClr val="FAFAFA"/>
+                </a:solidFill>
+                <a:latin typeface="Calibri"/>
+              </a:defRPr>
+            </a:pPr>
+            <a:r>
+              <a:t>Used AI coding tools at work</a:t>
+            </a:r>
+          </a:p>
+          <a:p>
+            <a:pPr>
+              <a:defRPr sz="1300">
+                <a:solidFill>
+                  <a:srgbClr val="A1A1AA"/>
+                </a:solidFill>
+                <a:latin typeface="Calibri"/>
+              </a:defRPr>
+            </a:pPr>
+            <a:r>
+              <a:t>GitHub survey of 2,000 developers across four countries, 2024. Nearly everyone has tried the tools. Policy and review practice lag the habit.</a:t>
+            </a:r>
+          </a:p>
+        </p:txBody>
+      </p:sp>
+      <p:sp>
+        <p:nvSpPr>
+          <p:cNvPr id="6" name="Rounded Rectangle 5"/>
+          <p:cNvSpPr/>
+          <p:nvPr/>
+        </p:nvSpPr>
+        <p:spPr>
+          <a:xfrm>
+            <a:off x="4297680" y="1554480"/>
+            <a:ext cx="3657600" cy="4206240"/>
+          </a:xfrm>
+          <a:prstGeom prst="roundRect">
+            <a:avLst/>
+          </a:prstGeom>
+          <a:solidFill>
+            <a:srgbClr val="18181B"/>
+          </a:solidFill>
+          <a:ln>
+            <a:solidFill>
+              <a:srgbClr val="3F3F46"/>
+            </a:solidFill>
+          </a:ln>
+        </p:spPr>
+        <p:style>
+          <a:lnRef idx="1">
+            <a:schemeClr val="accent1"/>
+          </a:lnRef>
+          <a:fillRef idx="3">
+            <a:schemeClr val="accent1"/>
+          </a:fillRef>
+          <a:effectRef idx="2">
+            <a:schemeClr val="accent1"/>
+          </a:effectRef>
+          <a:fontRef idx="minor">
+            <a:schemeClr val="lt1"/>
+          </a:fontRef>
+        </p:style>
+        <p:txBody>
+          <a:bodyPr rtlCol="0" anchor="ctr" wrap="square" lIns="164592" rIns="146304" tIns="128016"/>
+          <a:lstStyle/>
+          <a:p>
+            <a:pPr algn="ctr">
+              <a:defRPr sz="3200" b="1">
+                <a:solidFill>
+                  <a:srgbClr val="F97316"/>
+                </a:solidFill>
+                <a:latin typeface="Calibri"/>
+              </a:defRPr>
+            </a:pPr>
+            <a:r>
+              <a:t>−7.2%</a:t>
+            </a:r>
+          </a:p>
+          <a:p>
+            <a:pPr>
+              <a:defRPr sz="1600" b="1">
+                <a:solidFill>
+                  <a:srgbClr val="FAFAFA"/>
+                </a:solidFill>
+                <a:latin typeface="Calibri"/>
+              </a:defRPr>
+            </a:pPr>
+            <a:r>
+              <a:t>Stability drop per +25% AI adoption</a:t>
+            </a:r>
+          </a:p>
+          <a:p>
+            <a:pPr>
+              <a:defRPr sz="1300">
+                <a:solidFill>
+                  <a:srgbClr val="A1A1AA"/>
+                </a:solidFill>
+                <a:latin typeface="Calibri"/>
+              </a:defRPr>
+            </a:pPr>
+            <a:r>
+              <a:t>Google DORA 2024: individual flow goes up. Delivery stability is estimated down 7.2%. Throughput slightly down too. Faster typing is not a healthier pipeline.</a:t>
+            </a:r>
+          </a:p>
+        </p:txBody>
+      </p:sp>
+      <p:sp>
+        <p:nvSpPr>
+          <p:cNvPr id="7" name="Rounded Rectangle 6"/>
+          <p:cNvSpPr/>
+          <p:nvPr/>
+        </p:nvSpPr>
+        <p:spPr>
+          <a:xfrm>
+            <a:off x="8138160" y="1554480"/>
+            <a:ext cx="3566160" cy="4206240"/>
+          </a:xfrm>
+          <a:prstGeom prst="roundRect">
+            <a:avLst/>
+          </a:prstGeom>
+          <a:solidFill>
+            <a:srgbClr val="18181B"/>
+          </a:solidFill>
+          <a:ln>
+            <a:solidFill>
+              <a:srgbClr val="3F3F46"/>
+            </a:solidFill>
+          </a:ln>
+        </p:spPr>
+        <p:style>
+          <a:lnRef idx="1">
+            <a:schemeClr val="accent1"/>
+          </a:lnRef>
+          <a:fillRef idx="3">
+            <a:schemeClr val="accent1"/>
+          </a:fillRef>
+          <a:effectRef idx="2">
+            <a:schemeClr val="accent1"/>
+          </a:effectRef>
+          <a:fontRef idx="minor">
+            <a:schemeClr val="lt1"/>
+          </a:fontRef>
+        </p:style>
+        <p:txBody>
+          <a:bodyPr rtlCol="0" anchor="ctr" wrap="square" lIns="164592" rIns="146304" tIns="128016"/>
+          <a:lstStyle/>
+          <a:p>
+            <a:pPr algn="ctr">
+              <a:defRPr sz="3200" b="1">
+                <a:solidFill>
+                  <a:srgbClr val="F97316"/>
+                </a:solidFill>
+                <a:latin typeface="Calibri"/>
+              </a:defRPr>
+            </a:pPr>
+            <a:r>
+              <a:t>45%</a:t>
+            </a:r>
+          </a:p>
+          <a:p>
+            <a:pPr>
+              <a:defRPr sz="1600" b="1">
+                <a:solidFill>
+                  <a:srgbClr val="FAFAFA"/>
+                </a:solidFill>
+                <a:latin typeface="Calibri"/>
+              </a:defRPr>
+            </a:pPr>
+            <a:r>
+              <a:t>AI code tasks with an OWASP flaw</a:t>
+            </a:r>
+          </a:p>
+          <a:p>
+            <a:pPr>
+              <a:defRPr sz="1300">
+                <a:solidFill>
+                  <a:srgbClr val="A1A1AA"/>
+                </a:solidFill>
+                <a:latin typeface="Calibri"/>
+              </a:defRPr>
+            </a:pPr>
+            <a:r>
+              <a:t>Veracode 2025: 100+ models, 80 tasks. Syntax improved. Security pass rate stayed ~55%. Newer models did not get meaningfully safer.</a:t>
+            </a:r>
+          </a:p>
+        </p:txBody>
+      </p:sp>
+      <p:sp>
+        <p:nvSpPr>
+          <p:cNvPr id="8" name="TextBox 7"/>
           <p:cNvSpPr txBox="1"/>
           <p:nvPr/>
         </p:nvSpPr>
         <p:spPr>
           <a:xfrm>
-            <a:off x="777240" y="1325880"/>
-            <a:ext cx="10241280" cy="4754880"/>
+            <a:off x="502920" y="6446520"/>
+            <a:ext cx="11155680" cy="292608"/>
           </a:xfrm>
           <a:prstGeom prst="rect">
             <a:avLst/>
@@ -3790,53 +4636,19 @@
           <a:noFill/>
         </p:spPr>
         <p:txBody>
-          <a:bodyPr wrap="square">
-            <a:spAutoFit/>
-          </a:bodyPr>
-          <a:lstStyle/>
-          <a:p>
-            <a:pPr>
-              <a:spcAft>
-                <a:spcPts val="1400"/>
-              </a:spcAft>
-              <a:defRPr sz="2000">
-                <a:solidFill>
-                  <a:srgbClr val="FAFAFA"/>
-                </a:solidFill>
-              </a:defRPr>
-            </a:pPr>
-            <a:r>
-              <a:t>PR queues and diff mountains grow with every agent-assisted sprint</a:t>
-            </a:r>
-          </a:p>
-          <a:p>
-            <a:pPr>
-              <a:spcAft>
-                <a:spcPts val="1400"/>
-              </a:spcAft>
-              <a:defRPr sz="2000">
-                <a:solidFill>
-                  <a:srgbClr val="FAFAFA"/>
-                </a:solidFill>
-              </a:defRPr>
-            </a:pPr>
-            <a:r>
-              <a:t>LGTM becomes survival, not assurance</a:t>
-            </a:r>
-          </a:p>
-          <a:p>
-            <a:pPr>
-              <a:spcAft>
-                <a:spcPts val="1400"/>
-              </a:spcAft>
-              <a:defRPr sz="2000">
-                <a:solidFill>
-                  <a:srgbClr val="FAFAFA"/>
-                </a:solidFill>
-              </a:defRPr>
-            </a:pPr>
-            <a:r>
-              <a:t>Nobody holds architecture + history + issues in one head</a:t>
+          <a:bodyPr wrap="square"/>
+          <a:lstStyle/>
+          <a:p>
+            <a:pPr algn="l">
+              <a:defRPr sz="1100" b="0">
+                <a:solidFill>
+                  <a:srgbClr val="A1A1AA"/>
+                </a:solidFill>
+                <a:latin typeface="Calibri"/>
+              </a:defRPr>
+            </a:pPr>
+            <a:r>
+              <a:t>Sources: GitHub AI in software development survey (2024) · DORA Accelerate State of DevOps 2024 · Veracode GenAI Code Security Report 2025</a:t>
             </a:r>
           </a:p>
         </p:txBody>
@@ -3852,14 +4664,6 @@
 <file path=ppt/slides/slide4.xml><?xml version="1.0" encoding="utf-8"?>
 <p:sld xmlns:a="http://schemas.openxmlformats.org/drawingml/2006/main" xmlns:p="http://schemas.openxmlformats.org/presentationml/2006/main" xmlns:r="http://schemas.openxmlformats.org/officeDocument/2006/relationships">
   <p:cSld>
-    <p:bg>
-      <p:bgPr>
-        <a:solidFill>
-          <a:srgbClr val="0A0A0A"/>
-        </a:solidFill>
-        <a:effectLst/>
-      </p:bgPr>
-    </p:bg>
     <p:spTree>
       <p:nvGrpSpPr>
         <p:cNvPr id="1" name=""/>
@@ -3869,14 +4673,57 @@
       <p:grpSpPr/>
       <p:sp>
         <p:nvSpPr>
-          <p:cNvPr id="2" name="TextBox 1"/>
+          <p:cNvPr id="2" name="Rectangle 1"/>
+          <p:cNvSpPr/>
+          <p:nvPr/>
+        </p:nvSpPr>
+        <p:spPr>
+          <a:xfrm>
+            <a:off x="0" y="0"/>
+            <a:ext cx="12191695" cy="6858000"/>
+          </a:xfrm>
+          <a:prstGeom prst="rect">
+            <a:avLst/>
+          </a:prstGeom>
+          <a:solidFill>
+            <a:srgbClr val="0B0B0C"/>
+          </a:solidFill>
+          <a:ln>
+            <a:noFill/>
+          </a:ln>
+        </p:spPr>
+        <p:style>
+          <a:lnRef idx="1">
+            <a:schemeClr val="accent1"/>
+          </a:lnRef>
+          <a:fillRef idx="3">
+            <a:schemeClr val="accent1"/>
+          </a:fillRef>
+          <a:effectRef idx="2">
+            <a:schemeClr val="accent1"/>
+          </a:effectRef>
+          <a:fontRef idx="minor">
+            <a:schemeClr val="lt1"/>
+          </a:fontRef>
+        </p:style>
+        <p:txBody>
+          <a:bodyPr rtlCol="0" anchor="ctr"/>
+          <a:lstStyle/>
+          <a:p>
+            <a:pPr algn="ctr"/>
+          </a:p>
+        </p:txBody>
+      </p:sp>
+      <p:sp>
+        <p:nvSpPr>
+          <p:cNvPr id="3" name="TextBox 2"/>
           <p:cNvSpPr txBox="1"/>
           <p:nvPr/>
         </p:nvSpPr>
         <p:spPr>
           <a:xfrm>
-            <a:off x="685800" y="502920"/>
-            <a:ext cx="10515600" cy="1280160"/>
+            <a:off x="502920" y="292608"/>
+            <a:ext cx="7315200" cy="292608"/>
           </a:xfrm>
           <a:prstGeom prst="rect">
             <a:avLst/>
@@ -3884,34 +4731,203 @@
           <a:noFill/>
         </p:spPr>
         <p:txBody>
-          <a:bodyPr wrap="square">
-            <a:spAutoFit/>
-          </a:bodyPr>
+          <a:bodyPr wrap="square"/>
+          <a:lstStyle/>
+          <a:p>
+            <a:pPr algn="l">
+              <a:defRPr sz="1200" b="1">
+                <a:solidFill>
+                  <a:srgbClr val="F97316"/>
+                </a:solidFill>
+                <a:latin typeface="Calibri"/>
+              </a:defRPr>
+            </a:pPr>
+            <a:r>
+              <a:t>THE ASYMMETRY</a:t>
+            </a:r>
+          </a:p>
+        </p:txBody>
+      </p:sp>
+      <p:sp>
+        <p:nvSpPr>
+          <p:cNvPr id="4" name="TextBox 3"/>
+          <p:cNvSpPr txBox="1"/>
+          <p:nvPr/>
+        </p:nvSpPr>
+        <p:spPr>
+          <a:xfrm>
+            <a:off x="502920" y="566928"/>
+            <a:ext cx="11155680" cy="640080"/>
+          </a:xfrm>
+          <a:prstGeom prst="rect">
+            <a:avLst/>
+          </a:prstGeom>
+          <a:noFill/>
+        </p:spPr>
+        <p:txBody>
+          <a:bodyPr wrap="square"/>
           <a:lstStyle/>
           <a:p>
             <a:pPr algn="l">
               <a:defRPr sz="3200" b="1">
                 <a:solidFill>
-                  <a:srgbClr val="F97316"/>
-                </a:solidFill>
-              </a:defRPr>
-            </a:pPr>
-            <a:r>
-              <a:t>The security asymmetry</a:t>
-            </a:r>
-          </a:p>
-        </p:txBody>
-      </p:sp>
-      <p:sp>
-        <p:nvSpPr>
-          <p:cNvPr id="3" name="TextBox 2"/>
+                  <a:srgbClr val="FAFAFA"/>
+                </a:solidFill>
+                <a:latin typeface="Calibri"/>
+              </a:defRPr>
+            </a:pPr>
+            <a:r>
+              <a:t>Offense automated. Understanding did not.</a:t>
+            </a:r>
+          </a:p>
+        </p:txBody>
+      </p:sp>
+      <p:sp>
+        <p:nvSpPr>
+          <p:cNvPr id="5" name="Rounded Rectangle 4"/>
+          <p:cNvSpPr/>
+          <p:nvPr/>
+        </p:nvSpPr>
+        <p:spPr>
+          <a:xfrm>
+            <a:off x="502920" y="1554480"/>
+            <a:ext cx="5486400" cy="4297680"/>
+          </a:xfrm>
+          <a:prstGeom prst="roundRect">
+            <a:avLst/>
+          </a:prstGeom>
+          <a:solidFill>
+            <a:srgbClr val="18181B"/>
+          </a:solidFill>
+          <a:ln>
+            <a:solidFill>
+              <a:srgbClr val="3F3F46"/>
+            </a:solidFill>
+          </a:ln>
+        </p:spPr>
+        <p:style>
+          <a:lnRef idx="1">
+            <a:schemeClr val="accent1"/>
+          </a:lnRef>
+          <a:fillRef idx="3">
+            <a:schemeClr val="accent1"/>
+          </a:fillRef>
+          <a:effectRef idx="2">
+            <a:schemeClr val="accent1"/>
+          </a:effectRef>
+          <a:fontRef idx="minor">
+            <a:schemeClr val="lt1"/>
+          </a:fontRef>
+        </p:style>
+        <p:txBody>
+          <a:bodyPr rtlCol="0" anchor="ctr" wrap="square" lIns="164592" rIns="146304" tIns="128016"/>
+          <a:lstStyle/>
+          <a:p>
+            <a:pPr algn="ctr">
+              <a:defRPr sz="1600" b="1">
+                <a:solidFill>
+                  <a:srgbClr val="FAFAFA"/>
+                </a:solidFill>
+                <a:latin typeface="Calibri"/>
+              </a:defRPr>
+            </a:pPr>
+            <a:r>
+              <a:t>What got faster</a:t>
+            </a:r>
+          </a:p>
+          <a:p>
+            <a:pPr>
+              <a:defRPr sz="1300">
+                <a:solidFill>
+                  <a:srgbClr val="A1A1AA"/>
+                </a:solidFill>
+                <a:latin typeface="Calibri"/>
+              </a:defRPr>
+            </a:pPr>
+            <a:r>
+              <a:t>Writing functions. Finding secrets, XSS, injection, and unsafe patterns. Opening issues and comments from an agent with no second look.</a:t>
+            </a:r>
+          </a:p>
+        </p:txBody>
+      </p:sp>
+      <p:sp>
+        <p:nvSpPr>
+          <p:cNvPr id="6" name="Rounded Rectangle 5"/>
+          <p:cNvSpPr/>
+          <p:nvPr/>
+        </p:nvSpPr>
+        <p:spPr>
+          <a:xfrm>
+            <a:off x="6217920" y="1554480"/>
+            <a:ext cx="5486400" cy="4297680"/>
+          </a:xfrm>
+          <a:prstGeom prst="roundRect">
+            <a:avLst/>
+          </a:prstGeom>
+          <a:solidFill>
+            <a:srgbClr val="18181B"/>
+          </a:solidFill>
+          <a:ln>
+            <a:solidFill>
+              <a:srgbClr val="3F3F46"/>
+            </a:solidFill>
+          </a:ln>
+        </p:spPr>
+        <p:style>
+          <a:lnRef idx="1">
+            <a:schemeClr val="accent1"/>
+          </a:lnRef>
+          <a:fillRef idx="3">
+            <a:schemeClr val="accent1"/>
+          </a:fillRef>
+          <a:effectRef idx="2">
+            <a:schemeClr val="accent1"/>
+          </a:effectRef>
+          <a:fontRef idx="minor">
+            <a:schemeClr val="lt1"/>
+          </a:fontRef>
+        </p:style>
+        <p:txBody>
+          <a:bodyPr rtlCol="0" anchor="ctr" wrap="square" lIns="164592" rIns="146304" tIns="128016"/>
+          <a:lstStyle/>
+          <a:p>
+            <a:pPr algn="ctr">
+              <a:defRPr sz="1600" b="1">
+                <a:solidFill>
+                  <a:srgbClr val="FAFAFA"/>
+                </a:solidFill>
+                <a:latin typeface="Calibri"/>
+              </a:defRPr>
+            </a:pPr>
+            <a:r>
+              <a:t>What stayed human-speed</a:t>
+            </a:r>
+          </a:p>
+          <a:p>
+            <a:pPr>
+              <a:defRPr sz="1300">
+                <a:solidFill>
+                  <a:srgbClr val="A1A1AA"/>
+                </a:solidFill>
+                <a:latin typeface="Calibri"/>
+              </a:defRPr>
+            </a:pPr>
+            <a:r>
+              <a:t>Holding architecture in your head. Reading the last commit against the map. Deciding what is safe to merge. Saying yes only when you mean it.</a:t>
+            </a:r>
+          </a:p>
+        </p:txBody>
+      </p:sp>
+      <p:sp>
+        <p:nvSpPr>
+          <p:cNvPr id="7" name="TextBox 6"/>
           <p:cNvSpPr txBox="1"/>
           <p:nvPr/>
         </p:nvSpPr>
         <p:spPr>
           <a:xfrm>
-            <a:off x="777240" y="1325880"/>
-            <a:ext cx="10241280" cy="4754880"/>
+            <a:off x="502920" y="6446520"/>
+            <a:ext cx="11155680" cy="292608"/>
           </a:xfrm>
           <a:prstGeom prst="rect">
             <a:avLst/>
@@ -3919,53 +4935,19 @@
           <a:noFill/>
         </p:spPr>
         <p:txBody>
-          <a:bodyPr wrap="square">
-            <a:spAutoFit/>
-          </a:bodyPr>
-          <a:lstStyle/>
-          <a:p>
-            <a:pPr>
-              <a:spcAft>
-                <a:spcPts val="1400"/>
-              </a:spcAft>
-              <a:defRPr sz="2000">
-                <a:solidFill>
-                  <a:srgbClr val="FAFAFA"/>
-                </a:solidFill>
-              </a:defRPr>
-            </a:pPr>
-            <a:r>
-              <a:t>AI finds vulnerabilities and unsafe patterns quickly</a:t>
-            </a:r>
-          </a:p>
-          <a:p>
-            <a:pPr>
-              <a:spcAft>
-                <a:spcPts val="1400"/>
-              </a:spcAft>
-              <a:defRPr sz="2000">
-                <a:solidFill>
-                  <a:srgbClr val="FAFAFA"/>
-                </a:solidFill>
-              </a:defRPr>
-            </a:pPr>
-            <a:r>
-              <a:t>Exploitation automates; understanding does not</a:t>
-            </a:r>
-          </a:p>
-          <a:p>
-            <a:pPr>
-              <a:spcAft>
-                <a:spcPts val="1400"/>
-              </a:spcAft>
-              <a:defRPr sz="2000">
-                <a:solidFill>
-                  <a:srgbClr val="FAFAFA"/>
-                </a:solidFill>
-              </a:defRPr>
-            </a:pPr>
-            <a:r>
-              <a:t>Ship fast without orientation → lose grip on what actually runs</a:t>
+          <a:bodyPr wrap="square"/>
+          <a:lstStyle/>
+          <a:p>
+            <a:pPr algn="l">
+              <a:defRPr sz="1100" b="0">
+                <a:solidFill>
+                  <a:srgbClr val="A1A1AA"/>
+                </a:solidFill>
+                <a:latin typeface="Calibri"/>
+              </a:defRPr>
+            </a:pPr>
+            <a:r>
+              <a:t>If we ship opaque volume, we lose grip on what actually runs.</a:t>
             </a:r>
           </a:p>
         </p:txBody>
@@ -3981,14 +4963,6 @@
 <file path=ppt/slides/slide5.xml><?xml version="1.0" encoding="utf-8"?>
 <p:sld xmlns:a="http://schemas.openxmlformats.org/drawingml/2006/main" xmlns:p="http://schemas.openxmlformats.org/presentationml/2006/main" xmlns:r="http://schemas.openxmlformats.org/officeDocument/2006/relationships">
   <p:cSld>
-    <p:bg>
-      <p:bgPr>
-        <a:solidFill>
-          <a:srgbClr val="0A0A0A"/>
-        </a:solidFill>
-        <a:effectLst/>
-      </p:bgPr>
-    </p:bg>
     <p:spTree>
       <p:nvGrpSpPr>
         <p:cNvPr id="1" name=""/>
@@ -3998,36 +4972,44 @@
       <p:grpSpPr/>
       <p:sp>
         <p:nvSpPr>
-          <p:cNvPr id="2" name="TextBox 1"/>
-          <p:cNvSpPr txBox="1"/>
-          <p:nvPr/>
-        </p:nvSpPr>
-        <p:spPr>
-          <a:xfrm>
-            <a:off x="685800" y="1645920"/>
-            <a:ext cx="10515600" cy="1280160"/>
+          <p:cNvPr id="2" name="Rectangle 1"/>
+          <p:cNvSpPr/>
+          <p:nvPr/>
+        </p:nvSpPr>
+        <p:spPr>
+          <a:xfrm>
+            <a:off x="0" y="0"/>
+            <a:ext cx="12191695" cy="6858000"/>
           </a:xfrm>
           <a:prstGeom prst="rect">
             <a:avLst/>
           </a:prstGeom>
-          <a:noFill/>
-        </p:spPr>
-        <p:txBody>
-          <a:bodyPr wrap="square">
-            <a:spAutoFit/>
-          </a:bodyPr>
-          <a:lstStyle/>
-          <a:p>
-            <a:pPr algn="l">
-              <a:defRPr sz="4400" b="1">
-                <a:solidFill>
-                  <a:srgbClr val="F97316"/>
-                </a:solidFill>
-              </a:defRPr>
-            </a:pPr>
-            <a:r>
-              <a:t>Friday</a:t>
-            </a:r>
+          <a:solidFill>
+            <a:srgbClr val="0B0B0C"/>
+          </a:solidFill>
+          <a:ln>
+            <a:noFill/>
+          </a:ln>
+        </p:spPr>
+        <p:style>
+          <a:lnRef idx="1">
+            <a:schemeClr val="accent1"/>
+          </a:lnRef>
+          <a:fillRef idx="3">
+            <a:schemeClr val="accent1"/>
+          </a:fillRef>
+          <a:effectRef idx="2">
+            <a:schemeClr val="accent1"/>
+          </a:effectRef>
+          <a:fontRef idx="minor">
+            <a:schemeClr val="lt1"/>
+          </a:fontRef>
+        </p:style>
+        <p:txBody>
+          <a:bodyPr rtlCol="0" anchor="ctr"/>
+          <a:lstStyle/>
+          <a:p>
+            <a:pPr algn="ctr"/>
           </a:p>
         </p:txBody>
       </p:sp>
@@ -4039,8 +5021,8 @@
         </p:nvSpPr>
         <p:spPr>
           <a:xfrm>
-            <a:off x="685800" y="2651760"/>
-            <a:ext cx="10515600" cy="1097280"/>
+            <a:off x="502920" y="292608"/>
+            <a:ext cx="7315200" cy="292608"/>
           </a:xfrm>
           <a:prstGeom prst="rect">
             <a:avLst/>
@@ -4048,24 +5030,291 @@
           <a:noFill/>
         </p:spPr>
         <p:txBody>
-          <a:bodyPr wrap="none">
-            <a:spAutoFit/>
-          </a:bodyPr>
-          <a:lstStyle/>
+          <a:bodyPr wrap="square"/>
+          <a:lstStyle/>
+          <a:p>
+            <a:pPr algn="l">
+              <a:defRPr sz="1200" b="1">
+                <a:solidFill>
+                  <a:srgbClr val="F97316"/>
+                </a:solidFill>
+                <a:latin typeface="Calibri"/>
+              </a:defRPr>
+            </a:pPr>
+            <a:r>
+              <a:t>THE PRODUCT</a:t>
+            </a:r>
+          </a:p>
+        </p:txBody>
+      </p:sp>
+      <p:sp>
+        <p:nvSpPr>
+          <p:cNvPr id="4" name="TextBox 3"/>
+          <p:cNvSpPr txBox="1"/>
+          <p:nvPr/>
+        </p:nvSpPr>
+        <p:spPr>
+          <a:xfrm>
+            <a:off x="502920" y="566928"/>
+            <a:ext cx="11155680" cy="640080"/>
+          </a:xfrm>
+          <a:prstGeom prst="rect">
+            <a:avLst/>
+          </a:prstGeom>
+          <a:noFill/>
+        </p:spPr>
+        <p:txBody>
+          <a:bodyPr wrap="square"/>
+          <a:lstStyle/>
+          <a:p>
+            <a:pPr algn="l">
+              <a:defRPr sz="3200" b="1">
+                <a:solidFill>
+                  <a:srgbClr val="FAFAFA"/>
+                </a:solidFill>
+                <a:latin typeface="Calibri"/>
+              </a:defRPr>
+            </a:pPr>
+            <a:r>
+              <a:t>Friday is a control surface, not another chat box.</a:t>
+            </a:r>
+          </a:p>
+        </p:txBody>
+      </p:sp>
+      <p:sp>
+        <p:nvSpPr>
+          <p:cNvPr id="5" name="TextBox 4"/>
+          <p:cNvSpPr txBox="1"/>
+          <p:nvPr/>
+        </p:nvSpPr>
+        <p:spPr>
+          <a:xfrm>
+            <a:off x="502920" y="1371600"/>
+            <a:ext cx="10972800" cy="822960"/>
+          </a:xfrm>
+          <a:prstGeom prst="rect">
+            <a:avLst/>
+          </a:prstGeom>
+          <a:noFill/>
+        </p:spPr>
+        <p:txBody>
+          <a:bodyPr wrap="square"/>
+          <a:lstStyle/>
+          <a:p>
+            <a:pPr algn="l">
+              <a:defRPr sz="1800" b="0">
+                <a:solidFill>
+                  <a:srgbClr val="A1A1AA"/>
+                </a:solidFill>
+                <a:latin typeface="Calibri"/>
+              </a:defRPr>
+            </a:pPr>
+            <a:r>
+              <a:t>A live map of the repo you already opened. Voice or type. Answers from ingested structure and real GitHub data. Writes wait for a later yes.</a:t>
+            </a:r>
+          </a:p>
+        </p:txBody>
+      </p:sp>
+      <p:sp>
+        <p:nvSpPr>
+          <p:cNvPr id="6" name="Rounded Rectangle 5"/>
+          <p:cNvSpPr/>
+          <p:nvPr/>
+        </p:nvSpPr>
+        <p:spPr>
+          <a:xfrm>
+            <a:off x="502920" y="2468880"/>
+            <a:ext cx="3611880" cy="3108960"/>
+          </a:xfrm>
+          <a:prstGeom prst="roundRect">
+            <a:avLst/>
+          </a:prstGeom>
+          <a:solidFill>
+            <a:srgbClr val="18181B"/>
+          </a:solidFill>
+          <a:ln>
+            <a:solidFill>
+              <a:srgbClr val="3F3F46"/>
+            </a:solidFill>
+          </a:ln>
+        </p:spPr>
+        <p:style>
+          <a:lnRef idx="1">
+            <a:schemeClr val="accent1"/>
+          </a:lnRef>
+          <a:fillRef idx="3">
+            <a:schemeClr val="accent1"/>
+          </a:fillRef>
+          <a:effectRef idx="2">
+            <a:schemeClr val="accent1"/>
+          </a:effectRef>
+          <a:fontRef idx="minor">
+            <a:schemeClr val="lt1"/>
+          </a:fontRef>
+        </p:style>
+        <p:txBody>
+          <a:bodyPr rtlCol="0" anchor="ctr" wrap="square" lIns="164592" rIns="146304" tIns="128016"/>
+          <a:lstStyle/>
+          <a:p>
+            <a:pPr algn="ctr">
+              <a:defRPr sz="1600" b="1">
+                <a:solidFill>
+                  <a:srgbClr val="FAFAFA"/>
+                </a:solidFill>
+                <a:latin typeface="Calibri"/>
+              </a:defRPr>
+            </a:pPr>
+            <a:r>
+              <a:t>See</a:t>
+            </a:r>
+          </a:p>
           <a:p>
             <a:pPr>
-              <a:defRPr sz="2200">
+              <a:defRPr sz="1300">
                 <a:solidFill>
                   <a:srgbClr val="A1A1AA"/>
                 </a:solidFill>
-              </a:defRPr>
-            </a:pPr>
-            <a:r>
-              <a:t>A voice-first control surface for the repo you have open.</a:t>
-            </a:r>
-            <a:br/>
-            <a:r>
-              <a:t>See the shape. Ask out loud. Stage GitHub actions. Confirm before you post.</a:t>
+                <a:latin typeface="Calibri"/>
+              </a:defRPr>
+            </a:pPr>
+            <a:r>
+              <a:t>Circle pack: entry, core, hotspots, heat, imports.</a:t>
+            </a:r>
+          </a:p>
+        </p:txBody>
+      </p:sp>
+      <p:sp>
+        <p:nvSpPr>
+          <p:cNvPr id="7" name="Rounded Rectangle 6"/>
+          <p:cNvSpPr/>
+          <p:nvPr/>
+        </p:nvSpPr>
+        <p:spPr>
+          <a:xfrm>
+            <a:off x="4343400" y="2468880"/>
+            <a:ext cx="3611880" cy="3108960"/>
+          </a:xfrm>
+          <a:prstGeom prst="roundRect">
+            <a:avLst/>
+          </a:prstGeom>
+          <a:solidFill>
+            <a:srgbClr val="18181B"/>
+          </a:solidFill>
+          <a:ln>
+            <a:solidFill>
+              <a:srgbClr val="3F3F46"/>
+            </a:solidFill>
+          </a:ln>
+        </p:spPr>
+        <p:style>
+          <a:lnRef idx="1">
+            <a:schemeClr val="accent1"/>
+          </a:lnRef>
+          <a:fillRef idx="3">
+            <a:schemeClr val="accent1"/>
+          </a:fillRef>
+          <a:effectRef idx="2">
+            <a:schemeClr val="accent1"/>
+          </a:effectRef>
+          <a:fontRef idx="minor">
+            <a:schemeClr val="lt1"/>
+          </a:fontRef>
+        </p:style>
+        <p:txBody>
+          <a:bodyPr rtlCol="0" anchor="ctr" wrap="square" lIns="164592" rIns="146304" tIns="128016"/>
+          <a:lstStyle/>
+          <a:p>
+            <a:pPr algn="ctr">
+              <a:defRPr sz="1600" b="1">
+                <a:solidFill>
+                  <a:srgbClr val="FAFAFA"/>
+                </a:solidFill>
+                <a:latin typeface="Calibri"/>
+              </a:defRPr>
+            </a:pPr>
+            <a:r>
+              <a:t>Ask</a:t>
+            </a:r>
+          </a:p>
+          <a:p>
+            <a:pPr>
+              <a:defRPr sz="1300">
+                <a:solidFill>
+                  <a:srgbClr val="A1A1AA"/>
+                </a:solidFill>
+                <a:latin typeface="Calibri"/>
+              </a:defRPr>
+            </a:pPr>
+            <a:r>
+              <a:t>Landmarks, diffs, issues, PRs, security, merge risk.</a:t>
+            </a:r>
+          </a:p>
+        </p:txBody>
+      </p:sp>
+      <p:sp>
+        <p:nvSpPr>
+          <p:cNvPr id="8" name="Rounded Rectangle 7"/>
+          <p:cNvSpPr/>
+          <p:nvPr/>
+        </p:nvSpPr>
+        <p:spPr>
+          <a:xfrm>
+            <a:off x="8183880" y="2468880"/>
+            <a:ext cx="3611880" cy="3108960"/>
+          </a:xfrm>
+          <a:prstGeom prst="roundRect">
+            <a:avLst/>
+          </a:prstGeom>
+          <a:solidFill>
+            <a:srgbClr val="18181B"/>
+          </a:solidFill>
+          <a:ln>
+            <a:solidFill>
+              <a:srgbClr val="3F3F46"/>
+            </a:solidFill>
+          </a:ln>
+        </p:spPr>
+        <p:style>
+          <a:lnRef idx="1">
+            <a:schemeClr val="accent1"/>
+          </a:lnRef>
+          <a:fillRef idx="3">
+            <a:schemeClr val="accent1"/>
+          </a:fillRef>
+          <a:effectRef idx="2">
+            <a:schemeClr val="accent1"/>
+          </a:effectRef>
+          <a:fontRef idx="minor">
+            <a:schemeClr val="lt1"/>
+          </a:fontRef>
+        </p:style>
+        <p:txBody>
+          <a:bodyPr rtlCol="0" anchor="ctr" wrap="square" lIns="164592" rIns="146304" tIns="128016"/>
+          <a:lstStyle/>
+          <a:p>
+            <a:pPr algn="ctr">
+              <a:defRPr sz="1600" b="1">
+                <a:solidFill>
+                  <a:srgbClr val="FAFAFA"/>
+                </a:solidFill>
+                <a:latin typeface="Calibri"/>
+              </a:defRPr>
+            </a:pPr>
+            <a:r>
+              <a:t>Act</a:t>
+            </a:r>
+          </a:p>
+          <a:p>
+            <a:pPr>
+              <a:defRPr sz="1300">
+                <a:solidFill>
+                  <a:srgbClr val="A1A1AA"/>
+                </a:solidFill>
+                <a:latin typeface="Calibri"/>
+              </a:defRPr>
+            </a:pPr>
+            <a:r>
+              <a:t>Stage an issue or comment. Post only after yes.</a:t>
             </a:r>
           </a:p>
         </p:txBody>
@@ -4081,14 +5330,6 @@
 <file path=ppt/slides/slide6.xml><?xml version="1.0" encoding="utf-8"?>
 <p:sld xmlns:a="http://schemas.openxmlformats.org/drawingml/2006/main" xmlns:p="http://schemas.openxmlformats.org/presentationml/2006/main" xmlns:r="http://schemas.openxmlformats.org/officeDocument/2006/relationships">
   <p:cSld>
-    <p:bg>
-      <p:bgPr>
-        <a:solidFill>
-          <a:srgbClr val="0A0A0A"/>
-        </a:solidFill>
-        <a:effectLst/>
-      </p:bgPr>
-    </p:bg>
     <p:spTree>
       <p:nvGrpSpPr>
         <p:cNvPr id="1" name=""/>
@@ -4098,14 +5339,57 @@
       <p:grpSpPr/>
       <p:sp>
         <p:nvSpPr>
-          <p:cNvPr id="2" name="TextBox 1"/>
+          <p:cNvPr id="2" name="Rectangle 1"/>
+          <p:cNvSpPr/>
+          <p:nvPr/>
+        </p:nvSpPr>
+        <p:spPr>
+          <a:xfrm>
+            <a:off x="0" y="0"/>
+            <a:ext cx="12191695" cy="6858000"/>
+          </a:xfrm>
+          <a:prstGeom prst="rect">
+            <a:avLst/>
+          </a:prstGeom>
+          <a:solidFill>
+            <a:srgbClr val="0B0B0C"/>
+          </a:solidFill>
+          <a:ln>
+            <a:noFill/>
+          </a:ln>
+        </p:spPr>
+        <p:style>
+          <a:lnRef idx="1">
+            <a:schemeClr val="accent1"/>
+          </a:lnRef>
+          <a:fillRef idx="3">
+            <a:schemeClr val="accent1"/>
+          </a:fillRef>
+          <a:effectRef idx="2">
+            <a:schemeClr val="accent1"/>
+          </a:effectRef>
+          <a:fontRef idx="minor">
+            <a:schemeClr val="lt1"/>
+          </a:fontRef>
+        </p:style>
+        <p:txBody>
+          <a:bodyPr rtlCol="0" anchor="ctr"/>
+          <a:lstStyle/>
+          <a:p>
+            <a:pPr algn="ctr"/>
+          </a:p>
+        </p:txBody>
+      </p:sp>
+      <p:sp>
+        <p:nvSpPr>
+          <p:cNvPr id="3" name="TextBox 2"/>
           <p:cNvSpPr txBox="1"/>
           <p:nvPr/>
         </p:nvSpPr>
         <p:spPr>
           <a:xfrm>
-            <a:off x="685800" y="502920"/>
-            <a:ext cx="10515600" cy="1280160"/>
+            <a:off x="502920" y="292608"/>
+            <a:ext cx="7315200" cy="292608"/>
           </a:xfrm>
           <a:prstGeom prst="rect">
             <a:avLst/>
@@ -4113,103 +5397,189 @@
           <a:noFill/>
         </p:spPr>
         <p:txBody>
-          <a:bodyPr wrap="square">
-            <a:spAutoFit/>
-          </a:bodyPr>
+          <a:bodyPr wrap="square"/>
+          <a:lstStyle/>
+          <a:p>
+            <a:pPr algn="l">
+              <a:defRPr sz="1200" b="1">
+                <a:solidFill>
+                  <a:srgbClr val="F97316"/>
+                </a:solidFill>
+                <a:latin typeface="Calibri"/>
+              </a:defRPr>
+            </a:pPr>
+            <a:r>
+              <a:t>THE JOB TO BE DONE</a:t>
+            </a:r>
+          </a:p>
+        </p:txBody>
+      </p:sp>
+      <p:sp>
+        <p:nvSpPr>
+          <p:cNvPr id="4" name="TextBox 3"/>
+          <p:cNvSpPr txBox="1"/>
+          <p:nvPr/>
+        </p:nvSpPr>
+        <p:spPr>
+          <a:xfrm>
+            <a:off x="502920" y="566928"/>
+            <a:ext cx="11155680" cy="640080"/>
+          </a:xfrm>
+          <a:prstGeom prst="rect">
+            <a:avLst/>
+          </a:prstGeom>
+          <a:noFill/>
+        </p:spPr>
+        <p:txBody>
+          <a:bodyPr wrap="square"/>
           <a:lstStyle/>
           <a:p>
             <a:pPr algn="l">
               <a:defRPr sz="3200" b="1">
                 <a:solidFill>
-                  <a:srgbClr val="F97316"/>
-                </a:solidFill>
-              </a:defRPr>
-            </a:pPr>
-            <a:r>
-              <a:t>Product</a:t>
-            </a:r>
-          </a:p>
-        </p:txBody>
-      </p:sp>
-      <p:sp>
-        <p:nvSpPr>
-          <p:cNvPr id="3" name="TextBox 2"/>
-          <p:cNvSpPr txBox="1"/>
-          <p:nvPr/>
-        </p:nvSpPr>
-        <p:spPr>
-          <a:xfrm>
-            <a:off x="777240" y="1325880"/>
-            <a:ext cx="10241280" cy="4754880"/>
-          </a:xfrm>
-          <a:prstGeom prst="rect">
-            <a:avLst/>
-          </a:prstGeom>
-          <a:noFill/>
-        </p:spPr>
-        <p:txBody>
-          <a:bodyPr wrap="square">
-            <a:spAutoFit/>
-          </a:bodyPr>
-          <a:lstStyle/>
+                  <a:srgbClr val="FAFAFA"/>
+                </a:solidFill>
+                <a:latin typeface="Calibri"/>
+              </a:defRPr>
+            </a:pPr>
+            <a:r>
+              <a:t>From tab sprawl to one spoken loop.</a:t>
+            </a:r>
+          </a:p>
+        </p:txBody>
+      </p:sp>
+      <p:sp>
+        <p:nvSpPr>
+          <p:cNvPr id="5" name="Rounded Rectangle 4"/>
+          <p:cNvSpPr/>
+          <p:nvPr/>
+        </p:nvSpPr>
+        <p:spPr>
+          <a:xfrm>
+            <a:off x="457200" y="1554480"/>
+            <a:ext cx="5486400" cy="4389120"/>
+          </a:xfrm>
+          <a:prstGeom prst="roundRect">
+            <a:avLst/>
+          </a:prstGeom>
+          <a:solidFill>
+            <a:srgbClr val="18181B"/>
+          </a:solidFill>
+          <a:ln>
+            <a:solidFill>
+              <a:srgbClr val="3F3F46"/>
+            </a:solidFill>
+          </a:ln>
+        </p:spPr>
+        <p:style>
+          <a:lnRef idx="1">
+            <a:schemeClr val="accent1"/>
+          </a:lnRef>
+          <a:fillRef idx="3">
+            <a:schemeClr val="accent1"/>
+          </a:fillRef>
+          <a:effectRef idx="2">
+            <a:schemeClr val="accent1"/>
+          </a:effectRef>
+          <a:fontRef idx="minor">
+            <a:schemeClr val="lt1"/>
+          </a:fontRef>
+        </p:style>
+        <p:txBody>
+          <a:bodyPr rtlCol="0" anchor="ctr" wrap="square" lIns="164592" rIns="146304" tIns="128016"/>
+          <a:lstStyle/>
+          <a:p>
+            <a:pPr algn="ctr">
+              <a:defRPr sz="1600" b="1">
+                <a:solidFill>
+                  <a:srgbClr val="FAFAFA"/>
+                </a:solidFill>
+                <a:latin typeface="Calibri"/>
+              </a:defRPr>
+            </a:pPr>
+            <a:r>
+              <a:t>Today</a:t>
+            </a:r>
+          </a:p>
           <a:p>
             <a:pPr>
-              <a:spcAft>
-                <a:spcPts val="1400"/>
-              </a:spcAft>
-              <a:defRPr sz="2000">
+              <a:defRPr sz="1300">
+                <a:solidFill>
+                  <a:srgbClr val="A1A1AA"/>
+                </a:solidFill>
+                <a:latin typeface="Calibri"/>
+              </a:defRPr>
+            </a:pPr>
+            <a:r>
+              <a:t>Files in the editor. History in another tab. Issues somewhere else. A chatbot that invents paths. An agent that posts before you look.</a:t>
+            </a:r>
+          </a:p>
+        </p:txBody>
+      </p:sp>
+      <p:sp>
+        <p:nvSpPr>
+          <p:cNvPr id="6" name="Rounded Rectangle 5"/>
+          <p:cNvSpPr/>
+          <p:nvPr/>
+        </p:nvSpPr>
+        <p:spPr>
+          <a:xfrm>
+            <a:off x="6217920" y="1554480"/>
+            <a:ext cx="5486400" cy="4389120"/>
+          </a:xfrm>
+          <a:prstGeom prst="roundRect">
+            <a:avLst/>
+          </a:prstGeom>
+          <a:solidFill>
+            <a:srgbClr val="18181B"/>
+          </a:solidFill>
+          <a:ln>
+            <a:solidFill>
+              <a:srgbClr val="3F3F46"/>
+            </a:solidFill>
+          </a:ln>
+        </p:spPr>
+        <p:style>
+          <a:lnRef idx="1">
+            <a:schemeClr val="accent1"/>
+          </a:lnRef>
+          <a:fillRef idx="3">
+            <a:schemeClr val="accent1"/>
+          </a:fillRef>
+          <a:effectRef idx="2">
+            <a:schemeClr val="accent1"/>
+          </a:effectRef>
+          <a:fontRef idx="minor">
+            <a:schemeClr val="lt1"/>
+          </a:fontRef>
+        </p:style>
+        <p:txBody>
+          <a:bodyPr rtlCol="0" anchor="ctr" wrap="square" lIns="164592" rIns="146304" tIns="128016"/>
+          <a:lstStyle/>
+          <a:p>
+            <a:pPr algn="ctr">
+              <a:defRPr sz="1600" b="1">
                 <a:solidFill>
                   <a:srgbClr val="FAFAFA"/>
                 </a:solidFill>
-              </a:defRPr>
-            </a:pPr>
-            <a:r>
-              <a:t>Circle-pack map — entry points, core, hotspots</a:t>
+                <a:latin typeface="Calibri"/>
+              </a:defRPr>
+            </a:pPr>
+            <a:r>
+              <a:t>With Friday</a:t>
             </a:r>
           </a:p>
           <a:p>
             <a:pPr>
-              <a:spcAft>
-                <a:spcPts val="1400"/>
-              </a:spcAft>
-              <a:defRPr sz="2000">
-                <a:solidFill>
-                  <a:srgbClr val="FAFAFA"/>
-                </a:solidFill>
-              </a:defRPr>
-            </a:pPr>
-            <a:r>
-              <a:t>Landmarks + layers — heat, imports, focus</a:t>
-            </a:r>
-          </a:p>
-          <a:p>
-            <a:pPr>
-              <a:spcAft>
-                <a:spcPts val="1400"/>
-              </a:spcAft>
-              <a:defRPr sz="2000">
-                <a:solidFill>
-                  <a:srgbClr val="FAFAFA"/>
-                </a:solidFill>
-              </a:defRPr>
-            </a:pPr>
-            <a:r>
-              <a:t>Voice (AssemblyAI) + typed Ask — same brain</a:t>
-            </a:r>
-          </a:p>
-          <a:p>
-            <a:pPr>
-              <a:spcAft>
-                <a:spcPts val="1400"/>
-              </a:spcAft>
-              <a:defRPr sz="2000">
-                <a:solidFill>
-                  <a:srgbClr val="FAFAFA"/>
-                </a:solidFill>
-              </a:defRPr>
-            </a:pPr>
-            <a:r>
-              <a:t>Commits, issues, PRs, security scan, merge review</a:t>
+              <a:defRPr sz="1300">
+                <a:solidFill>
+                  <a:srgbClr val="A1A1AA"/>
+                </a:solidFill>
+                <a:latin typeface="Calibri"/>
+              </a:defRPr>
+            </a:pPr>
+            <a:r>
+              <a:t>Map on screen. “What changed?” “Is this safe?” “Open an issue titled …” Draft appears. You say yes on the next turn. Link comes back.</a:t>
             </a:r>
           </a:p>
         </p:txBody>
@@ -4225,14 +5595,6 @@
 <file path=ppt/slides/slide7.xml><?xml version="1.0" encoding="utf-8"?>
 <p:sld xmlns:a="http://schemas.openxmlformats.org/drawingml/2006/main" xmlns:p="http://schemas.openxmlformats.org/presentationml/2006/main" xmlns:r="http://schemas.openxmlformats.org/officeDocument/2006/relationships">
   <p:cSld>
-    <p:bg>
-      <p:bgPr>
-        <a:solidFill>
-          <a:srgbClr val="0A0A0A"/>
-        </a:solidFill>
-        <a:effectLst/>
-      </p:bgPr>
-    </p:bg>
     <p:spTree>
       <p:nvGrpSpPr>
         <p:cNvPr id="1" name=""/>
@@ -4242,60 +5604,23 @@
       <p:grpSpPr/>
       <p:sp>
         <p:nvSpPr>
-          <p:cNvPr id="2" name="TextBox 1"/>
-          <p:cNvSpPr txBox="1"/>
-          <p:nvPr/>
-        </p:nvSpPr>
-        <p:spPr>
-          <a:xfrm>
-            <a:off x="685800" y="411480"/>
-            <a:ext cx="10515600" cy="1280160"/>
+          <p:cNvPr id="2" name="Rectangle 1"/>
+          <p:cNvSpPr/>
+          <p:nvPr/>
+        </p:nvSpPr>
+        <p:spPr>
+          <a:xfrm>
+            <a:off x="0" y="0"/>
+            <a:ext cx="12191695" cy="6858000"/>
           </a:xfrm>
           <a:prstGeom prst="rect">
             <a:avLst/>
           </a:prstGeom>
-          <a:noFill/>
-        </p:spPr>
-        <p:txBody>
-          <a:bodyPr wrap="square">
-            <a:spAutoFit/>
-          </a:bodyPr>
-          <a:lstStyle/>
-          <a:p>
-            <a:pPr algn="l">
-              <a:defRPr sz="3000" b="1">
-                <a:solidFill>
-                  <a:srgbClr val="F97316"/>
-                </a:solidFill>
-              </a:defRPr>
-            </a:pPr>
-            <a:r>
-              <a:t>How Friday works</a:t>
-            </a:r>
-          </a:p>
-        </p:txBody>
-      </p:sp>
-      <p:sp>
-        <p:nvSpPr>
-          <p:cNvPr id="3" name="Rounded Rectangle 2"/>
-          <p:cNvSpPr/>
-          <p:nvPr/>
-        </p:nvSpPr>
-        <p:spPr>
-          <a:xfrm>
-            <a:off x="548640" y="2148840"/>
-            <a:ext cx="2377440" cy="1234440"/>
-          </a:xfrm>
-          <a:prstGeom prst="roundRect">
-            <a:avLst/>
-          </a:prstGeom>
           <a:solidFill>
-            <a:srgbClr val="1C1C1E"/>
+            <a:srgbClr val="0B0B0C"/>
           </a:solidFill>
           <a:ln>
-            <a:solidFill>
-              <a:srgbClr val="F97316"/>
-            </a:solidFill>
+            <a:noFill/>
           </a:ln>
         </p:spPr>
         <p:style>
@@ -4316,50 +5641,99 @@
           <a:bodyPr rtlCol="0" anchor="ctr"/>
           <a:lstStyle/>
           <a:p>
-            <a:pPr algn="ctr">
-              <a:defRPr sz="1800" b="1">
+            <a:pPr algn="ctr"/>
+          </a:p>
+        </p:txBody>
+      </p:sp>
+      <p:sp>
+        <p:nvSpPr>
+          <p:cNvPr id="3" name="TextBox 2"/>
+          <p:cNvSpPr txBox="1"/>
+          <p:nvPr/>
+        </p:nvSpPr>
+        <p:spPr>
+          <a:xfrm>
+            <a:off x="502920" y="292608"/>
+            <a:ext cx="7315200" cy="292608"/>
+          </a:xfrm>
+          <a:prstGeom prst="rect">
+            <a:avLst/>
+          </a:prstGeom>
+          <a:noFill/>
+        </p:spPr>
+        <p:txBody>
+          <a:bodyPr wrap="square"/>
+          <a:lstStyle/>
+          <a:p>
+            <a:pPr algn="l">
+              <a:defRPr sz="1200" b="1">
+                <a:solidFill>
+                  <a:srgbClr val="F97316"/>
+                </a:solidFill>
+                <a:latin typeface="Calibri"/>
+              </a:defRPr>
+            </a:pPr>
+            <a:r>
+              <a:t>SYSTEM</a:t>
+            </a:r>
+          </a:p>
+        </p:txBody>
+      </p:sp>
+      <p:sp>
+        <p:nvSpPr>
+          <p:cNvPr id="4" name="TextBox 3"/>
+          <p:cNvSpPr txBox="1"/>
+          <p:nvPr/>
+        </p:nvSpPr>
+        <p:spPr>
+          <a:xfrm>
+            <a:off x="502920" y="566928"/>
+            <a:ext cx="11155680" cy="640080"/>
+          </a:xfrm>
+          <a:prstGeom prst="rect">
+            <a:avLst/>
+          </a:prstGeom>
+          <a:noFill/>
+        </p:spPr>
+        <p:txBody>
+          <a:bodyPr wrap="square"/>
+          <a:lstStyle/>
+          <a:p>
+            <a:pPr algn="l">
+              <a:defRPr sz="3200" b="1">
                 <a:solidFill>
                   <a:srgbClr val="FAFAFA"/>
                 </a:solidFill>
-              </a:defRPr>
-            </a:pPr>
-            <a:r>
-              <a:t>You</a:t>
-            </a:r>
-          </a:p>
-          <a:p>
-            <a:pPr>
-              <a:defRPr sz="1300">
-                <a:solidFill>
-                  <a:srgbClr val="A1A1AA"/>
-                </a:solidFill>
-              </a:defRPr>
-            </a:pPr>
-            <a:r>
-              <a:t>Voice or text</a:t>
-            </a:r>
-          </a:p>
-        </p:txBody>
-      </p:sp>
-      <p:sp>
-        <p:nvSpPr>
-          <p:cNvPr id="4" name="Right Arrow 3"/>
+                <a:latin typeface="Calibri"/>
+              </a:defRPr>
+            </a:pPr>
+            <a:r>
+              <a:t>One turn. Ground truth. Then consent.</a:t>
+            </a:r>
+          </a:p>
+        </p:txBody>
+      </p:sp>
+      <p:sp>
+        <p:nvSpPr>
+          <p:cNvPr id="5" name="Rounded Rectangle 4"/>
           <p:cNvSpPr/>
           <p:nvPr/>
         </p:nvSpPr>
         <p:spPr>
           <a:xfrm>
-            <a:off x="2971800" y="2560320"/>
-            <a:ext cx="228599" cy="320040"/>
-          </a:xfrm>
-          <a:prstGeom prst="rightArrow">
+            <a:off x="365760" y="1965960"/>
+            <a:ext cx="2148840" cy="2103120"/>
+          </a:xfrm>
+          <a:prstGeom prst="roundRect">
             <a:avLst/>
           </a:prstGeom>
           <a:solidFill>
-            <a:srgbClr val="A1A1AA"/>
+            <a:srgbClr val="18181B"/>
           </a:solidFill>
           <a:ln>
-            <a:noFill/>
+            <a:solidFill>
+              <a:srgbClr val="3F3F46"/>
+            </a:solidFill>
           </a:ln>
         </p:spPr>
         <p:style>
@@ -4377,34 +5751,55 @@
           </a:fontRef>
         </p:style>
         <p:txBody>
-          <a:bodyPr rtlCol="0" anchor="ctr"/>
-          <a:lstStyle/>
-          <a:p>
-            <a:pPr algn="ctr"/>
-          </a:p>
-        </p:txBody>
-      </p:sp>
-      <p:sp>
-        <p:nvSpPr>
-          <p:cNvPr id="5" name="Rounded Rectangle 4"/>
+          <a:bodyPr rtlCol="0" anchor="ctr" wrap="square" lIns="164592" rIns="146304" tIns="128016"/>
+          <a:lstStyle/>
+          <a:p>
+            <a:pPr algn="ctr">
+              <a:defRPr sz="1600" b="1">
+                <a:solidFill>
+                  <a:srgbClr val="FAFAFA"/>
+                </a:solidFill>
+                <a:latin typeface="Calibri"/>
+              </a:defRPr>
+            </a:pPr>
+            <a:r>
+              <a:t>1  You</a:t>
+            </a:r>
+          </a:p>
+          <a:p>
+            <a:pPr>
+              <a:defRPr sz="1300">
+                <a:solidFill>
+                  <a:srgbClr val="A1A1AA"/>
+                </a:solidFill>
+                <a:latin typeface="Calibri"/>
+              </a:defRPr>
+            </a:pPr>
+            <a:r>
+              <a:t>Hold mic or Ask</a:t>
+            </a:r>
+          </a:p>
+        </p:txBody>
+      </p:sp>
+      <p:sp>
+        <p:nvSpPr>
+          <p:cNvPr id="6" name="Right Arrow 5"/>
           <p:cNvSpPr/>
           <p:nvPr/>
         </p:nvSpPr>
         <p:spPr>
           <a:xfrm>
-            <a:off x="3246120" y="2148840"/>
-            <a:ext cx="2377440" cy="1234440"/>
-          </a:xfrm>
-          <a:prstGeom prst="roundRect">
+            <a:off x="2450591" y="2834640"/>
+            <a:ext cx="201168" cy="256032"/>
+          </a:xfrm>
+          <a:prstGeom prst="rightArrow">
             <a:avLst/>
           </a:prstGeom>
           <a:solidFill>
-            <a:srgbClr val="1C1C1E"/>
+            <a:srgbClr val="F97316"/>
           </a:solidFill>
           <a:ln>
-            <a:solidFill>
-              <a:srgbClr val="F97316"/>
-            </a:solidFill>
+            <a:noFill/>
           </a:ln>
         </p:spPr>
         <p:style>
@@ -4425,50 +5820,31 @@
           <a:bodyPr rtlCol="0" anchor="ctr"/>
           <a:lstStyle/>
           <a:p>
-            <a:pPr algn="ctr">
-              <a:defRPr sz="1800" b="1">
-                <a:solidFill>
-                  <a:srgbClr val="FAFAFA"/>
-                </a:solidFill>
-              </a:defRPr>
-            </a:pPr>
-            <a:r>
-              <a:t>Friday</a:t>
-            </a:r>
-          </a:p>
-          <a:p>
-            <a:pPr>
-              <a:defRPr sz="1300">
-                <a:solidFill>
-                  <a:srgbClr val="A1A1AA"/>
-                </a:solidFill>
-              </a:defRPr>
-            </a:pPr>
-            <a:r>
-              <a:t>Route + tools</a:t>
-            </a:r>
-          </a:p>
-        </p:txBody>
-      </p:sp>
-      <p:sp>
-        <p:nvSpPr>
-          <p:cNvPr id="6" name="Right Arrow 5"/>
+            <a:pPr algn="ctr"/>
+          </a:p>
+        </p:txBody>
+      </p:sp>
+      <p:sp>
+        <p:nvSpPr>
+          <p:cNvPr id="7" name="Rounded Rectangle 6"/>
           <p:cNvSpPr/>
           <p:nvPr/>
         </p:nvSpPr>
         <p:spPr>
           <a:xfrm>
-            <a:off x="5669280" y="2560320"/>
-            <a:ext cx="228599" cy="320040"/>
-          </a:xfrm>
-          <a:prstGeom prst="rightArrow">
+            <a:off x="2697479" y="1965960"/>
+            <a:ext cx="2148840" cy="2103120"/>
+          </a:xfrm>
+          <a:prstGeom prst="roundRect">
             <a:avLst/>
           </a:prstGeom>
           <a:solidFill>
-            <a:srgbClr val="A1A1AA"/>
+            <a:srgbClr val="18181B"/>
           </a:solidFill>
           <a:ln>
-            <a:noFill/>
+            <a:solidFill>
+              <a:srgbClr val="3F3F46"/>
+            </a:solidFill>
           </a:ln>
         </p:spPr>
         <p:style>
@@ -4486,34 +5862,55 @@
           </a:fontRef>
         </p:style>
         <p:txBody>
-          <a:bodyPr rtlCol="0" anchor="ctr"/>
-          <a:lstStyle/>
-          <a:p>
-            <a:pPr algn="ctr"/>
-          </a:p>
-        </p:txBody>
-      </p:sp>
-      <p:sp>
-        <p:nvSpPr>
-          <p:cNvPr id="7" name="Rounded Rectangle 6"/>
+          <a:bodyPr rtlCol="0" anchor="ctr" wrap="square" lIns="164592" rIns="146304" tIns="128016"/>
+          <a:lstStyle/>
+          <a:p>
+            <a:pPr algn="ctr">
+              <a:defRPr sz="1600" b="1">
+                <a:solidFill>
+                  <a:srgbClr val="FAFAFA"/>
+                </a:solidFill>
+                <a:latin typeface="Calibri"/>
+              </a:defRPr>
+            </a:pPr>
+            <a:r>
+              <a:t>2  Route</a:t>
+            </a:r>
+          </a:p>
+          <a:p>
+            <a:pPr>
+              <a:defRPr sz="1300">
+                <a:solidFill>
+                  <a:srgbClr val="A1A1AA"/>
+                </a:solidFill>
+                <a:latin typeface="Calibri"/>
+              </a:defRPr>
+            </a:pPr>
+            <a:r>
+              <a:t>Parser, Jev, or Gateway</a:t>
+            </a:r>
+          </a:p>
+        </p:txBody>
+      </p:sp>
+      <p:sp>
+        <p:nvSpPr>
+          <p:cNvPr id="8" name="Right Arrow 7"/>
           <p:cNvSpPr/>
           <p:nvPr/>
         </p:nvSpPr>
         <p:spPr>
           <a:xfrm>
-            <a:off x="5943600" y="2148840"/>
-            <a:ext cx="2377440" cy="1234440"/>
-          </a:xfrm>
-          <a:prstGeom prst="roundRect">
+            <a:off x="4782312" y="2834640"/>
+            <a:ext cx="201168" cy="256032"/>
+          </a:xfrm>
+          <a:prstGeom prst="rightArrow">
             <a:avLst/>
           </a:prstGeom>
           <a:solidFill>
-            <a:srgbClr val="1C1C1E"/>
+            <a:srgbClr val="F97316"/>
           </a:solidFill>
           <a:ln>
-            <a:solidFill>
-              <a:srgbClr val="F97316"/>
-            </a:solidFill>
+            <a:noFill/>
           </a:ln>
         </p:spPr>
         <p:style>
@@ -4534,50 +5931,31 @@
           <a:bodyPr rtlCol="0" anchor="ctr"/>
           <a:lstStyle/>
           <a:p>
-            <a:pPr algn="ctr">
-              <a:defRPr sz="1800" b="1">
-                <a:solidFill>
-                  <a:srgbClr val="FAFAFA"/>
-                </a:solidFill>
-              </a:defRPr>
-            </a:pPr>
-            <a:r>
-              <a:t>Map + GitHub</a:t>
-            </a:r>
-          </a:p>
-          <a:p>
-            <a:pPr>
-              <a:defRPr sz="1300">
-                <a:solidFill>
-                  <a:srgbClr val="A1A1AA"/>
-                </a:solidFill>
-              </a:defRPr>
-            </a:pPr>
-            <a:r>
-              <a:t>Ground truth</a:t>
-            </a:r>
-          </a:p>
-        </p:txBody>
-      </p:sp>
-      <p:sp>
-        <p:nvSpPr>
-          <p:cNvPr id="8" name="Right Arrow 7"/>
+            <a:pPr algn="ctr"/>
+          </a:p>
+        </p:txBody>
+      </p:sp>
+      <p:sp>
+        <p:nvSpPr>
+          <p:cNvPr id="9" name="Rounded Rectangle 8"/>
           <p:cNvSpPr/>
           <p:nvPr/>
         </p:nvSpPr>
         <p:spPr>
           <a:xfrm>
-            <a:off x="8366760" y="2560320"/>
-            <a:ext cx="228599" cy="320040"/>
-          </a:xfrm>
-          <a:prstGeom prst="rightArrow">
+            <a:off x="5029200" y="1965960"/>
+            <a:ext cx="2148840" cy="2103120"/>
+          </a:xfrm>
+          <a:prstGeom prst="roundRect">
             <a:avLst/>
           </a:prstGeom>
           <a:solidFill>
-            <a:srgbClr val="A1A1AA"/>
+            <a:srgbClr val="18181B"/>
           </a:solidFill>
           <a:ln>
-            <a:noFill/>
+            <a:solidFill>
+              <a:srgbClr val="3F3F46"/>
+            </a:solidFill>
           </a:ln>
         </p:spPr>
         <p:style>
@@ -4595,34 +5973,55 @@
           </a:fontRef>
         </p:style>
         <p:txBody>
-          <a:bodyPr rtlCol="0" anchor="ctr"/>
-          <a:lstStyle/>
-          <a:p>
-            <a:pPr algn="ctr"/>
-          </a:p>
-        </p:txBody>
-      </p:sp>
-      <p:sp>
-        <p:nvSpPr>
-          <p:cNvPr id="9" name="Rounded Rectangle 8"/>
+          <a:bodyPr rtlCol="0" anchor="ctr" wrap="square" lIns="164592" rIns="146304" tIns="128016"/>
+          <a:lstStyle/>
+          <a:p>
+            <a:pPr algn="ctr">
+              <a:defRPr sz="1600" b="1">
+                <a:solidFill>
+                  <a:srgbClr val="FAFAFA"/>
+                </a:solidFill>
+                <a:latin typeface="Calibri"/>
+              </a:defRPr>
+            </a:pPr>
+            <a:r>
+              <a:t>3  Truth</a:t>
+            </a:r>
+          </a:p>
+          <a:p>
+            <a:pPr>
+              <a:defRPr sz="1300">
+                <a:solidFill>
+                  <a:srgbClr val="A1A1AA"/>
+                </a:solidFill>
+                <a:latin typeface="Calibri"/>
+              </a:defRPr>
+            </a:pPr>
+            <a:r>
+              <a:t>Map + GitHub APIs</a:t>
+            </a:r>
+          </a:p>
+        </p:txBody>
+      </p:sp>
+      <p:sp>
+        <p:nvSpPr>
+          <p:cNvPr id="10" name="Right Arrow 9"/>
           <p:cNvSpPr/>
           <p:nvPr/>
         </p:nvSpPr>
         <p:spPr>
           <a:xfrm>
-            <a:off x="8641080" y="2148840"/>
-            <a:ext cx="2377440" cy="1234440"/>
-          </a:xfrm>
-          <a:prstGeom prst="roundRect">
+            <a:off x="7114031" y="2834640"/>
+            <a:ext cx="201168" cy="256032"/>
+          </a:xfrm>
+          <a:prstGeom prst="rightArrow">
             <a:avLst/>
           </a:prstGeom>
           <a:solidFill>
-            <a:srgbClr val="1C1C1E"/>
+            <a:srgbClr val="F97316"/>
           </a:solidFill>
           <a:ln>
-            <a:solidFill>
-              <a:srgbClr val="F97316"/>
-            </a:solidFill>
+            <a:noFill/>
           </a:ln>
         </p:spPr>
         <p:style>
@@ -4643,15 +6042,61 @@
           <a:bodyPr rtlCol="0" anchor="ctr"/>
           <a:lstStyle/>
           <a:p>
+            <a:pPr algn="ctr"/>
+          </a:p>
+        </p:txBody>
+      </p:sp>
+      <p:sp>
+        <p:nvSpPr>
+          <p:cNvPr id="11" name="Rounded Rectangle 10"/>
+          <p:cNvSpPr/>
+          <p:nvPr/>
+        </p:nvSpPr>
+        <p:spPr>
+          <a:xfrm>
+            <a:off x="7360919" y="1965960"/>
+            <a:ext cx="2148840" cy="2103120"/>
+          </a:xfrm>
+          <a:prstGeom prst="roundRect">
+            <a:avLst/>
+          </a:prstGeom>
+          <a:solidFill>
+            <a:srgbClr val="18181B"/>
+          </a:solidFill>
+          <a:ln>
+            <a:solidFill>
+              <a:srgbClr val="3F3F46"/>
+            </a:solidFill>
+          </a:ln>
+        </p:spPr>
+        <p:style>
+          <a:lnRef idx="1">
+            <a:schemeClr val="accent1"/>
+          </a:lnRef>
+          <a:fillRef idx="3">
+            <a:schemeClr val="accent1"/>
+          </a:fillRef>
+          <a:effectRef idx="2">
+            <a:schemeClr val="accent1"/>
+          </a:effectRef>
+          <a:fontRef idx="minor">
+            <a:schemeClr val="lt1"/>
+          </a:fontRef>
+        </p:style>
+        <p:txBody>
+          <a:bodyPr rtlCol="0" anchor="ctr" wrap="square" lIns="164592" rIns="146304" tIns="128016"/>
+          <a:lstStyle/>
+          <a:p>
             <a:pPr algn="ctr">
-              <a:defRPr sz="1800" b="1">
+              <a:defRPr sz="1600" b="1">
                 <a:solidFill>
                   <a:srgbClr val="FAFAFA"/>
                 </a:solidFill>
-              </a:defRPr>
-            </a:pPr>
-            <a:r>
-              <a:t>You</a:t>
+                <a:latin typeface="Calibri"/>
+              </a:defRPr>
+            </a:pPr>
+            <a:r>
+              <a:t>4  Say</a:t>
             </a:r>
           </a:p>
           <a:p>
@@ -4660,24 +6105,136 @@
                 <a:solidFill>
                   <a:srgbClr val="A1A1AA"/>
                 </a:solidFill>
-              </a:defRPr>
-            </a:pPr>
-            <a:r>
-              <a:t>Yes to post</a:t>
-            </a:r>
-          </a:p>
-        </p:txBody>
-      </p:sp>
-      <p:sp>
-        <p:nvSpPr>
-          <p:cNvPr id="10" name="TextBox 9"/>
+                <a:latin typeface="Calibri"/>
+              </a:defRPr>
+            </a:pPr>
+            <a:r>
+              <a:t>Spoken + on-screen</a:t>
+            </a:r>
+          </a:p>
+        </p:txBody>
+      </p:sp>
+      <p:sp>
+        <p:nvSpPr>
+          <p:cNvPr id="12" name="Right Arrow 11"/>
+          <p:cNvSpPr/>
+          <p:nvPr/>
+        </p:nvSpPr>
+        <p:spPr>
+          <a:xfrm>
+            <a:off x="9445751" y="2834640"/>
+            <a:ext cx="201168" cy="256032"/>
+          </a:xfrm>
+          <a:prstGeom prst="rightArrow">
+            <a:avLst/>
+          </a:prstGeom>
+          <a:solidFill>
+            <a:srgbClr val="F97316"/>
+          </a:solidFill>
+          <a:ln>
+            <a:noFill/>
+          </a:ln>
+        </p:spPr>
+        <p:style>
+          <a:lnRef idx="1">
+            <a:schemeClr val="accent1"/>
+          </a:lnRef>
+          <a:fillRef idx="3">
+            <a:schemeClr val="accent1"/>
+          </a:fillRef>
+          <a:effectRef idx="2">
+            <a:schemeClr val="accent1"/>
+          </a:effectRef>
+          <a:fontRef idx="minor">
+            <a:schemeClr val="lt1"/>
+          </a:fontRef>
+        </p:style>
+        <p:txBody>
+          <a:bodyPr rtlCol="0" anchor="ctr"/>
+          <a:lstStyle/>
+          <a:p>
+            <a:pPr algn="ctr"/>
+          </a:p>
+        </p:txBody>
+      </p:sp>
+      <p:sp>
+        <p:nvSpPr>
+          <p:cNvPr id="13" name="Rounded Rectangle 12"/>
+          <p:cNvSpPr/>
+          <p:nvPr/>
+        </p:nvSpPr>
+        <p:spPr>
+          <a:xfrm>
+            <a:off x="9692640" y="1965960"/>
+            <a:ext cx="2148840" cy="2103120"/>
+          </a:xfrm>
+          <a:prstGeom prst="roundRect">
+            <a:avLst/>
+          </a:prstGeom>
+          <a:solidFill>
+            <a:srgbClr val="18181B"/>
+          </a:solidFill>
+          <a:ln>
+            <a:solidFill>
+              <a:srgbClr val="3F3F46"/>
+            </a:solidFill>
+          </a:ln>
+        </p:spPr>
+        <p:style>
+          <a:lnRef idx="1">
+            <a:schemeClr val="accent1"/>
+          </a:lnRef>
+          <a:fillRef idx="3">
+            <a:schemeClr val="accent1"/>
+          </a:fillRef>
+          <a:effectRef idx="2">
+            <a:schemeClr val="accent1"/>
+          </a:effectRef>
+          <a:fontRef idx="minor">
+            <a:schemeClr val="lt1"/>
+          </a:fontRef>
+        </p:style>
+        <p:txBody>
+          <a:bodyPr rtlCol="0" anchor="ctr" wrap="square" lIns="164592" rIns="146304" tIns="128016"/>
+          <a:lstStyle/>
+          <a:p>
+            <a:pPr algn="ctr">
+              <a:defRPr sz="1600" b="1">
+                <a:solidFill>
+                  <a:srgbClr val="FAFAFA"/>
+                </a:solidFill>
+                <a:latin typeface="Calibri"/>
+              </a:defRPr>
+            </a:pPr>
+            <a:r>
+              <a:t>5  Yes</a:t>
+            </a:r>
+          </a:p>
+          <a:p>
+            <a:pPr>
+              <a:defRPr sz="1300">
+                <a:solidFill>
+                  <a:srgbClr val="A1A1AA"/>
+                </a:solidFill>
+                <a:latin typeface="Calibri"/>
+              </a:defRPr>
+            </a:pPr>
+            <a:r>
+              <a:t>Only then we post</a:t>
+            </a:r>
+          </a:p>
+        </p:txBody>
+      </p:sp>
+      <p:sp>
+        <p:nvSpPr>
+          <p:cNvPr id="14" name="TextBox 13"/>
           <p:cNvSpPr txBox="1"/>
           <p:nvPr/>
         </p:nvSpPr>
         <p:spPr>
           <a:xfrm>
-            <a:off x="685800" y="3794760"/>
-            <a:ext cx="10515600" cy="1097280"/>
+            <a:off x="502920" y="4389120"/>
+            <a:ext cx="10972800" cy="1280160"/>
           </a:xfrm>
           <a:prstGeom prst="rect">
             <a:avLst/>
@@ -4685,20 +6242,19 @@
           <a:noFill/>
         </p:spPr>
         <p:txBody>
-          <a:bodyPr wrap="none">
-            <a:spAutoFit/>
-          </a:bodyPr>
-          <a:lstStyle/>
-          <a:p>
-            <a:pPr>
-              <a:defRPr sz="1600">
+          <a:bodyPr wrap="square"/>
+          <a:lstStyle/>
+          <a:p>
+            <a:pPr algn="l">
+              <a:defRPr sz="1600" b="0">
                 <a:solidFill>
                   <a:srgbClr val="A1A1AA"/>
                 </a:solidFill>
-              </a:defRPr>
-            </a:pPr>
-            <a:r>
-              <a:t>Jev picks map tools · Gateway loop for multi-step GitHub · Writes never auto-post</a:t>
+                <a:latin typeface="Calibri"/>
+              </a:defRPr>
+            </a:pPr>
+            <a:r>
+              <a:t>Direct phrases (yes / no / “comment on issue 2”) never wait on a model. Multi-step triage can use an 8-turn tool loop. Map questions stay on the orchestrator.</a:t>
             </a:r>
           </a:p>
         </p:txBody>
@@ -4714,14 +6270,6 @@
 <file path=ppt/slides/slide8.xml><?xml version="1.0" encoding="utf-8"?>
 <p:sld xmlns:a="http://schemas.openxmlformats.org/drawingml/2006/main" xmlns:p="http://schemas.openxmlformats.org/presentationml/2006/main" xmlns:r="http://schemas.openxmlformats.org/officeDocument/2006/relationships">
   <p:cSld>
-    <p:bg>
-      <p:bgPr>
-        <a:solidFill>
-          <a:srgbClr val="0A0A0A"/>
-        </a:solidFill>
-        <a:effectLst/>
-      </p:bgPr>
-    </p:bg>
     <p:spTree>
       <p:nvGrpSpPr>
         <p:cNvPr id="1" name=""/>
@@ -4731,14 +6279,57 @@
       <p:grpSpPr/>
       <p:sp>
         <p:nvSpPr>
-          <p:cNvPr id="2" name="TextBox 1"/>
+          <p:cNvPr id="2" name="Rectangle 1"/>
+          <p:cNvSpPr/>
+          <p:nvPr/>
+        </p:nvSpPr>
+        <p:spPr>
+          <a:xfrm>
+            <a:off x="0" y="0"/>
+            <a:ext cx="12191695" cy="6858000"/>
+          </a:xfrm>
+          <a:prstGeom prst="rect">
+            <a:avLst/>
+          </a:prstGeom>
+          <a:solidFill>
+            <a:srgbClr val="0B0B0C"/>
+          </a:solidFill>
+          <a:ln>
+            <a:noFill/>
+          </a:ln>
+        </p:spPr>
+        <p:style>
+          <a:lnRef idx="1">
+            <a:schemeClr val="accent1"/>
+          </a:lnRef>
+          <a:fillRef idx="3">
+            <a:schemeClr val="accent1"/>
+          </a:fillRef>
+          <a:effectRef idx="2">
+            <a:schemeClr val="accent1"/>
+          </a:effectRef>
+          <a:fontRef idx="minor">
+            <a:schemeClr val="lt1"/>
+          </a:fontRef>
+        </p:style>
+        <p:txBody>
+          <a:bodyPr rtlCol="0" anchor="ctr"/>
+          <a:lstStyle/>
+          <a:p>
+            <a:pPr algn="ctr"/>
+          </a:p>
+        </p:txBody>
+      </p:sp>
+      <p:sp>
+        <p:nvSpPr>
+          <p:cNvPr id="3" name="TextBox 2"/>
           <p:cNvSpPr txBox="1"/>
           <p:nvPr/>
         </p:nvSpPr>
         <p:spPr>
           <a:xfrm>
-            <a:off x="685800" y="502920"/>
-            <a:ext cx="10515600" cy="1280160"/>
+            <a:off x="502920" y="292608"/>
+            <a:ext cx="7315200" cy="292608"/>
           </a:xfrm>
           <a:prstGeom prst="rect">
             <a:avLst/>
@@ -4746,34 +6337,339 @@
           <a:noFill/>
         </p:spPr>
         <p:txBody>
-          <a:bodyPr wrap="square">
-            <a:spAutoFit/>
-          </a:bodyPr>
+          <a:bodyPr wrap="square"/>
+          <a:lstStyle/>
+          <a:p>
+            <a:pPr algn="l">
+              <a:defRPr sz="1200" b="1">
+                <a:solidFill>
+                  <a:srgbClr val="F97316"/>
+                </a:solidFill>
+                <a:latin typeface="Calibri"/>
+              </a:defRPr>
+            </a:pPr>
+            <a:r>
+              <a:t>ARCHITECTURE</a:t>
+            </a:r>
+          </a:p>
+        </p:txBody>
+      </p:sp>
+      <p:sp>
+        <p:nvSpPr>
+          <p:cNvPr id="4" name="TextBox 3"/>
+          <p:cNvSpPr txBox="1"/>
+          <p:nvPr/>
+        </p:nvSpPr>
+        <p:spPr>
+          <a:xfrm>
+            <a:off x="502920" y="566928"/>
+            <a:ext cx="11155680" cy="640080"/>
+          </a:xfrm>
+          <a:prstGeom prst="rect">
+            <a:avLst/>
+          </a:prstGeom>
+          <a:noFill/>
+        </p:spPr>
+        <p:txBody>
+          <a:bodyPr wrap="square"/>
           <a:lstStyle/>
           <a:p>
             <a:pPr algn="l">
               <a:defRPr sz="3200" b="1">
                 <a:solidFill>
-                  <a:srgbClr val="F97316"/>
-                </a:solidFill>
-              </a:defRPr>
-            </a:pPr>
-            <a:r>
-              <a:t>Human in the loop</a:t>
-            </a:r>
-          </a:p>
-        </p:txBody>
-      </p:sp>
-      <p:sp>
-        <p:nvSpPr>
-          <p:cNvPr id="3" name="TextBox 2"/>
+                  <a:srgbClr val="FAFAFA"/>
+                </a:solidFill>
+                <a:latin typeface="Calibri"/>
+              </a:defRPr>
+            </a:pPr>
+            <a:r>
+              <a:t>Browser talks. Server decides. GitHub waits.</a:t>
+            </a:r>
+          </a:p>
+        </p:txBody>
+      </p:sp>
+      <p:sp>
+        <p:nvSpPr>
+          <p:cNvPr id="5" name="Rounded Rectangle 4"/>
+          <p:cNvSpPr/>
+          <p:nvPr/>
+        </p:nvSpPr>
+        <p:spPr>
+          <a:xfrm>
+            <a:off x="457200" y="1645920"/>
+            <a:ext cx="2651760" cy="3291840"/>
+          </a:xfrm>
+          <a:prstGeom prst="roundRect">
+            <a:avLst/>
+          </a:prstGeom>
+          <a:solidFill>
+            <a:srgbClr val="18181B"/>
+          </a:solidFill>
+          <a:ln>
+            <a:solidFill>
+              <a:srgbClr val="3F3F46"/>
+            </a:solidFill>
+          </a:ln>
+        </p:spPr>
+        <p:style>
+          <a:lnRef idx="1">
+            <a:schemeClr val="accent1"/>
+          </a:lnRef>
+          <a:fillRef idx="3">
+            <a:schemeClr val="accent1"/>
+          </a:fillRef>
+          <a:effectRef idx="2">
+            <a:schemeClr val="accent1"/>
+          </a:effectRef>
+          <a:fontRef idx="minor">
+            <a:schemeClr val="lt1"/>
+          </a:fontRef>
+        </p:style>
+        <p:txBody>
+          <a:bodyPr rtlCol="0" anchor="ctr" wrap="square" lIns="164592" rIns="146304" tIns="128016"/>
+          <a:lstStyle/>
+          <a:p>
+            <a:pPr algn="ctr">
+              <a:defRPr sz="1600" b="1">
+                <a:solidFill>
+                  <a:srgbClr val="FAFAFA"/>
+                </a:solidFill>
+                <a:latin typeface="Calibri"/>
+              </a:defRPr>
+            </a:pPr>
+            <a:r>
+              <a:t>Browser</a:t>
+            </a:r>
+          </a:p>
+          <a:p>
+            <a:pPr>
+              <a:defRPr sz="1300">
+                <a:solidFill>
+                  <a:srgbClr val="A1A1AA"/>
+                </a:solidFill>
+                <a:latin typeface="Calibri"/>
+              </a:defRPr>
+            </a:pPr>
+            <a:r>
+              <a:t>D3 map · hold-to-talk · Ask · markdown links</a:t>
+            </a:r>
+          </a:p>
+        </p:txBody>
+      </p:sp>
+      <p:sp>
+        <p:nvSpPr>
+          <p:cNvPr id="6" name="Rounded Rectangle 5"/>
+          <p:cNvSpPr/>
+          <p:nvPr/>
+        </p:nvSpPr>
+        <p:spPr>
+          <a:xfrm>
+            <a:off x="3246120" y="1645920"/>
+            <a:ext cx="2651760" cy="3291840"/>
+          </a:xfrm>
+          <a:prstGeom prst="roundRect">
+            <a:avLst/>
+          </a:prstGeom>
+          <a:solidFill>
+            <a:srgbClr val="18181B"/>
+          </a:solidFill>
+          <a:ln>
+            <a:solidFill>
+              <a:srgbClr val="3F3F46"/>
+            </a:solidFill>
+          </a:ln>
+        </p:spPr>
+        <p:style>
+          <a:lnRef idx="1">
+            <a:schemeClr val="accent1"/>
+          </a:lnRef>
+          <a:fillRef idx="3">
+            <a:schemeClr val="accent1"/>
+          </a:fillRef>
+          <a:effectRef idx="2">
+            <a:schemeClr val="accent1"/>
+          </a:effectRef>
+          <a:fontRef idx="minor">
+            <a:schemeClr val="lt1"/>
+          </a:fontRef>
+        </p:style>
+        <p:txBody>
+          <a:bodyPr rtlCol="0" anchor="ctr" wrap="square" lIns="164592" rIns="146304" tIns="128016"/>
+          <a:lstStyle/>
+          <a:p>
+            <a:pPr algn="ctr">
+              <a:defRPr sz="1600" b="1">
+                <a:solidFill>
+                  <a:srgbClr val="FAFAFA"/>
+                </a:solidFill>
+                <a:latin typeface="Calibri"/>
+              </a:defRPr>
+            </a:pPr>
+            <a:r>
+              <a:t>Voice</a:t>
+            </a:r>
+          </a:p>
+          <a:p>
+            <a:pPr>
+              <a:defRPr sz="1300">
+                <a:solidFill>
+                  <a:srgbClr val="A1A1AA"/>
+                </a:solidFill>
+                <a:latin typeface="Calibri"/>
+              </a:defRPr>
+            </a:pPr>
+            <a:r>
+              <a:t>AssemblyAI Voice Agent · friday_turn</a:t>
+            </a:r>
+          </a:p>
+        </p:txBody>
+      </p:sp>
+      <p:sp>
+        <p:nvSpPr>
+          <p:cNvPr id="7" name="Rounded Rectangle 6"/>
+          <p:cNvSpPr/>
+          <p:nvPr/>
+        </p:nvSpPr>
+        <p:spPr>
+          <a:xfrm>
+            <a:off x="6035040" y="1645920"/>
+            <a:ext cx="2651760" cy="3291840"/>
+          </a:xfrm>
+          <a:prstGeom prst="roundRect">
+            <a:avLst/>
+          </a:prstGeom>
+          <a:solidFill>
+            <a:srgbClr val="18181B"/>
+          </a:solidFill>
+          <a:ln>
+            <a:solidFill>
+              <a:srgbClr val="3F3F46"/>
+            </a:solidFill>
+          </a:ln>
+        </p:spPr>
+        <p:style>
+          <a:lnRef idx="1">
+            <a:schemeClr val="accent1"/>
+          </a:lnRef>
+          <a:fillRef idx="3">
+            <a:schemeClr val="accent1"/>
+          </a:fillRef>
+          <a:effectRef idx="2">
+            <a:schemeClr val="accent1"/>
+          </a:effectRef>
+          <a:fontRef idx="minor">
+            <a:schemeClr val="lt1"/>
+          </a:fontRef>
+        </p:style>
+        <p:txBody>
+          <a:bodyPr rtlCol="0" anchor="ctr" wrap="square" lIns="164592" rIns="146304" tIns="128016"/>
+          <a:lstStyle/>
+          <a:p>
+            <a:pPr algn="ctr">
+              <a:defRPr sz="1600" b="1">
+                <a:solidFill>
+                  <a:srgbClr val="FAFAFA"/>
+                </a:solidFill>
+                <a:latin typeface="Calibri"/>
+              </a:defRPr>
+            </a:pPr>
+            <a:r>
+              <a:t>Friday</a:t>
+            </a:r>
+          </a:p>
+          <a:p>
+            <a:pPr>
+              <a:defRPr sz="1300">
+                <a:solidFill>
+                  <a:srgbClr val="A1A1AA"/>
+                </a:solidFill>
+                <a:latin typeface="Calibri"/>
+              </a:defRPr>
+            </a:pPr>
+            <a:r>
+              <a:t>chat.turn · orchestrator · review gate</a:t>
+            </a:r>
+          </a:p>
+        </p:txBody>
+      </p:sp>
+      <p:sp>
+        <p:nvSpPr>
+          <p:cNvPr id="8" name="Rounded Rectangle 7"/>
+          <p:cNvSpPr/>
+          <p:nvPr/>
+        </p:nvSpPr>
+        <p:spPr>
+          <a:xfrm>
+            <a:off x="8823960" y="1645920"/>
+            <a:ext cx="2651760" cy="3291840"/>
+          </a:xfrm>
+          <a:prstGeom prst="roundRect">
+            <a:avLst/>
+          </a:prstGeom>
+          <a:solidFill>
+            <a:srgbClr val="18181B"/>
+          </a:solidFill>
+          <a:ln>
+            <a:solidFill>
+              <a:srgbClr val="3F3F46"/>
+            </a:solidFill>
+          </a:ln>
+        </p:spPr>
+        <p:style>
+          <a:lnRef idx="1">
+            <a:schemeClr val="accent1"/>
+          </a:lnRef>
+          <a:fillRef idx="3">
+            <a:schemeClr val="accent1"/>
+          </a:fillRef>
+          <a:effectRef idx="2">
+            <a:schemeClr val="accent1"/>
+          </a:effectRef>
+          <a:fontRef idx="minor">
+            <a:schemeClr val="lt1"/>
+          </a:fontRef>
+        </p:style>
+        <p:txBody>
+          <a:bodyPr rtlCol="0" anchor="ctr" wrap="square" lIns="164592" rIns="146304" tIns="128016"/>
+          <a:lstStyle/>
+          <a:p>
+            <a:pPr algn="ctr">
+              <a:defRPr sz="1600" b="1">
+                <a:solidFill>
+                  <a:srgbClr val="FAFAFA"/>
+                </a:solidFill>
+                <a:latin typeface="Calibri"/>
+              </a:defRPr>
+            </a:pPr>
+            <a:r>
+              <a:t>Outside</a:t>
+            </a:r>
+          </a:p>
+          <a:p>
+            <a:pPr>
+              <a:defRPr sz="1300">
+                <a:solidFill>
+                  <a:srgbClr val="A1A1AA"/>
+                </a:solidFill>
+                <a:latin typeface="Calibri"/>
+              </a:defRPr>
+            </a:pPr>
+            <a:r>
+              <a:t>GitHub · LLM Gateway · optional Jev / K2</a:t>
+            </a:r>
+          </a:p>
+        </p:txBody>
+      </p:sp>
+      <p:sp>
+        <p:nvSpPr>
+          <p:cNvPr id="9" name="TextBox 8"/>
           <p:cNvSpPr txBox="1"/>
           <p:nvPr/>
         </p:nvSpPr>
         <p:spPr>
           <a:xfrm>
-            <a:off x="777240" y="1325880"/>
-            <a:ext cx="10241280" cy="4754880"/>
+            <a:off x="502920" y="5303520"/>
+            <a:ext cx="10972800" cy="731520"/>
           </a:xfrm>
           <a:prstGeom prst="rect">
             <a:avLst/>
@@ -4781,68 +6677,19 @@
           <a:noFill/>
         </p:spPr>
         <p:txBody>
-          <a:bodyPr wrap="square">
-            <a:spAutoFit/>
-          </a:bodyPr>
-          <a:lstStyle/>
-          <a:p>
-            <a:pPr>
-              <a:spcAft>
-                <a:spcPts val="1400"/>
-              </a:spcAft>
-              <a:defRPr sz="2000">
+          <a:bodyPr wrap="square"/>
+          <a:lstStyle/>
+          <a:p>
+            <a:pPr algn="l">
+              <a:defRPr sz="1600" b="0">
                 <a:solidFill>
                   <a:srgbClr val="FAFAFA"/>
                 </a:solidFill>
-              </a:defRPr>
-            </a:pPr>
-            <a:r>
-              <a:t>create_issue / add_comment → draft only</a:t>
-            </a:r>
-          </a:p>
-          <a:p>
-            <a:pPr>
-              <a:spcAft>
-                <a:spcPts val="1400"/>
-              </a:spcAft>
-              <a:defRPr sz="2000">
-                <a:solidFill>
-                  <a:srgbClr val="FAFAFA"/>
-                </a:solidFill>
-              </a:defRPr>
-            </a:pPr>
-            <a:r>
-              <a:t>Separate turn: yes → confirm_write posts</a:t>
-            </a:r>
-          </a:p>
-          <a:p>
-            <a:pPr>
-              <a:spcAft>
-                <a:spcPts val="1400"/>
-              </a:spcAft>
-              <a:defRPr sz="2000">
-                <a:solidFill>
-                  <a:srgbClr val="FAFAFA"/>
-                </a:solidFill>
-              </a:defRPr>
-            </a:pPr>
-            <a:r>
-              <a:t>No silent auto-merge, no drive-by comments</a:t>
-            </a:r>
-          </a:p>
-          <a:p>
-            <a:pPr>
-              <a:spcAft>
-                <a:spcPts val="1400"/>
-              </a:spcAft>
-              <a:defRPr sz="2000">
-                <a:solidFill>
-                  <a:srgbClr val="FAFAFA"/>
-                </a:solidFill>
-              </a:defRPr>
-            </a:pPr>
-            <a:r>
-              <a:t>OAuth + tokens stay server-side</a:t>
+                <a:latin typeface="Calibri"/>
+              </a:defRPr>
+            </a:pPr>
+            <a:r>
+              <a:t>Live: https://friday-voice-agent-147606977567.us-central1.run.app   ·   Cloud Run, HTTPS, OAuth callback on the service URL.</a:t>
             </a:r>
           </a:p>
         </p:txBody>
@@ -4858,14 +6705,6 @@
 <file path=ppt/slides/slide9.xml><?xml version="1.0" encoding="utf-8"?>
 <p:sld xmlns:a="http://schemas.openxmlformats.org/drawingml/2006/main" xmlns:p="http://schemas.openxmlformats.org/presentationml/2006/main" xmlns:r="http://schemas.openxmlformats.org/officeDocument/2006/relationships">
   <p:cSld>
-    <p:bg>
-      <p:bgPr>
-        <a:solidFill>
-          <a:srgbClr val="0A0A0A"/>
-        </a:solidFill>
-        <a:effectLst/>
-      </p:bgPr>
-    </p:bg>
     <p:spTree>
       <p:nvGrpSpPr>
         <p:cNvPr id="1" name=""/>
@@ -4875,14 +6714,57 @@
       <p:grpSpPr/>
       <p:sp>
         <p:nvSpPr>
-          <p:cNvPr id="2" name="TextBox 1"/>
+          <p:cNvPr id="2" name="Rectangle 1"/>
+          <p:cNvSpPr/>
+          <p:nvPr/>
+        </p:nvSpPr>
+        <p:spPr>
+          <a:xfrm>
+            <a:off x="0" y="0"/>
+            <a:ext cx="12191695" cy="6858000"/>
+          </a:xfrm>
+          <a:prstGeom prst="rect">
+            <a:avLst/>
+          </a:prstGeom>
+          <a:solidFill>
+            <a:srgbClr val="0B0B0C"/>
+          </a:solidFill>
+          <a:ln>
+            <a:noFill/>
+          </a:ln>
+        </p:spPr>
+        <p:style>
+          <a:lnRef idx="1">
+            <a:schemeClr val="accent1"/>
+          </a:lnRef>
+          <a:fillRef idx="3">
+            <a:schemeClr val="accent1"/>
+          </a:fillRef>
+          <a:effectRef idx="2">
+            <a:schemeClr val="accent1"/>
+          </a:effectRef>
+          <a:fontRef idx="minor">
+            <a:schemeClr val="lt1"/>
+          </a:fontRef>
+        </p:style>
+        <p:txBody>
+          <a:bodyPr rtlCol="0" anchor="ctr"/>
+          <a:lstStyle/>
+          <a:p>
+            <a:pPr algn="ctr"/>
+          </a:p>
+        </p:txBody>
+      </p:sp>
+      <p:sp>
+        <p:nvSpPr>
+          <p:cNvPr id="3" name="TextBox 2"/>
           <p:cNvSpPr txBox="1"/>
           <p:nvPr/>
         </p:nvSpPr>
         <p:spPr>
           <a:xfrm>
-            <a:off x="685800" y="502920"/>
-            <a:ext cx="10515600" cy="1280160"/>
+            <a:off x="502920" y="292608"/>
+            <a:ext cx="7315200" cy="292608"/>
           </a:xfrm>
           <a:prstGeom prst="rect">
             <a:avLst/>
@@ -4890,103 +6772,257 @@
           <a:noFill/>
         </p:spPr>
         <p:txBody>
-          <a:bodyPr wrap="square">
-            <a:spAutoFit/>
-          </a:bodyPr>
+          <a:bodyPr wrap="square"/>
+          <a:lstStyle/>
+          <a:p>
+            <a:pPr algn="l">
+              <a:defRPr sz="1200" b="1">
+                <a:solidFill>
+                  <a:srgbClr val="F97316"/>
+                </a:solidFill>
+                <a:latin typeface="Calibri"/>
+              </a:defRPr>
+            </a:pPr>
+            <a:r>
+              <a:t>SAFETY</a:t>
+            </a:r>
+          </a:p>
+        </p:txBody>
+      </p:sp>
+      <p:sp>
+        <p:nvSpPr>
+          <p:cNvPr id="4" name="TextBox 3"/>
+          <p:cNvSpPr txBox="1"/>
+          <p:nvPr/>
+        </p:nvSpPr>
+        <p:spPr>
+          <a:xfrm>
+            <a:off x="502920" y="566928"/>
+            <a:ext cx="11155680" cy="640080"/>
+          </a:xfrm>
+          <a:prstGeom prst="rect">
+            <a:avLst/>
+          </a:prstGeom>
+          <a:noFill/>
+        </p:spPr>
+        <p:txBody>
+          <a:bodyPr wrap="square"/>
           <a:lstStyle/>
           <a:p>
             <a:pPr algn="l">
               <a:defRPr sz="3200" b="1">
                 <a:solidFill>
-                  <a:srgbClr val="F97316"/>
-                </a:solidFill>
-              </a:defRPr>
-            </a:pPr>
-            <a:r>
-              <a:t>Judgment, not vibes</a:t>
-            </a:r>
-          </a:p>
-        </p:txBody>
-      </p:sp>
-      <p:sp>
-        <p:nvSpPr>
-          <p:cNvPr id="3" name="TextBox 2"/>
-          <p:cNvSpPr txBox="1"/>
-          <p:nvPr/>
-        </p:nvSpPr>
-        <p:spPr>
-          <a:xfrm>
-            <a:off x="777240" y="1325880"/>
-            <a:ext cx="10241280" cy="4754880"/>
-          </a:xfrm>
-          <a:prstGeom prst="rect">
-            <a:avLst/>
-          </a:prstGeom>
-          <a:noFill/>
-        </p:spPr>
-        <p:txBody>
-          <a:bodyPr wrap="square">
-            <a:spAutoFit/>
-          </a:bodyPr>
-          <a:lstStyle/>
+                  <a:srgbClr val="FAFAFA"/>
+                </a:solidFill>
+                <a:latin typeface="Calibri"/>
+              </a:defRPr>
+            </a:pPr>
+            <a:r>
+              <a:t>Draft is not a write.</a:t>
+            </a:r>
+          </a:p>
+        </p:txBody>
+      </p:sp>
+      <p:sp>
+        <p:nvSpPr>
+          <p:cNvPr id="5" name="Rounded Rectangle 4"/>
+          <p:cNvSpPr/>
+          <p:nvPr/>
+        </p:nvSpPr>
+        <p:spPr>
+          <a:xfrm>
+            <a:off x="502920" y="1645920"/>
+            <a:ext cx="3566160" cy="4023360"/>
+          </a:xfrm>
+          <a:prstGeom prst="roundRect">
+            <a:avLst/>
+          </a:prstGeom>
+          <a:solidFill>
+            <a:srgbClr val="18181B"/>
+          </a:solidFill>
+          <a:ln>
+            <a:solidFill>
+              <a:srgbClr val="3F3F46"/>
+            </a:solidFill>
+          </a:ln>
+        </p:spPr>
+        <p:style>
+          <a:lnRef idx="1">
+            <a:schemeClr val="accent1"/>
+          </a:lnRef>
+          <a:fillRef idx="3">
+            <a:schemeClr val="accent1"/>
+          </a:fillRef>
+          <a:effectRef idx="2">
+            <a:schemeClr val="accent1"/>
+          </a:effectRef>
+          <a:fontRef idx="minor">
+            <a:schemeClr val="lt1"/>
+          </a:fontRef>
+        </p:style>
+        <p:txBody>
+          <a:bodyPr rtlCol="0" anchor="ctr" wrap="square" lIns="164592" rIns="146304" tIns="128016"/>
+          <a:lstStyle/>
+          <a:p>
+            <a:pPr algn="ctr">
+              <a:defRPr sz="1600" b="1">
+                <a:solidFill>
+                  <a:srgbClr val="FAFAFA"/>
+                </a:solidFill>
+                <a:latin typeface="Calibri"/>
+              </a:defRPr>
+            </a:pPr>
+            <a:r>
+              <a:t>Stage</a:t>
+            </a:r>
+          </a:p>
           <a:p>
             <a:pPr>
-              <a:spcAft>
-                <a:spcPts val="1400"/>
-              </a:spcAft>
-              <a:defRPr sz="2000">
+              <a:defRPr sz="1300">
+                <a:solidFill>
+                  <a:srgbClr val="A1A1AA"/>
+                </a:solidFill>
+                <a:latin typeface="Calibri"/>
+              </a:defRPr>
+            </a:pPr>
+            <a:r>
+              <a:t>create_issue and add_comment only prepare a draft. Same sentence cannot also say yes.</a:t>
+            </a:r>
+          </a:p>
+        </p:txBody>
+      </p:sp>
+      <p:sp>
+        <p:nvSpPr>
+          <p:cNvPr id="6" name="Rounded Rectangle 5"/>
+          <p:cNvSpPr/>
+          <p:nvPr/>
+        </p:nvSpPr>
+        <p:spPr>
+          <a:xfrm>
+            <a:off x="4297680" y="1645920"/>
+            <a:ext cx="3566160" cy="4023360"/>
+          </a:xfrm>
+          <a:prstGeom prst="roundRect">
+            <a:avLst/>
+          </a:prstGeom>
+          <a:solidFill>
+            <a:srgbClr val="18181B"/>
+          </a:solidFill>
+          <a:ln>
+            <a:solidFill>
+              <a:srgbClr val="3F3F46"/>
+            </a:solidFill>
+          </a:ln>
+        </p:spPr>
+        <p:style>
+          <a:lnRef idx="1">
+            <a:schemeClr val="accent1"/>
+          </a:lnRef>
+          <a:fillRef idx="3">
+            <a:schemeClr val="accent1"/>
+          </a:fillRef>
+          <a:effectRef idx="2">
+            <a:schemeClr val="accent1"/>
+          </a:effectRef>
+          <a:fontRef idx="minor">
+            <a:schemeClr val="lt1"/>
+          </a:fontRef>
+        </p:style>
+        <p:txBody>
+          <a:bodyPr rtlCol="0" anchor="ctr" wrap="square" lIns="164592" rIns="146304" tIns="128016"/>
+          <a:lstStyle/>
+          <a:p>
+            <a:pPr algn="ctr">
+              <a:defRPr sz="1600" b="1">
                 <a:solidFill>
                   <a:srgbClr val="FAFAFA"/>
                 </a:solidFill>
-              </a:defRPr>
-            </a:pPr>
-            <a:r>
-              <a:t>Jev: confident tool routing for map questions</a:t>
+                <a:latin typeface="Calibri"/>
+              </a:defRPr>
+            </a:pPr>
+            <a:r>
+              <a:t>Confirm</a:t>
             </a:r>
           </a:p>
           <a:p>
             <a:pPr>
-              <a:spcAft>
-                <a:spcPts val="1400"/>
-              </a:spcAft>
-              <a:defRPr sz="2000">
+              <a:defRPr sz="1300">
+                <a:solidFill>
+                  <a:srgbClr val="A1A1AA"/>
+                </a:solidFill>
+                <a:latin typeface="Calibri"/>
+              </a:defRPr>
+            </a:pPr>
+            <a:r>
+              <a:t>A later turn of yes calls confirm_write. No cancels. Tokens never ship to the browser.</a:t>
+            </a:r>
+          </a:p>
+        </p:txBody>
+      </p:sp>
+      <p:sp>
+        <p:nvSpPr>
+          <p:cNvPr id="7" name="Rounded Rectangle 6"/>
+          <p:cNvSpPr/>
+          <p:nvPr/>
+        </p:nvSpPr>
+        <p:spPr>
+          <a:xfrm>
+            <a:off x="8092440" y="1645920"/>
+            <a:ext cx="3566160" cy="4023360"/>
+          </a:xfrm>
+          <a:prstGeom prst="roundRect">
+            <a:avLst/>
+          </a:prstGeom>
+          <a:solidFill>
+            <a:srgbClr val="18181B"/>
+          </a:solidFill>
+          <a:ln>
+            <a:solidFill>
+              <a:srgbClr val="3F3F46"/>
+            </a:solidFill>
+          </a:ln>
+        </p:spPr>
+        <p:style>
+          <a:lnRef idx="1">
+            <a:schemeClr val="accent1"/>
+          </a:lnRef>
+          <a:fillRef idx="3">
+            <a:schemeClr val="accent1"/>
+          </a:fillRef>
+          <a:effectRef idx="2">
+            <a:schemeClr val="accent1"/>
+          </a:effectRef>
+          <a:fontRef idx="minor">
+            <a:schemeClr val="lt1"/>
+          </a:fontRef>
+        </p:style>
+        <p:txBody>
+          <a:bodyPr rtlCol="0" anchor="ctr" wrap="square" lIns="164592" rIns="146304" tIns="128016"/>
+          <a:lstStyle/>
+          <a:p>
+            <a:pPr algn="ctr">
+              <a:defRPr sz="1600" b="1">
                 <a:solidFill>
                   <a:srgbClr val="FAFAFA"/>
                 </a:solidFill>
-              </a:defRPr>
-            </a:pPr>
-            <a:r>
-              <a:t>Review gate: structured safe-to-merge narrative</a:t>
+                <a:latin typeface="Calibri"/>
+              </a:defRPr>
+            </a:pPr>
+            <a:r>
+              <a:t>Refuse</a:t>
             </a:r>
           </a:p>
           <a:p>
             <a:pPr>
-              <a:spcAft>
-                <a:spcPts val="1400"/>
-              </a:spcAft>
-              <a:defRPr sz="2000">
-                <a:solidFill>
-                  <a:srgbClr val="FAFAFA"/>
-                </a:solidFill>
-              </a:defRPr>
-            </a:pPr>
-            <a:r>
-              <a:t>Escalate when confidence is low (Vertex / K2)</a:t>
-            </a:r>
-          </a:p>
-          <a:p>
-            <a:pPr>
-              <a:spcAft>
-                <a:spcPts val="1400"/>
-              </a:spcAft>
-              <a:defRPr sz="2000">
-                <a:solidFill>
-                  <a:srgbClr val="FAFAFA"/>
-                </a:solidFill>
-              </a:defRPr>
-            </a:pPr>
-            <a:r>
-              <a:t>Honest give-up when the repo cannot answer</a:t>
+              <a:defRPr sz="1300">
+                <a:solidFill>
+                  <a:srgbClr val="A1A1AA"/>
+                </a:solidFill>
+                <a:latin typeface="Calibri"/>
+              </a:defRPr>
+            </a:pPr>
+            <a:r>
+              <a:t>Friday will not close or delete issues or pull requests. Give up honestly when the repo has no answer.</a:t>
             </a:r>
           </a:p>
         </p:txBody>
